--- a/20261031_2.pptx
+++ b/20261031_2.pptx
@@ -5,7 +5,7 @@
     <p:sldMasterId id="2147483648" r:id="rId1"/>
   </p:sldMasterIdLst>
   <p:notesMasterIdLst>
-    <p:notesMasterId r:id="rId32"/>
+    <p:notesMasterId r:id="rId29"/>
   </p:notesMasterIdLst>
   <p:sldIdLst>
     <p:sldId id="457" r:id="rId2"/>
@@ -35,9 +35,6 @@
     <p:sldId id="558" r:id="rId26"/>
     <p:sldId id="559" r:id="rId27"/>
     <p:sldId id="560" r:id="rId28"/>
-    <p:sldId id="530" r:id="rId29"/>
-    <p:sldId id="257" r:id="rId30"/>
-    <p:sldId id="256" r:id="rId31"/>
   </p:sldIdLst>
   <p:sldSz cx="12192000" cy="6858000"/>
   <p:notesSz cx="6858000" cy="9144000"/>
@@ -226,7 +223,7 @@
           <a:p>
             <a:fld id="{CCCCFB1C-7F6E-CC48-8B12-2D5A9AE1C913}" type="datetimeFigureOut">
               <a:rPr lang="en-US" smtClean="0"/>
-              <a:t>10/29/26</a:t>
+              <a:t>10/30/26</a:t>
             </a:fld>
             <a:endParaRPr lang="en-US"/>
           </a:p>
@@ -3896,7 +3893,7 @@
           <a:p>
             <a:fld id="{069363D2-3164-4145-A578-C91A7CE0BB59}" type="datetimeFigureOut">
               <a:rPr lang="en-US" smtClean="0"/>
-              <a:t>10/29/26</a:t>
+              <a:t>10/30/26</a:t>
             </a:fld>
             <a:endParaRPr lang="en-US"/>
           </a:p>
@@ -4094,7 +4091,7 @@
           <a:p>
             <a:fld id="{069363D2-3164-4145-A578-C91A7CE0BB59}" type="datetimeFigureOut">
               <a:rPr lang="en-US" smtClean="0"/>
-              <a:t>10/29/26</a:t>
+              <a:t>10/30/26</a:t>
             </a:fld>
             <a:endParaRPr lang="en-US"/>
           </a:p>
@@ -4302,7 +4299,7 @@
           <a:p>
             <a:fld id="{069363D2-3164-4145-A578-C91A7CE0BB59}" type="datetimeFigureOut">
               <a:rPr lang="en-US" smtClean="0"/>
-              <a:t>10/29/26</a:t>
+              <a:t>10/30/26</a:t>
             </a:fld>
             <a:endParaRPr lang="en-US"/>
           </a:p>
@@ -4522,7 +4519,7 @@
           <a:p>
             <a:fld id="{069363D2-3164-4145-A578-C91A7CE0BB59}" type="datetimeFigureOut">
               <a:rPr lang="en-US" smtClean="0"/>
-              <a:t>10/29/26</a:t>
+              <a:t>10/30/26</a:t>
             </a:fld>
             <a:endParaRPr lang="en-US"/>
           </a:p>
@@ -4720,7 +4717,7 @@
           <a:p>
             <a:fld id="{069363D2-3164-4145-A578-C91A7CE0BB59}" type="datetimeFigureOut">
               <a:rPr lang="en-US" smtClean="0"/>
-              <a:t>10/29/26</a:t>
+              <a:t>10/30/26</a:t>
             </a:fld>
             <a:endParaRPr lang="en-US"/>
           </a:p>
@@ -4995,7 +4992,7 @@
           <a:p>
             <a:fld id="{069363D2-3164-4145-A578-C91A7CE0BB59}" type="datetimeFigureOut">
               <a:rPr lang="en-US" smtClean="0"/>
-              <a:t>10/29/26</a:t>
+              <a:t>10/30/26</a:t>
             </a:fld>
             <a:endParaRPr lang="en-US"/>
           </a:p>
@@ -5260,7 +5257,7 @@
           <a:p>
             <a:fld id="{069363D2-3164-4145-A578-C91A7CE0BB59}" type="datetimeFigureOut">
               <a:rPr lang="en-US" smtClean="0"/>
-              <a:t>10/29/26</a:t>
+              <a:t>10/30/26</a:t>
             </a:fld>
             <a:endParaRPr lang="en-US"/>
           </a:p>
@@ -5672,7 +5669,7 @@
           <a:p>
             <a:fld id="{069363D2-3164-4145-A578-C91A7CE0BB59}" type="datetimeFigureOut">
               <a:rPr lang="en-US" smtClean="0"/>
-              <a:t>10/29/26</a:t>
+              <a:t>10/30/26</a:t>
             </a:fld>
             <a:endParaRPr lang="en-US"/>
           </a:p>
@@ -5813,7 +5810,7 @@
           <a:p>
             <a:fld id="{069363D2-3164-4145-A578-C91A7CE0BB59}" type="datetimeFigureOut">
               <a:rPr lang="en-US" smtClean="0"/>
-              <a:t>10/29/26</a:t>
+              <a:t>10/30/26</a:t>
             </a:fld>
             <a:endParaRPr lang="en-US"/>
           </a:p>
@@ -5926,7 +5923,7 @@
           <a:p>
             <a:fld id="{069363D2-3164-4145-A578-C91A7CE0BB59}" type="datetimeFigureOut">
               <a:rPr lang="en-US" smtClean="0"/>
-              <a:t>10/29/26</a:t>
+              <a:t>10/30/26</a:t>
             </a:fld>
             <a:endParaRPr lang="en-US"/>
           </a:p>
@@ -6237,7 +6234,7 @@
           <a:p>
             <a:fld id="{069363D2-3164-4145-A578-C91A7CE0BB59}" type="datetimeFigureOut">
               <a:rPr lang="en-US" smtClean="0"/>
-              <a:t>10/29/26</a:t>
+              <a:t>10/30/26</a:t>
             </a:fld>
             <a:endParaRPr lang="en-US"/>
           </a:p>
@@ -6478,7 +6475,7 @@
           <a:p>
             <a:fld id="{069363D2-3164-4145-A578-C91A7CE0BB59}" type="datetimeFigureOut">
               <a:rPr lang="en-US" smtClean="0"/>
-              <a:t>10/29/26</a:t>
+              <a:t>10/30/26</a:t>
             </a:fld>
             <a:endParaRPr lang="en-US"/>
           </a:p>
@@ -10621,7 +10618,7 @@
           <a:p>
             <a:r>
               <a:rPr lang="en-US" dirty="0"/>
-              <a:t>The upper pill can’t have repeating digits, be a prime number, etc. The possibilities are 48 (2-6-4 or 6-2-4) and 98 (2-7-7).</a:t>
+              <a:t>The upper pill can’t have repeating digits, be a prime number, etc. The possibilities are 48 (2-6-4 or 6-2-4) and 98 (2-7-7 or 7-2-7).</a:t>
             </a:r>
           </a:p>
         </p:txBody>
@@ -11893,7 +11890,7 @@
             <a:pPr algn="ctr"/>
             <a:r>
               <a:rPr lang="en-US" sz="900" dirty="0"/>
-              <a:t>26</a:t>
+              <a:t>267</a:t>
             </a:r>
           </a:p>
         </p:txBody>
@@ -13267,7 +13264,7 @@
             <a:pPr algn="ctr"/>
             <a:r>
               <a:rPr lang="en-US" sz="900" dirty="0"/>
-              <a:t>26</a:t>
+              <a:t>267</a:t>
             </a:r>
           </a:p>
         </p:txBody>
@@ -21569,7 +21566,7 @@
           <a:p>
             <a:r>
               <a:rPr lang="en-US" dirty="0"/>
-              <a:t>In the center block, and in the lower left block, we have two digits, other than 1, where their sum and product must both be single digits. The only possibilities for that are 2-3 and 2-4.</a:t>
+              <a:t>In the center block, and in the lower left block, we have two digits, other than 1, where their sum and product must both be single digits. The only possibilities for this are 2-3 and 2-4.</a:t>
             </a:r>
           </a:p>
         </p:txBody>
@@ -34973,7 +34970,7 @@
           <a:p>
             <a:r>
               <a:rPr lang="en-US" dirty="0"/>
-              <a:t>Remaining cells in bottom center block (468) fit in only one way.</a:t>
+              <a:t>Remaining cells in bottom right block (468) fit in only one way.</a:t>
             </a:r>
           </a:p>
           <a:p>
@@ -40751,3023 +40748,6 @@
 </p:sld>
 </file>
 
-<file path=ppt/slides/slide28.xml><?xml version="1.0" encoding="utf-8"?>
-<p:sld xmlns:a="http://schemas.openxmlformats.org/drawingml/2006/main" xmlns:r="http://schemas.openxmlformats.org/officeDocument/2006/relationships" xmlns:p="http://schemas.openxmlformats.org/presentationml/2006/main">
-  <p:cSld>
-    <p:bg>
-      <p:bgPr>
-        <a:solidFill>
-          <a:schemeClr val="bg1">
-            <a:lumMod val="65000"/>
-          </a:schemeClr>
-        </a:solidFill>
-        <a:effectLst/>
-      </p:bgPr>
-    </p:bg>
-    <p:spTree>
-      <p:nvGrpSpPr>
-        <p:cNvPr id="1" name="">
-          <a:extLst>
-            <a:ext uri="{FF2B5EF4-FFF2-40B4-BE49-F238E27FC236}">
-              <a16:creationId xmlns:a16="http://schemas.microsoft.com/office/drawing/2014/main" id="{BB448996-5502-DB67-37C6-F5B23084BAB4}"/>
-            </a:ext>
-          </a:extLst>
-        </p:cNvPr>
-        <p:cNvGrpSpPr/>
-        <p:nvPr/>
-      </p:nvGrpSpPr>
-      <p:grpSpPr>
-        <a:xfrm>
-          <a:off x="0" y="0"/>
-          <a:ext cx="0" cy="0"/>
-          <a:chOff x="0" y="0"/>
-          <a:chExt cx="0" cy="0"/>
-        </a:xfrm>
-      </p:grpSpPr>
-    </p:spTree>
-    <p:extLst>
-      <p:ext uri="{BB962C8B-B14F-4D97-AF65-F5344CB8AC3E}">
-        <p14:creationId xmlns:p14="http://schemas.microsoft.com/office/powerpoint/2010/main" val="54269967"/>
-      </p:ext>
-    </p:extLst>
-  </p:cSld>
-  <p:clrMapOvr>
-    <a:masterClrMapping/>
-  </p:clrMapOvr>
-</p:sld>
-</file>
-
-<file path=ppt/slides/slide29.xml><?xml version="1.0" encoding="utf-8"?>
-<p:sld xmlns:a="http://schemas.openxmlformats.org/drawingml/2006/main" xmlns:r="http://schemas.openxmlformats.org/officeDocument/2006/relationships" xmlns:p="http://schemas.openxmlformats.org/presentationml/2006/main">
-  <p:cSld>
-    <p:spTree>
-      <p:nvGrpSpPr>
-        <p:cNvPr id="1" name=""/>
-        <p:cNvGrpSpPr/>
-        <p:nvPr/>
-      </p:nvGrpSpPr>
-      <p:grpSpPr>
-        <a:xfrm>
-          <a:off x="0" y="0"/>
-          <a:ext cx="0" cy="0"/>
-          <a:chOff x="0" y="0"/>
-          <a:chExt cx="0" cy="0"/>
-        </a:xfrm>
-      </p:grpSpPr>
-      <p:sp>
-        <p:nvSpPr>
-          <p:cNvPr id="2" name="Content Placeholder 1">
-            <a:extLst>
-              <a:ext uri="{FF2B5EF4-FFF2-40B4-BE49-F238E27FC236}">
-                <a16:creationId xmlns:a16="http://schemas.microsoft.com/office/drawing/2014/main" id="{443D7EA2-9D0B-0F8A-5F8D-FAC88757C8CE}"/>
-              </a:ext>
-            </a:extLst>
-          </p:cNvPr>
-          <p:cNvSpPr>
-            <a:spLocks noGrp="1"/>
-          </p:cNvSpPr>
-          <p:nvPr>
-            <p:ph sz="half" idx="1"/>
-          </p:nvPr>
-        </p:nvSpPr>
-        <p:spPr/>
-        <p:txBody>
-          <a:bodyPr/>
-          <a:lstStyle/>
-          <a:p>
-            <a:endParaRPr lang="en-US"/>
-          </a:p>
-        </p:txBody>
-      </p:sp>
-      <p:sp>
-        <p:nvSpPr>
-          <p:cNvPr id="3" name="TextBox 2">
-            <a:extLst>
-              <a:ext uri="{FF2B5EF4-FFF2-40B4-BE49-F238E27FC236}">
-                <a16:creationId xmlns:a16="http://schemas.microsoft.com/office/drawing/2014/main" id="{5545F530-01C0-8F2D-2647-E7CDD2A7F8F3}"/>
-              </a:ext>
-            </a:extLst>
-          </p:cNvPr>
-          <p:cNvSpPr txBox="1"/>
-          <p:nvPr/>
-        </p:nvSpPr>
-        <p:spPr>
-          <a:xfrm>
-            <a:off x="3217333" y="1224551"/>
-            <a:ext cx="462845" cy="584775"/>
-          </a:xfrm>
-          <a:prstGeom prst="rect">
-            <a:avLst/>
-          </a:prstGeom>
-          <a:noFill/>
-        </p:spPr>
-        <p:txBody>
-          <a:bodyPr wrap="square" rtlCol="0">
-            <a:spAutoFit/>
-          </a:bodyPr>
-          <a:lstStyle/>
-          <a:p>
-            <a:pPr algn="ctr"/>
-            <a:r>
-              <a:rPr lang="en-US" sz="3200" dirty="0"/>
-              <a:t>8</a:t>
-            </a:r>
-          </a:p>
-        </p:txBody>
-      </p:sp>
-      <p:sp>
-        <p:nvSpPr>
-          <p:cNvPr id="4" name="TextBox 3">
-            <a:extLst>
-              <a:ext uri="{FF2B5EF4-FFF2-40B4-BE49-F238E27FC236}">
-                <a16:creationId xmlns:a16="http://schemas.microsoft.com/office/drawing/2014/main" id="{B2E0DB11-79AF-5889-2ACA-5ED711A72451}"/>
-              </a:ext>
-            </a:extLst>
-          </p:cNvPr>
-          <p:cNvSpPr txBox="1"/>
-          <p:nvPr/>
-        </p:nvSpPr>
-        <p:spPr>
-          <a:xfrm>
-            <a:off x="3716867" y="1224551"/>
-            <a:ext cx="462845" cy="584775"/>
-          </a:xfrm>
-          <a:prstGeom prst="rect">
-            <a:avLst/>
-          </a:prstGeom>
-          <a:noFill/>
-        </p:spPr>
-        <p:txBody>
-          <a:bodyPr wrap="square" rtlCol="0">
-            <a:spAutoFit/>
-          </a:bodyPr>
-          <a:lstStyle/>
-          <a:p>
-            <a:pPr algn="ctr"/>
-            <a:r>
-              <a:rPr lang="en-US" sz="3200" dirty="0"/>
-              <a:t>8</a:t>
-            </a:r>
-          </a:p>
-        </p:txBody>
-      </p:sp>
-      <p:sp>
-        <p:nvSpPr>
-          <p:cNvPr id="5" name="TextBox 4">
-            <a:extLst>
-              <a:ext uri="{FF2B5EF4-FFF2-40B4-BE49-F238E27FC236}">
-                <a16:creationId xmlns:a16="http://schemas.microsoft.com/office/drawing/2014/main" id="{A9A6A9F2-023B-EE13-2AB7-67189BD912E0}"/>
-              </a:ext>
-            </a:extLst>
-          </p:cNvPr>
-          <p:cNvSpPr txBox="1"/>
-          <p:nvPr/>
-        </p:nvSpPr>
-        <p:spPr>
-          <a:xfrm>
-            <a:off x="4216401" y="1224551"/>
-            <a:ext cx="462845" cy="584775"/>
-          </a:xfrm>
-          <a:prstGeom prst="rect">
-            <a:avLst/>
-          </a:prstGeom>
-          <a:noFill/>
-        </p:spPr>
-        <p:txBody>
-          <a:bodyPr wrap="square" rtlCol="0">
-            <a:spAutoFit/>
-          </a:bodyPr>
-          <a:lstStyle/>
-          <a:p>
-            <a:pPr algn="ctr"/>
-            <a:r>
-              <a:rPr lang="en-US" sz="3200" dirty="0"/>
-              <a:t>8</a:t>
-            </a:r>
-          </a:p>
-        </p:txBody>
-      </p:sp>
-      <p:sp>
-        <p:nvSpPr>
-          <p:cNvPr id="6" name="TextBox 5">
-            <a:extLst>
-              <a:ext uri="{FF2B5EF4-FFF2-40B4-BE49-F238E27FC236}">
-                <a16:creationId xmlns:a16="http://schemas.microsoft.com/office/drawing/2014/main" id="{AB924E1A-E8BF-0C4E-2CD5-C07B794BAC6D}"/>
-              </a:ext>
-            </a:extLst>
-          </p:cNvPr>
-          <p:cNvSpPr txBox="1"/>
-          <p:nvPr/>
-        </p:nvSpPr>
-        <p:spPr>
-          <a:xfrm>
-            <a:off x="4715935" y="1224551"/>
-            <a:ext cx="462845" cy="584775"/>
-          </a:xfrm>
-          <a:prstGeom prst="rect">
-            <a:avLst/>
-          </a:prstGeom>
-          <a:noFill/>
-        </p:spPr>
-        <p:txBody>
-          <a:bodyPr wrap="square" rtlCol="0">
-            <a:spAutoFit/>
-          </a:bodyPr>
-          <a:lstStyle/>
-          <a:p>
-            <a:pPr algn="ctr"/>
-            <a:r>
-              <a:rPr lang="en-US" sz="3200" dirty="0"/>
-              <a:t>8</a:t>
-            </a:r>
-          </a:p>
-        </p:txBody>
-      </p:sp>
-      <p:sp>
-        <p:nvSpPr>
-          <p:cNvPr id="7" name="TextBox 6">
-            <a:extLst>
-              <a:ext uri="{FF2B5EF4-FFF2-40B4-BE49-F238E27FC236}">
-                <a16:creationId xmlns:a16="http://schemas.microsoft.com/office/drawing/2014/main" id="{59586AF8-3B01-7D52-5D31-2C4E546D1127}"/>
-              </a:ext>
-            </a:extLst>
-          </p:cNvPr>
-          <p:cNvSpPr txBox="1"/>
-          <p:nvPr/>
-        </p:nvSpPr>
-        <p:spPr>
-          <a:xfrm>
-            <a:off x="5215469" y="1224551"/>
-            <a:ext cx="462845" cy="584775"/>
-          </a:xfrm>
-          <a:prstGeom prst="rect">
-            <a:avLst/>
-          </a:prstGeom>
-          <a:noFill/>
-        </p:spPr>
-        <p:txBody>
-          <a:bodyPr wrap="square" rtlCol="0">
-            <a:spAutoFit/>
-          </a:bodyPr>
-          <a:lstStyle/>
-          <a:p>
-            <a:pPr algn="ctr"/>
-            <a:r>
-              <a:rPr lang="en-US" sz="3200" dirty="0"/>
-              <a:t>8</a:t>
-            </a:r>
-          </a:p>
-        </p:txBody>
-      </p:sp>
-      <p:sp>
-        <p:nvSpPr>
-          <p:cNvPr id="8" name="TextBox 7">
-            <a:extLst>
-              <a:ext uri="{FF2B5EF4-FFF2-40B4-BE49-F238E27FC236}">
-                <a16:creationId xmlns:a16="http://schemas.microsoft.com/office/drawing/2014/main" id="{3ADD7D98-7B6F-F7EB-1963-2DD729234497}"/>
-              </a:ext>
-            </a:extLst>
-          </p:cNvPr>
-          <p:cNvSpPr txBox="1"/>
-          <p:nvPr/>
-        </p:nvSpPr>
-        <p:spPr>
-          <a:xfrm>
-            <a:off x="5715003" y="1224551"/>
-            <a:ext cx="462845" cy="584775"/>
-          </a:xfrm>
-          <a:prstGeom prst="rect">
-            <a:avLst/>
-          </a:prstGeom>
-          <a:noFill/>
-        </p:spPr>
-        <p:txBody>
-          <a:bodyPr wrap="square" rtlCol="0">
-            <a:spAutoFit/>
-          </a:bodyPr>
-          <a:lstStyle/>
-          <a:p>
-            <a:pPr algn="ctr"/>
-            <a:r>
-              <a:rPr lang="en-US" sz="3200" dirty="0"/>
-              <a:t>8</a:t>
-            </a:r>
-          </a:p>
-        </p:txBody>
-      </p:sp>
-      <p:sp>
-        <p:nvSpPr>
-          <p:cNvPr id="9" name="TextBox 8">
-            <a:extLst>
-              <a:ext uri="{FF2B5EF4-FFF2-40B4-BE49-F238E27FC236}">
-                <a16:creationId xmlns:a16="http://schemas.microsoft.com/office/drawing/2014/main" id="{605A51F9-18BC-9695-9691-38716A5CEBDE}"/>
-              </a:ext>
-            </a:extLst>
-          </p:cNvPr>
-          <p:cNvSpPr txBox="1"/>
-          <p:nvPr/>
-        </p:nvSpPr>
-        <p:spPr>
-          <a:xfrm>
-            <a:off x="6214537" y="1224551"/>
-            <a:ext cx="462845" cy="584775"/>
-          </a:xfrm>
-          <a:prstGeom prst="rect">
-            <a:avLst/>
-          </a:prstGeom>
-          <a:noFill/>
-        </p:spPr>
-        <p:txBody>
-          <a:bodyPr wrap="square" rtlCol="0">
-            <a:spAutoFit/>
-          </a:bodyPr>
-          <a:lstStyle/>
-          <a:p>
-            <a:pPr algn="ctr"/>
-            <a:r>
-              <a:rPr lang="en-US" sz="3200" dirty="0"/>
-              <a:t>8</a:t>
-            </a:r>
-          </a:p>
-        </p:txBody>
-      </p:sp>
-      <p:sp>
-        <p:nvSpPr>
-          <p:cNvPr id="10" name="TextBox 9">
-            <a:extLst>
-              <a:ext uri="{FF2B5EF4-FFF2-40B4-BE49-F238E27FC236}">
-                <a16:creationId xmlns:a16="http://schemas.microsoft.com/office/drawing/2014/main" id="{C71C0538-23C4-F643-E005-AF0FBFAC7CAE}"/>
-              </a:ext>
-            </a:extLst>
-          </p:cNvPr>
-          <p:cNvSpPr txBox="1"/>
-          <p:nvPr/>
-        </p:nvSpPr>
-        <p:spPr>
-          <a:xfrm>
-            <a:off x="6714071" y="1224551"/>
-            <a:ext cx="462845" cy="584775"/>
-          </a:xfrm>
-          <a:prstGeom prst="rect">
-            <a:avLst/>
-          </a:prstGeom>
-          <a:noFill/>
-        </p:spPr>
-        <p:txBody>
-          <a:bodyPr wrap="square" rtlCol="0">
-            <a:spAutoFit/>
-          </a:bodyPr>
-          <a:lstStyle/>
-          <a:p>
-            <a:pPr algn="ctr"/>
-            <a:r>
-              <a:rPr lang="en-US" sz="3200" dirty="0"/>
-              <a:t>8</a:t>
-            </a:r>
-          </a:p>
-        </p:txBody>
-      </p:sp>
-      <p:sp>
-        <p:nvSpPr>
-          <p:cNvPr id="11" name="TextBox 10">
-            <a:extLst>
-              <a:ext uri="{FF2B5EF4-FFF2-40B4-BE49-F238E27FC236}">
-                <a16:creationId xmlns:a16="http://schemas.microsoft.com/office/drawing/2014/main" id="{975B7721-00C4-F6F9-D2E5-1C1A1FFC7E0A}"/>
-              </a:ext>
-            </a:extLst>
-          </p:cNvPr>
-          <p:cNvSpPr txBox="1"/>
-          <p:nvPr/>
-        </p:nvSpPr>
-        <p:spPr>
-          <a:xfrm>
-            <a:off x="7213604" y="1224551"/>
-            <a:ext cx="462845" cy="584775"/>
-          </a:xfrm>
-          <a:prstGeom prst="rect">
-            <a:avLst/>
-          </a:prstGeom>
-          <a:noFill/>
-        </p:spPr>
-        <p:txBody>
-          <a:bodyPr wrap="square" rtlCol="0">
-            <a:spAutoFit/>
-          </a:bodyPr>
-          <a:lstStyle/>
-          <a:p>
-            <a:pPr algn="ctr"/>
-            <a:r>
-              <a:rPr lang="en-US" sz="3200" dirty="0"/>
-              <a:t>8</a:t>
-            </a:r>
-          </a:p>
-        </p:txBody>
-      </p:sp>
-      <p:sp>
-        <p:nvSpPr>
-          <p:cNvPr id="14" name="TextBox 13">
-            <a:extLst>
-              <a:ext uri="{FF2B5EF4-FFF2-40B4-BE49-F238E27FC236}">
-                <a16:creationId xmlns:a16="http://schemas.microsoft.com/office/drawing/2014/main" id="{00E145A9-AC46-07E4-A6C0-59ED454080C8}"/>
-              </a:ext>
-            </a:extLst>
-          </p:cNvPr>
-          <p:cNvSpPr txBox="1"/>
-          <p:nvPr/>
-        </p:nvSpPr>
-        <p:spPr>
-          <a:xfrm>
-            <a:off x="3217333" y="721216"/>
-            <a:ext cx="462845" cy="584775"/>
-          </a:xfrm>
-          <a:prstGeom prst="rect">
-            <a:avLst/>
-          </a:prstGeom>
-          <a:noFill/>
-        </p:spPr>
-        <p:txBody>
-          <a:bodyPr wrap="square" rtlCol="0">
-            <a:spAutoFit/>
-          </a:bodyPr>
-          <a:lstStyle/>
-          <a:p>
-            <a:pPr algn="ctr"/>
-            <a:r>
-              <a:rPr lang="en-US" sz="3200" dirty="0"/>
-              <a:t>8</a:t>
-            </a:r>
-          </a:p>
-        </p:txBody>
-      </p:sp>
-      <p:sp>
-        <p:nvSpPr>
-          <p:cNvPr id="15" name="TextBox 14">
-            <a:extLst>
-              <a:ext uri="{FF2B5EF4-FFF2-40B4-BE49-F238E27FC236}">
-                <a16:creationId xmlns:a16="http://schemas.microsoft.com/office/drawing/2014/main" id="{2318098D-D15B-BB4F-20F9-FE49F18B4E08}"/>
-              </a:ext>
-            </a:extLst>
-          </p:cNvPr>
-          <p:cNvSpPr txBox="1"/>
-          <p:nvPr/>
-        </p:nvSpPr>
-        <p:spPr>
-          <a:xfrm>
-            <a:off x="3716867" y="721216"/>
-            <a:ext cx="462845" cy="584775"/>
-          </a:xfrm>
-          <a:prstGeom prst="rect">
-            <a:avLst/>
-          </a:prstGeom>
-          <a:noFill/>
-        </p:spPr>
-        <p:txBody>
-          <a:bodyPr wrap="square" rtlCol="0">
-            <a:spAutoFit/>
-          </a:bodyPr>
-          <a:lstStyle/>
-          <a:p>
-            <a:pPr algn="ctr"/>
-            <a:r>
-              <a:rPr lang="en-US" sz="3200" dirty="0"/>
-              <a:t>8</a:t>
-            </a:r>
-          </a:p>
-        </p:txBody>
-      </p:sp>
-      <p:sp>
-        <p:nvSpPr>
-          <p:cNvPr id="16" name="TextBox 15">
-            <a:extLst>
-              <a:ext uri="{FF2B5EF4-FFF2-40B4-BE49-F238E27FC236}">
-                <a16:creationId xmlns:a16="http://schemas.microsoft.com/office/drawing/2014/main" id="{4239E079-7972-8424-05C9-E3BF920EA93C}"/>
-              </a:ext>
-            </a:extLst>
-          </p:cNvPr>
-          <p:cNvSpPr txBox="1"/>
-          <p:nvPr/>
-        </p:nvSpPr>
-        <p:spPr>
-          <a:xfrm>
-            <a:off x="4216401" y="721216"/>
-            <a:ext cx="462845" cy="584775"/>
-          </a:xfrm>
-          <a:prstGeom prst="rect">
-            <a:avLst/>
-          </a:prstGeom>
-          <a:noFill/>
-        </p:spPr>
-        <p:txBody>
-          <a:bodyPr wrap="square" rtlCol="0">
-            <a:spAutoFit/>
-          </a:bodyPr>
-          <a:lstStyle/>
-          <a:p>
-            <a:pPr algn="ctr"/>
-            <a:r>
-              <a:rPr lang="en-US" sz="3200" dirty="0"/>
-              <a:t>8</a:t>
-            </a:r>
-          </a:p>
-        </p:txBody>
-      </p:sp>
-      <p:sp>
-        <p:nvSpPr>
-          <p:cNvPr id="17" name="TextBox 16">
-            <a:extLst>
-              <a:ext uri="{FF2B5EF4-FFF2-40B4-BE49-F238E27FC236}">
-                <a16:creationId xmlns:a16="http://schemas.microsoft.com/office/drawing/2014/main" id="{716C0B9F-0EF4-3087-4A92-A46D40330CF7}"/>
-              </a:ext>
-            </a:extLst>
-          </p:cNvPr>
-          <p:cNvSpPr txBox="1"/>
-          <p:nvPr/>
-        </p:nvSpPr>
-        <p:spPr>
-          <a:xfrm>
-            <a:off x="4715935" y="721216"/>
-            <a:ext cx="462845" cy="584775"/>
-          </a:xfrm>
-          <a:prstGeom prst="rect">
-            <a:avLst/>
-          </a:prstGeom>
-          <a:noFill/>
-        </p:spPr>
-        <p:txBody>
-          <a:bodyPr wrap="square" rtlCol="0">
-            <a:spAutoFit/>
-          </a:bodyPr>
-          <a:lstStyle/>
-          <a:p>
-            <a:pPr algn="ctr"/>
-            <a:r>
-              <a:rPr lang="en-US" sz="3200" dirty="0"/>
-              <a:t>8</a:t>
-            </a:r>
-          </a:p>
-        </p:txBody>
-      </p:sp>
-      <p:sp>
-        <p:nvSpPr>
-          <p:cNvPr id="18" name="TextBox 17">
-            <a:extLst>
-              <a:ext uri="{FF2B5EF4-FFF2-40B4-BE49-F238E27FC236}">
-                <a16:creationId xmlns:a16="http://schemas.microsoft.com/office/drawing/2014/main" id="{A28C3F92-9238-221D-AD0E-EFD5BAD062FB}"/>
-              </a:ext>
-            </a:extLst>
-          </p:cNvPr>
-          <p:cNvSpPr txBox="1"/>
-          <p:nvPr/>
-        </p:nvSpPr>
-        <p:spPr>
-          <a:xfrm>
-            <a:off x="5215469" y="721216"/>
-            <a:ext cx="462845" cy="584775"/>
-          </a:xfrm>
-          <a:prstGeom prst="rect">
-            <a:avLst/>
-          </a:prstGeom>
-          <a:noFill/>
-        </p:spPr>
-        <p:txBody>
-          <a:bodyPr wrap="square" rtlCol="0">
-            <a:spAutoFit/>
-          </a:bodyPr>
-          <a:lstStyle/>
-          <a:p>
-            <a:pPr algn="ctr"/>
-            <a:r>
-              <a:rPr lang="en-US" sz="3200" dirty="0"/>
-              <a:t>8</a:t>
-            </a:r>
-          </a:p>
-        </p:txBody>
-      </p:sp>
-      <p:sp>
-        <p:nvSpPr>
-          <p:cNvPr id="19" name="TextBox 18">
-            <a:extLst>
-              <a:ext uri="{FF2B5EF4-FFF2-40B4-BE49-F238E27FC236}">
-                <a16:creationId xmlns:a16="http://schemas.microsoft.com/office/drawing/2014/main" id="{6871BBF3-4EDB-428B-FEEE-11FDD9F7FEF3}"/>
-              </a:ext>
-            </a:extLst>
-          </p:cNvPr>
-          <p:cNvSpPr txBox="1"/>
-          <p:nvPr/>
-        </p:nvSpPr>
-        <p:spPr>
-          <a:xfrm>
-            <a:off x="5715003" y="721216"/>
-            <a:ext cx="462845" cy="584775"/>
-          </a:xfrm>
-          <a:prstGeom prst="rect">
-            <a:avLst/>
-          </a:prstGeom>
-          <a:noFill/>
-        </p:spPr>
-        <p:txBody>
-          <a:bodyPr wrap="square" rtlCol="0">
-            <a:spAutoFit/>
-          </a:bodyPr>
-          <a:lstStyle/>
-          <a:p>
-            <a:pPr algn="ctr"/>
-            <a:r>
-              <a:rPr lang="en-US" sz="3200" dirty="0"/>
-              <a:t>8</a:t>
-            </a:r>
-          </a:p>
-        </p:txBody>
-      </p:sp>
-      <p:sp>
-        <p:nvSpPr>
-          <p:cNvPr id="20" name="TextBox 19">
-            <a:extLst>
-              <a:ext uri="{FF2B5EF4-FFF2-40B4-BE49-F238E27FC236}">
-                <a16:creationId xmlns:a16="http://schemas.microsoft.com/office/drawing/2014/main" id="{B00D9B5B-E54C-776D-E032-6C06B9A86232}"/>
-              </a:ext>
-            </a:extLst>
-          </p:cNvPr>
-          <p:cNvSpPr txBox="1"/>
-          <p:nvPr/>
-        </p:nvSpPr>
-        <p:spPr>
-          <a:xfrm>
-            <a:off x="6214537" y="721216"/>
-            <a:ext cx="462845" cy="584775"/>
-          </a:xfrm>
-          <a:prstGeom prst="rect">
-            <a:avLst/>
-          </a:prstGeom>
-          <a:noFill/>
-        </p:spPr>
-        <p:txBody>
-          <a:bodyPr wrap="square" rtlCol="0">
-            <a:spAutoFit/>
-          </a:bodyPr>
-          <a:lstStyle/>
-          <a:p>
-            <a:pPr algn="ctr"/>
-            <a:r>
-              <a:rPr lang="en-US" sz="3200" dirty="0"/>
-              <a:t>8</a:t>
-            </a:r>
-          </a:p>
-        </p:txBody>
-      </p:sp>
-      <p:sp>
-        <p:nvSpPr>
-          <p:cNvPr id="21" name="TextBox 20">
-            <a:extLst>
-              <a:ext uri="{FF2B5EF4-FFF2-40B4-BE49-F238E27FC236}">
-                <a16:creationId xmlns:a16="http://schemas.microsoft.com/office/drawing/2014/main" id="{2EC6D261-0273-A3EC-962D-0CC15FBBB459}"/>
-              </a:ext>
-            </a:extLst>
-          </p:cNvPr>
-          <p:cNvSpPr txBox="1"/>
-          <p:nvPr/>
-        </p:nvSpPr>
-        <p:spPr>
-          <a:xfrm>
-            <a:off x="6714071" y="721216"/>
-            <a:ext cx="462845" cy="584775"/>
-          </a:xfrm>
-          <a:prstGeom prst="rect">
-            <a:avLst/>
-          </a:prstGeom>
-          <a:noFill/>
-        </p:spPr>
-        <p:txBody>
-          <a:bodyPr wrap="square" rtlCol="0">
-            <a:spAutoFit/>
-          </a:bodyPr>
-          <a:lstStyle/>
-          <a:p>
-            <a:pPr algn="ctr"/>
-            <a:r>
-              <a:rPr lang="en-US" sz="3200" dirty="0"/>
-              <a:t>8</a:t>
-            </a:r>
-          </a:p>
-        </p:txBody>
-      </p:sp>
-      <p:sp>
-        <p:nvSpPr>
-          <p:cNvPr id="22" name="TextBox 21">
-            <a:extLst>
-              <a:ext uri="{FF2B5EF4-FFF2-40B4-BE49-F238E27FC236}">
-                <a16:creationId xmlns:a16="http://schemas.microsoft.com/office/drawing/2014/main" id="{86077096-8A83-D387-D695-B38D3EE3C67A}"/>
-              </a:ext>
-            </a:extLst>
-          </p:cNvPr>
-          <p:cNvSpPr txBox="1"/>
-          <p:nvPr/>
-        </p:nvSpPr>
-        <p:spPr>
-          <a:xfrm>
-            <a:off x="7213604" y="721216"/>
-            <a:ext cx="462845" cy="584775"/>
-          </a:xfrm>
-          <a:prstGeom prst="rect">
-            <a:avLst/>
-          </a:prstGeom>
-          <a:noFill/>
-        </p:spPr>
-        <p:txBody>
-          <a:bodyPr wrap="square" rtlCol="0">
-            <a:spAutoFit/>
-          </a:bodyPr>
-          <a:lstStyle/>
-          <a:p>
-            <a:pPr algn="ctr"/>
-            <a:r>
-              <a:rPr lang="en-US" sz="3200" dirty="0"/>
-              <a:t>8</a:t>
-            </a:r>
-          </a:p>
-        </p:txBody>
-      </p:sp>
-      <p:sp>
-        <p:nvSpPr>
-          <p:cNvPr id="24" name="TextBox 23">
-            <a:extLst>
-              <a:ext uri="{FF2B5EF4-FFF2-40B4-BE49-F238E27FC236}">
-                <a16:creationId xmlns:a16="http://schemas.microsoft.com/office/drawing/2014/main" id="{1D0FA921-C9B8-9A3E-E302-4E73F4C28507}"/>
-              </a:ext>
-            </a:extLst>
-          </p:cNvPr>
-          <p:cNvSpPr txBox="1"/>
-          <p:nvPr/>
-        </p:nvSpPr>
-        <p:spPr>
-          <a:xfrm>
-            <a:off x="3217333" y="1727886"/>
-            <a:ext cx="462845" cy="584775"/>
-          </a:xfrm>
-          <a:prstGeom prst="rect">
-            <a:avLst/>
-          </a:prstGeom>
-          <a:noFill/>
-        </p:spPr>
-        <p:txBody>
-          <a:bodyPr wrap="square" rtlCol="0">
-            <a:spAutoFit/>
-          </a:bodyPr>
-          <a:lstStyle/>
-          <a:p>
-            <a:pPr algn="ctr"/>
-            <a:r>
-              <a:rPr lang="en-US" sz="3200" dirty="0"/>
-              <a:t>8</a:t>
-            </a:r>
-          </a:p>
-        </p:txBody>
-      </p:sp>
-      <p:sp>
-        <p:nvSpPr>
-          <p:cNvPr id="25" name="TextBox 24">
-            <a:extLst>
-              <a:ext uri="{FF2B5EF4-FFF2-40B4-BE49-F238E27FC236}">
-                <a16:creationId xmlns:a16="http://schemas.microsoft.com/office/drawing/2014/main" id="{395E837A-EF8C-912D-CF33-DC322ACCDF7A}"/>
-              </a:ext>
-            </a:extLst>
-          </p:cNvPr>
-          <p:cNvSpPr txBox="1"/>
-          <p:nvPr/>
-        </p:nvSpPr>
-        <p:spPr>
-          <a:xfrm>
-            <a:off x="3716867" y="1727886"/>
-            <a:ext cx="462845" cy="584775"/>
-          </a:xfrm>
-          <a:prstGeom prst="rect">
-            <a:avLst/>
-          </a:prstGeom>
-          <a:noFill/>
-        </p:spPr>
-        <p:txBody>
-          <a:bodyPr wrap="square" rtlCol="0">
-            <a:spAutoFit/>
-          </a:bodyPr>
-          <a:lstStyle/>
-          <a:p>
-            <a:pPr algn="ctr"/>
-            <a:r>
-              <a:rPr lang="en-US" sz="3200" dirty="0"/>
-              <a:t>8</a:t>
-            </a:r>
-          </a:p>
-        </p:txBody>
-      </p:sp>
-      <p:sp>
-        <p:nvSpPr>
-          <p:cNvPr id="26" name="TextBox 25">
-            <a:extLst>
-              <a:ext uri="{FF2B5EF4-FFF2-40B4-BE49-F238E27FC236}">
-                <a16:creationId xmlns:a16="http://schemas.microsoft.com/office/drawing/2014/main" id="{466842E1-E53F-5E12-03DC-DD938863A207}"/>
-              </a:ext>
-            </a:extLst>
-          </p:cNvPr>
-          <p:cNvSpPr txBox="1"/>
-          <p:nvPr/>
-        </p:nvSpPr>
-        <p:spPr>
-          <a:xfrm>
-            <a:off x="4216401" y="1727886"/>
-            <a:ext cx="462845" cy="584775"/>
-          </a:xfrm>
-          <a:prstGeom prst="rect">
-            <a:avLst/>
-          </a:prstGeom>
-          <a:noFill/>
-        </p:spPr>
-        <p:txBody>
-          <a:bodyPr wrap="square" rtlCol="0">
-            <a:spAutoFit/>
-          </a:bodyPr>
-          <a:lstStyle/>
-          <a:p>
-            <a:pPr algn="ctr"/>
-            <a:r>
-              <a:rPr lang="en-US" sz="3200" dirty="0"/>
-              <a:t>8</a:t>
-            </a:r>
-          </a:p>
-        </p:txBody>
-      </p:sp>
-      <p:sp>
-        <p:nvSpPr>
-          <p:cNvPr id="27" name="TextBox 26">
-            <a:extLst>
-              <a:ext uri="{FF2B5EF4-FFF2-40B4-BE49-F238E27FC236}">
-                <a16:creationId xmlns:a16="http://schemas.microsoft.com/office/drawing/2014/main" id="{23ED3893-D236-1B53-BCB2-4356F7CB21C3}"/>
-              </a:ext>
-            </a:extLst>
-          </p:cNvPr>
-          <p:cNvSpPr txBox="1"/>
-          <p:nvPr/>
-        </p:nvSpPr>
-        <p:spPr>
-          <a:xfrm>
-            <a:off x="4715935" y="1727886"/>
-            <a:ext cx="462845" cy="584775"/>
-          </a:xfrm>
-          <a:prstGeom prst="rect">
-            <a:avLst/>
-          </a:prstGeom>
-          <a:noFill/>
-        </p:spPr>
-        <p:txBody>
-          <a:bodyPr wrap="square" rtlCol="0">
-            <a:spAutoFit/>
-          </a:bodyPr>
-          <a:lstStyle/>
-          <a:p>
-            <a:pPr algn="ctr"/>
-            <a:r>
-              <a:rPr lang="en-US" sz="3200" dirty="0"/>
-              <a:t>8</a:t>
-            </a:r>
-          </a:p>
-        </p:txBody>
-      </p:sp>
-      <p:sp>
-        <p:nvSpPr>
-          <p:cNvPr id="28" name="TextBox 27">
-            <a:extLst>
-              <a:ext uri="{FF2B5EF4-FFF2-40B4-BE49-F238E27FC236}">
-                <a16:creationId xmlns:a16="http://schemas.microsoft.com/office/drawing/2014/main" id="{4B6E1EE3-2AB9-1EE8-ABF2-45939F23CB26}"/>
-              </a:ext>
-            </a:extLst>
-          </p:cNvPr>
-          <p:cNvSpPr txBox="1"/>
-          <p:nvPr/>
-        </p:nvSpPr>
-        <p:spPr>
-          <a:xfrm>
-            <a:off x="5215469" y="1727886"/>
-            <a:ext cx="462845" cy="584775"/>
-          </a:xfrm>
-          <a:prstGeom prst="rect">
-            <a:avLst/>
-          </a:prstGeom>
-          <a:noFill/>
-        </p:spPr>
-        <p:txBody>
-          <a:bodyPr wrap="square" rtlCol="0">
-            <a:spAutoFit/>
-          </a:bodyPr>
-          <a:lstStyle/>
-          <a:p>
-            <a:pPr algn="ctr"/>
-            <a:r>
-              <a:rPr lang="en-US" sz="3200" dirty="0"/>
-              <a:t>8</a:t>
-            </a:r>
-          </a:p>
-        </p:txBody>
-      </p:sp>
-      <p:sp>
-        <p:nvSpPr>
-          <p:cNvPr id="29" name="TextBox 28">
-            <a:extLst>
-              <a:ext uri="{FF2B5EF4-FFF2-40B4-BE49-F238E27FC236}">
-                <a16:creationId xmlns:a16="http://schemas.microsoft.com/office/drawing/2014/main" id="{F4C636C3-F4C1-7206-C902-91DA657474B2}"/>
-              </a:ext>
-            </a:extLst>
-          </p:cNvPr>
-          <p:cNvSpPr txBox="1"/>
-          <p:nvPr/>
-        </p:nvSpPr>
-        <p:spPr>
-          <a:xfrm>
-            <a:off x="5715003" y="1727886"/>
-            <a:ext cx="462845" cy="584775"/>
-          </a:xfrm>
-          <a:prstGeom prst="rect">
-            <a:avLst/>
-          </a:prstGeom>
-          <a:noFill/>
-        </p:spPr>
-        <p:txBody>
-          <a:bodyPr wrap="square" rtlCol="0">
-            <a:spAutoFit/>
-          </a:bodyPr>
-          <a:lstStyle/>
-          <a:p>
-            <a:pPr algn="ctr"/>
-            <a:r>
-              <a:rPr lang="en-US" sz="3200" dirty="0"/>
-              <a:t>8</a:t>
-            </a:r>
-          </a:p>
-        </p:txBody>
-      </p:sp>
-      <p:sp>
-        <p:nvSpPr>
-          <p:cNvPr id="30" name="TextBox 29">
-            <a:extLst>
-              <a:ext uri="{FF2B5EF4-FFF2-40B4-BE49-F238E27FC236}">
-                <a16:creationId xmlns:a16="http://schemas.microsoft.com/office/drawing/2014/main" id="{D8077B04-F90B-A0CC-9ACD-FC227BF4E86C}"/>
-              </a:ext>
-            </a:extLst>
-          </p:cNvPr>
-          <p:cNvSpPr txBox="1"/>
-          <p:nvPr/>
-        </p:nvSpPr>
-        <p:spPr>
-          <a:xfrm>
-            <a:off x="6214537" y="1727886"/>
-            <a:ext cx="462845" cy="584775"/>
-          </a:xfrm>
-          <a:prstGeom prst="rect">
-            <a:avLst/>
-          </a:prstGeom>
-          <a:noFill/>
-        </p:spPr>
-        <p:txBody>
-          <a:bodyPr wrap="square" rtlCol="0">
-            <a:spAutoFit/>
-          </a:bodyPr>
-          <a:lstStyle/>
-          <a:p>
-            <a:pPr algn="ctr"/>
-            <a:r>
-              <a:rPr lang="en-US" sz="3200" dirty="0"/>
-              <a:t>8</a:t>
-            </a:r>
-          </a:p>
-        </p:txBody>
-      </p:sp>
-      <p:sp>
-        <p:nvSpPr>
-          <p:cNvPr id="31" name="TextBox 30">
-            <a:extLst>
-              <a:ext uri="{FF2B5EF4-FFF2-40B4-BE49-F238E27FC236}">
-                <a16:creationId xmlns:a16="http://schemas.microsoft.com/office/drawing/2014/main" id="{C642D92D-0411-86FD-FD42-E076D9EE110A}"/>
-              </a:ext>
-            </a:extLst>
-          </p:cNvPr>
-          <p:cNvSpPr txBox="1"/>
-          <p:nvPr/>
-        </p:nvSpPr>
-        <p:spPr>
-          <a:xfrm>
-            <a:off x="6714071" y="1727886"/>
-            <a:ext cx="462845" cy="584775"/>
-          </a:xfrm>
-          <a:prstGeom prst="rect">
-            <a:avLst/>
-          </a:prstGeom>
-          <a:noFill/>
-        </p:spPr>
-        <p:txBody>
-          <a:bodyPr wrap="square" rtlCol="0">
-            <a:spAutoFit/>
-          </a:bodyPr>
-          <a:lstStyle/>
-          <a:p>
-            <a:pPr algn="ctr"/>
-            <a:r>
-              <a:rPr lang="en-US" sz="3200" dirty="0"/>
-              <a:t>8</a:t>
-            </a:r>
-          </a:p>
-        </p:txBody>
-      </p:sp>
-      <p:sp>
-        <p:nvSpPr>
-          <p:cNvPr id="32" name="TextBox 31">
-            <a:extLst>
-              <a:ext uri="{FF2B5EF4-FFF2-40B4-BE49-F238E27FC236}">
-                <a16:creationId xmlns:a16="http://schemas.microsoft.com/office/drawing/2014/main" id="{8374C64D-7C1A-926D-1DC1-6A6414FDBA25}"/>
-              </a:ext>
-            </a:extLst>
-          </p:cNvPr>
-          <p:cNvSpPr txBox="1"/>
-          <p:nvPr/>
-        </p:nvSpPr>
-        <p:spPr>
-          <a:xfrm>
-            <a:off x="7213604" y="1727886"/>
-            <a:ext cx="462845" cy="584775"/>
-          </a:xfrm>
-          <a:prstGeom prst="rect">
-            <a:avLst/>
-          </a:prstGeom>
-          <a:noFill/>
-        </p:spPr>
-        <p:txBody>
-          <a:bodyPr wrap="square" rtlCol="0">
-            <a:spAutoFit/>
-          </a:bodyPr>
-          <a:lstStyle/>
-          <a:p>
-            <a:pPr algn="ctr"/>
-            <a:r>
-              <a:rPr lang="en-US" sz="3200" dirty="0"/>
-              <a:t>8</a:t>
-            </a:r>
-          </a:p>
-        </p:txBody>
-      </p:sp>
-      <p:sp>
-        <p:nvSpPr>
-          <p:cNvPr id="34" name="TextBox 33">
-            <a:extLst>
-              <a:ext uri="{FF2B5EF4-FFF2-40B4-BE49-F238E27FC236}">
-                <a16:creationId xmlns:a16="http://schemas.microsoft.com/office/drawing/2014/main" id="{5245EE08-A98D-01FA-2171-AC26286AAED1}"/>
-              </a:ext>
-            </a:extLst>
-          </p:cNvPr>
-          <p:cNvSpPr txBox="1"/>
-          <p:nvPr/>
-        </p:nvSpPr>
-        <p:spPr>
-          <a:xfrm>
-            <a:off x="3217333" y="2231221"/>
-            <a:ext cx="462845" cy="584775"/>
-          </a:xfrm>
-          <a:prstGeom prst="rect">
-            <a:avLst/>
-          </a:prstGeom>
-          <a:noFill/>
-        </p:spPr>
-        <p:txBody>
-          <a:bodyPr wrap="square" rtlCol="0">
-            <a:spAutoFit/>
-          </a:bodyPr>
-          <a:lstStyle/>
-          <a:p>
-            <a:pPr algn="ctr"/>
-            <a:r>
-              <a:rPr lang="en-US" sz="3200" dirty="0"/>
-              <a:t>8</a:t>
-            </a:r>
-          </a:p>
-        </p:txBody>
-      </p:sp>
-      <p:sp>
-        <p:nvSpPr>
-          <p:cNvPr id="35" name="TextBox 34">
-            <a:extLst>
-              <a:ext uri="{FF2B5EF4-FFF2-40B4-BE49-F238E27FC236}">
-                <a16:creationId xmlns:a16="http://schemas.microsoft.com/office/drawing/2014/main" id="{07750C40-5D09-BF2D-F68E-81566136605A}"/>
-              </a:ext>
-            </a:extLst>
-          </p:cNvPr>
-          <p:cNvSpPr txBox="1"/>
-          <p:nvPr/>
-        </p:nvSpPr>
-        <p:spPr>
-          <a:xfrm>
-            <a:off x="3716867" y="2231221"/>
-            <a:ext cx="462845" cy="584775"/>
-          </a:xfrm>
-          <a:prstGeom prst="rect">
-            <a:avLst/>
-          </a:prstGeom>
-          <a:noFill/>
-        </p:spPr>
-        <p:txBody>
-          <a:bodyPr wrap="square" rtlCol="0">
-            <a:spAutoFit/>
-          </a:bodyPr>
-          <a:lstStyle/>
-          <a:p>
-            <a:pPr algn="ctr"/>
-            <a:r>
-              <a:rPr lang="en-US" sz="3200" dirty="0"/>
-              <a:t>8</a:t>
-            </a:r>
-          </a:p>
-        </p:txBody>
-      </p:sp>
-      <p:sp>
-        <p:nvSpPr>
-          <p:cNvPr id="36" name="TextBox 35">
-            <a:extLst>
-              <a:ext uri="{FF2B5EF4-FFF2-40B4-BE49-F238E27FC236}">
-                <a16:creationId xmlns:a16="http://schemas.microsoft.com/office/drawing/2014/main" id="{6BEA972C-0DA0-4103-57DF-7C9A7F9B06F4}"/>
-              </a:ext>
-            </a:extLst>
-          </p:cNvPr>
-          <p:cNvSpPr txBox="1"/>
-          <p:nvPr/>
-        </p:nvSpPr>
-        <p:spPr>
-          <a:xfrm>
-            <a:off x="4216401" y="2231221"/>
-            <a:ext cx="462845" cy="584775"/>
-          </a:xfrm>
-          <a:prstGeom prst="rect">
-            <a:avLst/>
-          </a:prstGeom>
-          <a:noFill/>
-        </p:spPr>
-        <p:txBody>
-          <a:bodyPr wrap="square" rtlCol="0">
-            <a:spAutoFit/>
-          </a:bodyPr>
-          <a:lstStyle/>
-          <a:p>
-            <a:pPr algn="ctr"/>
-            <a:r>
-              <a:rPr lang="en-US" sz="3200" dirty="0"/>
-              <a:t>8</a:t>
-            </a:r>
-          </a:p>
-        </p:txBody>
-      </p:sp>
-      <p:sp>
-        <p:nvSpPr>
-          <p:cNvPr id="37" name="TextBox 36">
-            <a:extLst>
-              <a:ext uri="{FF2B5EF4-FFF2-40B4-BE49-F238E27FC236}">
-                <a16:creationId xmlns:a16="http://schemas.microsoft.com/office/drawing/2014/main" id="{19CA2BF3-7C64-8FFC-493A-CD5FA047483D}"/>
-              </a:ext>
-            </a:extLst>
-          </p:cNvPr>
-          <p:cNvSpPr txBox="1"/>
-          <p:nvPr/>
-        </p:nvSpPr>
-        <p:spPr>
-          <a:xfrm>
-            <a:off x="4715935" y="2231221"/>
-            <a:ext cx="462845" cy="584775"/>
-          </a:xfrm>
-          <a:prstGeom prst="rect">
-            <a:avLst/>
-          </a:prstGeom>
-          <a:noFill/>
-        </p:spPr>
-        <p:txBody>
-          <a:bodyPr wrap="square" rtlCol="0">
-            <a:spAutoFit/>
-          </a:bodyPr>
-          <a:lstStyle/>
-          <a:p>
-            <a:pPr algn="ctr"/>
-            <a:r>
-              <a:rPr lang="en-US" sz="3200" dirty="0"/>
-              <a:t>8</a:t>
-            </a:r>
-          </a:p>
-        </p:txBody>
-      </p:sp>
-      <p:sp>
-        <p:nvSpPr>
-          <p:cNvPr id="38" name="TextBox 37">
-            <a:extLst>
-              <a:ext uri="{FF2B5EF4-FFF2-40B4-BE49-F238E27FC236}">
-                <a16:creationId xmlns:a16="http://schemas.microsoft.com/office/drawing/2014/main" id="{E09DC838-6EA7-2D9B-C352-B2C84D16ED4B}"/>
-              </a:ext>
-            </a:extLst>
-          </p:cNvPr>
-          <p:cNvSpPr txBox="1"/>
-          <p:nvPr/>
-        </p:nvSpPr>
-        <p:spPr>
-          <a:xfrm>
-            <a:off x="5215469" y="2231221"/>
-            <a:ext cx="462845" cy="584775"/>
-          </a:xfrm>
-          <a:prstGeom prst="rect">
-            <a:avLst/>
-          </a:prstGeom>
-          <a:noFill/>
-        </p:spPr>
-        <p:txBody>
-          <a:bodyPr wrap="square" rtlCol="0">
-            <a:spAutoFit/>
-          </a:bodyPr>
-          <a:lstStyle/>
-          <a:p>
-            <a:pPr algn="ctr"/>
-            <a:r>
-              <a:rPr lang="en-US" sz="3200" dirty="0"/>
-              <a:t>8</a:t>
-            </a:r>
-          </a:p>
-        </p:txBody>
-      </p:sp>
-      <p:sp>
-        <p:nvSpPr>
-          <p:cNvPr id="39" name="TextBox 38">
-            <a:extLst>
-              <a:ext uri="{FF2B5EF4-FFF2-40B4-BE49-F238E27FC236}">
-                <a16:creationId xmlns:a16="http://schemas.microsoft.com/office/drawing/2014/main" id="{4651584D-1439-EC66-CB5E-C86A2E97F446}"/>
-              </a:ext>
-            </a:extLst>
-          </p:cNvPr>
-          <p:cNvSpPr txBox="1"/>
-          <p:nvPr/>
-        </p:nvSpPr>
-        <p:spPr>
-          <a:xfrm>
-            <a:off x="5715003" y="2231221"/>
-            <a:ext cx="462845" cy="584775"/>
-          </a:xfrm>
-          <a:prstGeom prst="rect">
-            <a:avLst/>
-          </a:prstGeom>
-          <a:noFill/>
-        </p:spPr>
-        <p:txBody>
-          <a:bodyPr wrap="square" rtlCol="0">
-            <a:spAutoFit/>
-          </a:bodyPr>
-          <a:lstStyle/>
-          <a:p>
-            <a:pPr algn="ctr"/>
-            <a:r>
-              <a:rPr lang="en-US" sz="3200" dirty="0"/>
-              <a:t>8</a:t>
-            </a:r>
-          </a:p>
-        </p:txBody>
-      </p:sp>
-      <p:sp>
-        <p:nvSpPr>
-          <p:cNvPr id="40" name="TextBox 39">
-            <a:extLst>
-              <a:ext uri="{FF2B5EF4-FFF2-40B4-BE49-F238E27FC236}">
-                <a16:creationId xmlns:a16="http://schemas.microsoft.com/office/drawing/2014/main" id="{1DA50FB8-CE35-4761-A6B0-BE16819394EF}"/>
-              </a:ext>
-            </a:extLst>
-          </p:cNvPr>
-          <p:cNvSpPr txBox="1"/>
-          <p:nvPr/>
-        </p:nvSpPr>
-        <p:spPr>
-          <a:xfrm>
-            <a:off x="6214537" y="2231221"/>
-            <a:ext cx="462845" cy="584775"/>
-          </a:xfrm>
-          <a:prstGeom prst="rect">
-            <a:avLst/>
-          </a:prstGeom>
-          <a:noFill/>
-        </p:spPr>
-        <p:txBody>
-          <a:bodyPr wrap="square" rtlCol="0">
-            <a:spAutoFit/>
-          </a:bodyPr>
-          <a:lstStyle/>
-          <a:p>
-            <a:pPr algn="ctr"/>
-            <a:r>
-              <a:rPr lang="en-US" sz="3200" dirty="0"/>
-              <a:t>8</a:t>
-            </a:r>
-          </a:p>
-        </p:txBody>
-      </p:sp>
-      <p:sp>
-        <p:nvSpPr>
-          <p:cNvPr id="41" name="TextBox 40">
-            <a:extLst>
-              <a:ext uri="{FF2B5EF4-FFF2-40B4-BE49-F238E27FC236}">
-                <a16:creationId xmlns:a16="http://schemas.microsoft.com/office/drawing/2014/main" id="{6B505374-5116-C2E6-9C18-87B5537E1B85}"/>
-              </a:ext>
-            </a:extLst>
-          </p:cNvPr>
-          <p:cNvSpPr txBox="1"/>
-          <p:nvPr/>
-        </p:nvSpPr>
-        <p:spPr>
-          <a:xfrm>
-            <a:off x="6714071" y="2231221"/>
-            <a:ext cx="462845" cy="584775"/>
-          </a:xfrm>
-          <a:prstGeom prst="rect">
-            <a:avLst/>
-          </a:prstGeom>
-          <a:noFill/>
-        </p:spPr>
-        <p:txBody>
-          <a:bodyPr wrap="square" rtlCol="0">
-            <a:spAutoFit/>
-          </a:bodyPr>
-          <a:lstStyle/>
-          <a:p>
-            <a:pPr algn="ctr"/>
-            <a:r>
-              <a:rPr lang="en-US" sz="3200" dirty="0"/>
-              <a:t>8</a:t>
-            </a:r>
-          </a:p>
-        </p:txBody>
-      </p:sp>
-      <p:sp>
-        <p:nvSpPr>
-          <p:cNvPr id="42" name="TextBox 41">
-            <a:extLst>
-              <a:ext uri="{FF2B5EF4-FFF2-40B4-BE49-F238E27FC236}">
-                <a16:creationId xmlns:a16="http://schemas.microsoft.com/office/drawing/2014/main" id="{AD198AF0-1895-C0DD-EC92-CDAB9B090434}"/>
-              </a:ext>
-            </a:extLst>
-          </p:cNvPr>
-          <p:cNvSpPr txBox="1"/>
-          <p:nvPr/>
-        </p:nvSpPr>
-        <p:spPr>
-          <a:xfrm>
-            <a:off x="7213604" y="2231221"/>
-            <a:ext cx="462845" cy="584775"/>
-          </a:xfrm>
-          <a:prstGeom prst="rect">
-            <a:avLst/>
-          </a:prstGeom>
-          <a:noFill/>
-        </p:spPr>
-        <p:txBody>
-          <a:bodyPr wrap="square" rtlCol="0">
-            <a:spAutoFit/>
-          </a:bodyPr>
-          <a:lstStyle/>
-          <a:p>
-            <a:pPr algn="ctr"/>
-            <a:r>
-              <a:rPr lang="en-US" sz="3200" dirty="0"/>
-              <a:t>8</a:t>
-            </a:r>
-          </a:p>
-        </p:txBody>
-      </p:sp>
-      <p:sp>
-        <p:nvSpPr>
-          <p:cNvPr id="44" name="TextBox 43">
-            <a:extLst>
-              <a:ext uri="{FF2B5EF4-FFF2-40B4-BE49-F238E27FC236}">
-                <a16:creationId xmlns:a16="http://schemas.microsoft.com/office/drawing/2014/main" id="{092803FD-DA48-9709-45DB-33484C41E748}"/>
-              </a:ext>
-            </a:extLst>
-          </p:cNvPr>
-          <p:cNvSpPr txBox="1"/>
-          <p:nvPr/>
-        </p:nvSpPr>
-        <p:spPr>
-          <a:xfrm>
-            <a:off x="3217333" y="2734556"/>
-            <a:ext cx="462845" cy="584775"/>
-          </a:xfrm>
-          <a:prstGeom prst="rect">
-            <a:avLst/>
-          </a:prstGeom>
-          <a:noFill/>
-        </p:spPr>
-        <p:txBody>
-          <a:bodyPr wrap="square" rtlCol="0">
-            <a:spAutoFit/>
-          </a:bodyPr>
-          <a:lstStyle/>
-          <a:p>
-            <a:pPr algn="ctr"/>
-            <a:r>
-              <a:rPr lang="en-US" sz="3200" dirty="0"/>
-              <a:t>8</a:t>
-            </a:r>
-          </a:p>
-        </p:txBody>
-      </p:sp>
-      <p:sp>
-        <p:nvSpPr>
-          <p:cNvPr id="45" name="TextBox 44">
-            <a:extLst>
-              <a:ext uri="{FF2B5EF4-FFF2-40B4-BE49-F238E27FC236}">
-                <a16:creationId xmlns:a16="http://schemas.microsoft.com/office/drawing/2014/main" id="{C21C0C67-CA29-B06E-396E-7A36969B8E78}"/>
-              </a:ext>
-            </a:extLst>
-          </p:cNvPr>
-          <p:cNvSpPr txBox="1"/>
-          <p:nvPr/>
-        </p:nvSpPr>
-        <p:spPr>
-          <a:xfrm>
-            <a:off x="3716867" y="2734556"/>
-            <a:ext cx="462845" cy="584775"/>
-          </a:xfrm>
-          <a:prstGeom prst="rect">
-            <a:avLst/>
-          </a:prstGeom>
-          <a:noFill/>
-        </p:spPr>
-        <p:txBody>
-          <a:bodyPr wrap="square" rtlCol="0">
-            <a:spAutoFit/>
-          </a:bodyPr>
-          <a:lstStyle/>
-          <a:p>
-            <a:pPr algn="ctr"/>
-            <a:r>
-              <a:rPr lang="en-US" sz="3200" dirty="0"/>
-              <a:t>8</a:t>
-            </a:r>
-          </a:p>
-        </p:txBody>
-      </p:sp>
-      <p:sp>
-        <p:nvSpPr>
-          <p:cNvPr id="46" name="TextBox 45">
-            <a:extLst>
-              <a:ext uri="{FF2B5EF4-FFF2-40B4-BE49-F238E27FC236}">
-                <a16:creationId xmlns:a16="http://schemas.microsoft.com/office/drawing/2014/main" id="{1FD75AC8-9E2D-D9CA-F432-E1EF59692617}"/>
-              </a:ext>
-            </a:extLst>
-          </p:cNvPr>
-          <p:cNvSpPr txBox="1"/>
-          <p:nvPr/>
-        </p:nvSpPr>
-        <p:spPr>
-          <a:xfrm>
-            <a:off x="4216401" y="2734556"/>
-            <a:ext cx="462845" cy="584775"/>
-          </a:xfrm>
-          <a:prstGeom prst="rect">
-            <a:avLst/>
-          </a:prstGeom>
-          <a:noFill/>
-        </p:spPr>
-        <p:txBody>
-          <a:bodyPr wrap="square" rtlCol="0">
-            <a:spAutoFit/>
-          </a:bodyPr>
-          <a:lstStyle/>
-          <a:p>
-            <a:pPr algn="ctr"/>
-            <a:r>
-              <a:rPr lang="en-US" sz="3200" dirty="0"/>
-              <a:t>8</a:t>
-            </a:r>
-          </a:p>
-        </p:txBody>
-      </p:sp>
-      <p:sp>
-        <p:nvSpPr>
-          <p:cNvPr id="47" name="TextBox 46">
-            <a:extLst>
-              <a:ext uri="{FF2B5EF4-FFF2-40B4-BE49-F238E27FC236}">
-                <a16:creationId xmlns:a16="http://schemas.microsoft.com/office/drawing/2014/main" id="{CEBB1DFA-2C92-38A8-8D03-7A08226FBE03}"/>
-              </a:ext>
-            </a:extLst>
-          </p:cNvPr>
-          <p:cNvSpPr txBox="1"/>
-          <p:nvPr/>
-        </p:nvSpPr>
-        <p:spPr>
-          <a:xfrm>
-            <a:off x="4715935" y="2734556"/>
-            <a:ext cx="462845" cy="584775"/>
-          </a:xfrm>
-          <a:prstGeom prst="rect">
-            <a:avLst/>
-          </a:prstGeom>
-          <a:noFill/>
-        </p:spPr>
-        <p:txBody>
-          <a:bodyPr wrap="square" rtlCol="0">
-            <a:spAutoFit/>
-          </a:bodyPr>
-          <a:lstStyle/>
-          <a:p>
-            <a:pPr algn="ctr"/>
-            <a:r>
-              <a:rPr lang="en-US" sz="3200" dirty="0"/>
-              <a:t>8</a:t>
-            </a:r>
-          </a:p>
-        </p:txBody>
-      </p:sp>
-      <p:sp>
-        <p:nvSpPr>
-          <p:cNvPr id="48" name="TextBox 47">
-            <a:extLst>
-              <a:ext uri="{FF2B5EF4-FFF2-40B4-BE49-F238E27FC236}">
-                <a16:creationId xmlns:a16="http://schemas.microsoft.com/office/drawing/2014/main" id="{86F83141-CD08-5B31-4F44-5DE0A22A0EC4}"/>
-              </a:ext>
-            </a:extLst>
-          </p:cNvPr>
-          <p:cNvSpPr txBox="1"/>
-          <p:nvPr/>
-        </p:nvSpPr>
-        <p:spPr>
-          <a:xfrm>
-            <a:off x="5215469" y="2734556"/>
-            <a:ext cx="462845" cy="584775"/>
-          </a:xfrm>
-          <a:prstGeom prst="rect">
-            <a:avLst/>
-          </a:prstGeom>
-          <a:noFill/>
-        </p:spPr>
-        <p:txBody>
-          <a:bodyPr wrap="square" rtlCol="0">
-            <a:spAutoFit/>
-          </a:bodyPr>
-          <a:lstStyle/>
-          <a:p>
-            <a:pPr algn="ctr"/>
-            <a:r>
-              <a:rPr lang="en-US" sz="3200" dirty="0"/>
-              <a:t>8</a:t>
-            </a:r>
-          </a:p>
-        </p:txBody>
-      </p:sp>
-      <p:sp>
-        <p:nvSpPr>
-          <p:cNvPr id="49" name="TextBox 48">
-            <a:extLst>
-              <a:ext uri="{FF2B5EF4-FFF2-40B4-BE49-F238E27FC236}">
-                <a16:creationId xmlns:a16="http://schemas.microsoft.com/office/drawing/2014/main" id="{0BD09B68-5DCD-1930-6026-8DEC57FB5550}"/>
-              </a:ext>
-            </a:extLst>
-          </p:cNvPr>
-          <p:cNvSpPr txBox="1"/>
-          <p:nvPr/>
-        </p:nvSpPr>
-        <p:spPr>
-          <a:xfrm>
-            <a:off x="5715003" y="2734556"/>
-            <a:ext cx="462845" cy="584775"/>
-          </a:xfrm>
-          <a:prstGeom prst="rect">
-            <a:avLst/>
-          </a:prstGeom>
-          <a:noFill/>
-        </p:spPr>
-        <p:txBody>
-          <a:bodyPr wrap="square" rtlCol="0">
-            <a:spAutoFit/>
-          </a:bodyPr>
-          <a:lstStyle/>
-          <a:p>
-            <a:pPr algn="ctr"/>
-            <a:r>
-              <a:rPr lang="en-US" sz="3200" dirty="0"/>
-              <a:t>8</a:t>
-            </a:r>
-          </a:p>
-        </p:txBody>
-      </p:sp>
-      <p:sp>
-        <p:nvSpPr>
-          <p:cNvPr id="50" name="TextBox 49">
-            <a:extLst>
-              <a:ext uri="{FF2B5EF4-FFF2-40B4-BE49-F238E27FC236}">
-                <a16:creationId xmlns:a16="http://schemas.microsoft.com/office/drawing/2014/main" id="{F72594FE-277C-5973-94EE-AA3BE44A34F7}"/>
-              </a:ext>
-            </a:extLst>
-          </p:cNvPr>
-          <p:cNvSpPr txBox="1"/>
-          <p:nvPr/>
-        </p:nvSpPr>
-        <p:spPr>
-          <a:xfrm>
-            <a:off x="6214537" y="2734556"/>
-            <a:ext cx="462845" cy="584775"/>
-          </a:xfrm>
-          <a:prstGeom prst="rect">
-            <a:avLst/>
-          </a:prstGeom>
-          <a:noFill/>
-        </p:spPr>
-        <p:txBody>
-          <a:bodyPr wrap="square" rtlCol="0">
-            <a:spAutoFit/>
-          </a:bodyPr>
-          <a:lstStyle/>
-          <a:p>
-            <a:pPr algn="ctr"/>
-            <a:r>
-              <a:rPr lang="en-US" sz="3200" dirty="0"/>
-              <a:t>8</a:t>
-            </a:r>
-          </a:p>
-        </p:txBody>
-      </p:sp>
-      <p:sp>
-        <p:nvSpPr>
-          <p:cNvPr id="51" name="TextBox 50">
-            <a:extLst>
-              <a:ext uri="{FF2B5EF4-FFF2-40B4-BE49-F238E27FC236}">
-                <a16:creationId xmlns:a16="http://schemas.microsoft.com/office/drawing/2014/main" id="{C2833383-2619-8AE1-E22E-EFFB76B969DF}"/>
-              </a:ext>
-            </a:extLst>
-          </p:cNvPr>
-          <p:cNvSpPr txBox="1"/>
-          <p:nvPr/>
-        </p:nvSpPr>
-        <p:spPr>
-          <a:xfrm>
-            <a:off x="6714071" y="2734556"/>
-            <a:ext cx="462845" cy="584775"/>
-          </a:xfrm>
-          <a:prstGeom prst="rect">
-            <a:avLst/>
-          </a:prstGeom>
-          <a:noFill/>
-        </p:spPr>
-        <p:txBody>
-          <a:bodyPr wrap="square" rtlCol="0">
-            <a:spAutoFit/>
-          </a:bodyPr>
-          <a:lstStyle/>
-          <a:p>
-            <a:pPr algn="ctr"/>
-            <a:r>
-              <a:rPr lang="en-US" sz="3200" dirty="0"/>
-              <a:t>8</a:t>
-            </a:r>
-          </a:p>
-        </p:txBody>
-      </p:sp>
-      <p:sp>
-        <p:nvSpPr>
-          <p:cNvPr id="52" name="TextBox 51">
-            <a:extLst>
-              <a:ext uri="{FF2B5EF4-FFF2-40B4-BE49-F238E27FC236}">
-                <a16:creationId xmlns:a16="http://schemas.microsoft.com/office/drawing/2014/main" id="{2599D6A1-CC8E-6CC2-B3F7-4326B2300215}"/>
-              </a:ext>
-            </a:extLst>
-          </p:cNvPr>
-          <p:cNvSpPr txBox="1"/>
-          <p:nvPr/>
-        </p:nvSpPr>
-        <p:spPr>
-          <a:xfrm>
-            <a:off x="7213604" y="2734556"/>
-            <a:ext cx="462845" cy="584775"/>
-          </a:xfrm>
-          <a:prstGeom prst="rect">
-            <a:avLst/>
-          </a:prstGeom>
-          <a:noFill/>
-        </p:spPr>
-        <p:txBody>
-          <a:bodyPr wrap="square" rtlCol="0">
-            <a:spAutoFit/>
-          </a:bodyPr>
-          <a:lstStyle/>
-          <a:p>
-            <a:pPr algn="ctr"/>
-            <a:r>
-              <a:rPr lang="en-US" sz="3200" dirty="0"/>
-              <a:t>8</a:t>
-            </a:r>
-          </a:p>
-        </p:txBody>
-      </p:sp>
-      <p:sp>
-        <p:nvSpPr>
-          <p:cNvPr id="54" name="TextBox 53">
-            <a:extLst>
-              <a:ext uri="{FF2B5EF4-FFF2-40B4-BE49-F238E27FC236}">
-                <a16:creationId xmlns:a16="http://schemas.microsoft.com/office/drawing/2014/main" id="{72900A5E-6D76-587C-2DFD-92EFA48157D7}"/>
-              </a:ext>
-            </a:extLst>
-          </p:cNvPr>
-          <p:cNvSpPr txBox="1"/>
-          <p:nvPr/>
-        </p:nvSpPr>
-        <p:spPr>
-          <a:xfrm>
-            <a:off x="3217333" y="3237891"/>
-            <a:ext cx="462845" cy="584775"/>
-          </a:xfrm>
-          <a:prstGeom prst="rect">
-            <a:avLst/>
-          </a:prstGeom>
-          <a:noFill/>
-        </p:spPr>
-        <p:txBody>
-          <a:bodyPr wrap="square" rtlCol="0">
-            <a:spAutoFit/>
-          </a:bodyPr>
-          <a:lstStyle/>
-          <a:p>
-            <a:pPr algn="ctr"/>
-            <a:r>
-              <a:rPr lang="en-US" sz="3200" dirty="0"/>
-              <a:t>8</a:t>
-            </a:r>
-          </a:p>
-        </p:txBody>
-      </p:sp>
-      <p:sp>
-        <p:nvSpPr>
-          <p:cNvPr id="55" name="TextBox 54">
-            <a:extLst>
-              <a:ext uri="{FF2B5EF4-FFF2-40B4-BE49-F238E27FC236}">
-                <a16:creationId xmlns:a16="http://schemas.microsoft.com/office/drawing/2014/main" id="{7E234C15-D43D-7905-5E6D-8AB06EB39258}"/>
-              </a:ext>
-            </a:extLst>
-          </p:cNvPr>
-          <p:cNvSpPr txBox="1"/>
-          <p:nvPr/>
-        </p:nvSpPr>
-        <p:spPr>
-          <a:xfrm>
-            <a:off x="3716867" y="3237891"/>
-            <a:ext cx="462845" cy="584775"/>
-          </a:xfrm>
-          <a:prstGeom prst="rect">
-            <a:avLst/>
-          </a:prstGeom>
-          <a:noFill/>
-        </p:spPr>
-        <p:txBody>
-          <a:bodyPr wrap="square" rtlCol="0">
-            <a:spAutoFit/>
-          </a:bodyPr>
-          <a:lstStyle/>
-          <a:p>
-            <a:pPr algn="ctr"/>
-            <a:r>
-              <a:rPr lang="en-US" sz="3200" dirty="0"/>
-              <a:t>8</a:t>
-            </a:r>
-          </a:p>
-        </p:txBody>
-      </p:sp>
-      <p:sp>
-        <p:nvSpPr>
-          <p:cNvPr id="56" name="TextBox 55">
-            <a:extLst>
-              <a:ext uri="{FF2B5EF4-FFF2-40B4-BE49-F238E27FC236}">
-                <a16:creationId xmlns:a16="http://schemas.microsoft.com/office/drawing/2014/main" id="{BB2701EA-E576-BD64-46C7-6B254099F3E9}"/>
-              </a:ext>
-            </a:extLst>
-          </p:cNvPr>
-          <p:cNvSpPr txBox="1"/>
-          <p:nvPr/>
-        </p:nvSpPr>
-        <p:spPr>
-          <a:xfrm>
-            <a:off x="4216401" y="3237891"/>
-            <a:ext cx="462845" cy="584775"/>
-          </a:xfrm>
-          <a:prstGeom prst="rect">
-            <a:avLst/>
-          </a:prstGeom>
-          <a:noFill/>
-        </p:spPr>
-        <p:txBody>
-          <a:bodyPr wrap="square" rtlCol="0">
-            <a:spAutoFit/>
-          </a:bodyPr>
-          <a:lstStyle/>
-          <a:p>
-            <a:pPr algn="ctr"/>
-            <a:r>
-              <a:rPr lang="en-US" sz="3200" dirty="0"/>
-              <a:t>8</a:t>
-            </a:r>
-          </a:p>
-        </p:txBody>
-      </p:sp>
-      <p:sp>
-        <p:nvSpPr>
-          <p:cNvPr id="57" name="TextBox 56">
-            <a:extLst>
-              <a:ext uri="{FF2B5EF4-FFF2-40B4-BE49-F238E27FC236}">
-                <a16:creationId xmlns:a16="http://schemas.microsoft.com/office/drawing/2014/main" id="{3741FDD4-FA46-9AC6-95A6-FDFC78139B79}"/>
-              </a:ext>
-            </a:extLst>
-          </p:cNvPr>
-          <p:cNvSpPr txBox="1"/>
-          <p:nvPr/>
-        </p:nvSpPr>
-        <p:spPr>
-          <a:xfrm>
-            <a:off x="4715935" y="3237891"/>
-            <a:ext cx="462845" cy="584775"/>
-          </a:xfrm>
-          <a:prstGeom prst="rect">
-            <a:avLst/>
-          </a:prstGeom>
-          <a:noFill/>
-        </p:spPr>
-        <p:txBody>
-          <a:bodyPr wrap="square" rtlCol="0">
-            <a:spAutoFit/>
-          </a:bodyPr>
-          <a:lstStyle/>
-          <a:p>
-            <a:pPr algn="ctr"/>
-            <a:r>
-              <a:rPr lang="en-US" sz="3200" dirty="0"/>
-              <a:t>8</a:t>
-            </a:r>
-          </a:p>
-        </p:txBody>
-      </p:sp>
-      <p:sp>
-        <p:nvSpPr>
-          <p:cNvPr id="58" name="TextBox 57">
-            <a:extLst>
-              <a:ext uri="{FF2B5EF4-FFF2-40B4-BE49-F238E27FC236}">
-                <a16:creationId xmlns:a16="http://schemas.microsoft.com/office/drawing/2014/main" id="{04F08D5B-239E-1FF0-4FCC-7AC6DEF18DFC}"/>
-              </a:ext>
-            </a:extLst>
-          </p:cNvPr>
-          <p:cNvSpPr txBox="1"/>
-          <p:nvPr/>
-        </p:nvSpPr>
-        <p:spPr>
-          <a:xfrm>
-            <a:off x="5215469" y="3237891"/>
-            <a:ext cx="462845" cy="584775"/>
-          </a:xfrm>
-          <a:prstGeom prst="rect">
-            <a:avLst/>
-          </a:prstGeom>
-          <a:noFill/>
-        </p:spPr>
-        <p:txBody>
-          <a:bodyPr wrap="square" rtlCol="0">
-            <a:spAutoFit/>
-          </a:bodyPr>
-          <a:lstStyle/>
-          <a:p>
-            <a:pPr algn="ctr"/>
-            <a:r>
-              <a:rPr lang="en-US" sz="3200" dirty="0"/>
-              <a:t>8</a:t>
-            </a:r>
-          </a:p>
-        </p:txBody>
-      </p:sp>
-      <p:sp>
-        <p:nvSpPr>
-          <p:cNvPr id="59" name="TextBox 58">
-            <a:extLst>
-              <a:ext uri="{FF2B5EF4-FFF2-40B4-BE49-F238E27FC236}">
-                <a16:creationId xmlns:a16="http://schemas.microsoft.com/office/drawing/2014/main" id="{6C510B19-3198-6775-4DB8-2969F74BB93A}"/>
-              </a:ext>
-            </a:extLst>
-          </p:cNvPr>
-          <p:cNvSpPr txBox="1"/>
-          <p:nvPr/>
-        </p:nvSpPr>
-        <p:spPr>
-          <a:xfrm>
-            <a:off x="5715003" y="3237891"/>
-            <a:ext cx="462845" cy="584775"/>
-          </a:xfrm>
-          <a:prstGeom prst="rect">
-            <a:avLst/>
-          </a:prstGeom>
-          <a:noFill/>
-        </p:spPr>
-        <p:txBody>
-          <a:bodyPr wrap="square" rtlCol="0">
-            <a:spAutoFit/>
-          </a:bodyPr>
-          <a:lstStyle/>
-          <a:p>
-            <a:pPr algn="ctr"/>
-            <a:r>
-              <a:rPr lang="en-US" sz="3200" dirty="0"/>
-              <a:t>8</a:t>
-            </a:r>
-          </a:p>
-        </p:txBody>
-      </p:sp>
-      <p:sp>
-        <p:nvSpPr>
-          <p:cNvPr id="60" name="TextBox 59">
-            <a:extLst>
-              <a:ext uri="{FF2B5EF4-FFF2-40B4-BE49-F238E27FC236}">
-                <a16:creationId xmlns:a16="http://schemas.microsoft.com/office/drawing/2014/main" id="{FC63EBB7-8DEA-A035-671B-095EFE94FBD9}"/>
-              </a:ext>
-            </a:extLst>
-          </p:cNvPr>
-          <p:cNvSpPr txBox="1"/>
-          <p:nvPr/>
-        </p:nvSpPr>
-        <p:spPr>
-          <a:xfrm>
-            <a:off x="6214537" y="3237891"/>
-            <a:ext cx="462845" cy="584775"/>
-          </a:xfrm>
-          <a:prstGeom prst="rect">
-            <a:avLst/>
-          </a:prstGeom>
-          <a:noFill/>
-        </p:spPr>
-        <p:txBody>
-          <a:bodyPr wrap="square" rtlCol="0">
-            <a:spAutoFit/>
-          </a:bodyPr>
-          <a:lstStyle/>
-          <a:p>
-            <a:pPr algn="ctr"/>
-            <a:r>
-              <a:rPr lang="en-US" sz="3200" dirty="0"/>
-              <a:t>8</a:t>
-            </a:r>
-          </a:p>
-        </p:txBody>
-      </p:sp>
-      <p:sp>
-        <p:nvSpPr>
-          <p:cNvPr id="61" name="TextBox 60">
-            <a:extLst>
-              <a:ext uri="{FF2B5EF4-FFF2-40B4-BE49-F238E27FC236}">
-                <a16:creationId xmlns:a16="http://schemas.microsoft.com/office/drawing/2014/main" id="{07A408D1-2795-2A51-8BEF-F3518493AC53}"/>
-              </a:ext>
-            </a:extLst>
-          </p:cNvPr>
-          <p:cNvSpPr txBox="1"/>
-          <p:nvPr/>
-        </p:nvSpPr>
-        <p:spPr>
-          <a:xfrm>
-            <a:off x="6714071" y="3237891"/>
-            <a:ext cx="462845" cy="584775"/>
-          </a:xfrm>
-          <a:prstGeom prst="rect">
-            <a:avLst/>
-          </a:prstGeom>
-          <a:noFill/>
-        </p:spPr>
-        <p:txBody>
-          <a:bodyPr wrap="square" rtlCol="0">
-            <a:spAutoFit/>
-          </a:bodyPr>
-          <a:lstStyle/>
-          <a:p>
-            <a:pPr algn="ctr"/>
-            <a:r>
-              <a:rPr lang="en-US" sz="3200" dirty="0"/>
-              <a:t>8</a:t>
-            </a:r>
-          </a:p>
-        </p:txBody>
-      </p:sp>
-      <p:sp>
-        <p:nvSpPr>
-          <p:cNvPr id="62" name="TextBox 61">
-            <a:extLst>
-              <a:ext uri="{FF2B5EF4-FFF2-40B4-BE49-F238E27FC236}">
-                <a16:creationId xmlns:a16="http://schemas.microsoft.com/office/drawing/2014/main" id="{1A778707-033E-7FA2-42DF-480BFEF412A3}"/>
-              </a:ext>
-            </a:extLst>
-          </p:cNvPr>
-          <p:cNvSpPr txBox="1"/>
-          <p:nvPr/>
-        </p:nvSpPr>
-        <p:spPr>
-          <a:xfrm>
-            <a:off x="7213604" y="3237891"/>
-            <a:ext cx="462845" cy="584775"/>
-          </a:xfrm>
-          <a:prstGeom prst="rect">
-            <a:avLst/>
-          </a:prstGeom>
-          <a:noFill/>
-        </p:spPr>
-        <p:txBody>
-          <a:bodyPr wrap="square" rtlCol="0">
-            <a:spAutoFit/>
-          </a:bodyPr>
-          <a:lstStyle/>
-          <a:p>
-            <a:pPr algn="ctr"/>
-            <a:r>
-              <a:rPr lang="en-US" sz="3200" dirty="0"/>
-              <a:t>8</a:t>
-            </a:r>
-          </a:p>
-        </p:txBody>
-      </p:sp>
-      <p:sp>
-        <p:nvSpPr>
-          <p:cNvPr id="64" name="TextBox 63">
-            <a:extLst>
-              <a:ext uri="{FF2B5EF4-FFF2-40B4-BE49-F238E27FC236}">
-                <a16:creationId xmlns:a16="http://schemas.microsoft.com/office/drawing/2014/main" id="{B2B1692B-0E77-4376-C7FF-6BEDD63BF2DE}"/>
-              </a:ext>
-            </a:extLst>
-          </p:cNvPr>
-          <p:cNvSpPr txBox="1"/>
-          <p:nvPr/>
-        </p:nvSpPr>
-        <p:spPr>
-          <a:xfrm>
-            <a:off x="3217333" y="3741226"/>
-            <a:ext cx="462845" cy="584775"/>
-          </a:xfrm>
-          <a:prstGeom prst="rect">
-            <a:avLst/>
-          </a:prstGeom>
-          <a:noFill/>
-        </p:spPr>
-        <p:txBody>
-          <a:bodyPr wrap="square" rtlCol="0">
-            <a:spAutoFit/>
-          </a:bodyPr>
-          <a:lstStyle/>
-          <a:p>
-            <a:pPr algn="ctr"/>
-            <a:r>
-              <a:rPr lang="en-US" sz="3200" dirty="0"/>
-              <a:t>8</a:t>
-            </a:r>
-          </a:p>
-        </p:txBody>
-      </p:sp>
-      <p:sp>
-        <p:nvSpPr>
-          <p:cNvPr id="65" name="TextBox 64">
-            <a:extLst>
-              <a:ext uri="{FF2B5EF4-FFF2-40B4-BE49-F238E27FC236}">
-                <a16:creationId xmlns:a16="http://schemas.microsoft.com/office/drawing/2014/main" id="{B1053752-9030-C29D-9833-883262A51684}"/>
-              </a:ext>
-            </a:extLst>
-          </p:cNvPr>
-          <p:cNvSpPr txBox="1"/>
-          <p:nvPr/>
-        </p:nvSpPr>
-        <p:spPr>
-          <a:xfrm>
-            <a:off x="3716867" y="3741226"/>
-            <a:ext cx="462845" cy="584775"/>
-          </a:xfrm>
-          <a:prstGeom prst="rect">
-            <a:avLst/>
-          </a:prstGeom>
-          <a:noFill/>
-        </p:spPr>
-        <p:txBody>
-          <a:bodyPr wrap="square" rtlCol="0">
-            <a:spAutoFit/>
-          </a:bodyPr>
-          <a:lstStyle/>
-          <a:p>
-            <a:pPr algn="ctr"/>
-            <a:r>
-              <a:rPr lang="en-US" sz="3200" dirty="0"/>
-              <a:t>8</a:t>
-            </a:r>
-          </a:p>
-        </p:txBody>
-      </p:sp>
-      <p:sp>
-        <p:nvSpPr>
-          <p:cNvPr id="66" name="TextBox 65">
-            <a:extLst>
-              <a:ext uri="{FF2B5EF4-FFF2-40B4-BE49-F238E27FC236}">
-                <a16:creationId xmlns:a16="http://schemas.microsoft.com/office/drawing/2014/main" id="{E37147F7-AE3B-012E-53BB-889E5E744C0C}"/>
-              </a:ext>
-            </a:extLst>
-          </p:cNvPr>
-          <p:cNvSpPr txBox="1"/>
-          <p:nvPr/>
-        </p:nvSpPr>
-        <p:spPr>
-          <a:xfrm>
-            <a:off x="4216401" y="3741226"/>
-            <a:ext cx="462845" cy="584775"/>
-          </a:xfrm>
-          <a:prstGeom prst="rect">
-            <a:avLst/>
-          </a:prstGeom>
-          <a:noFill/>
-        </p:spPr>
-        <p:txBody>
-          <a:bodyPr wrap="square" rtlCol="0">
-            <a:spAutoFit/>
-          </a:bodyPr>
-          <a:lstStyle/>
-          <a:p>
-            <a:pPr algn="ctr"/>
-            <a:r>
-              <a:rPr lang="en-US" sz="3200" dirty="0"/>
-              <a:t>8</a:t>
-            </a:r>
-          </a:p>
-        </p:txBody>
-      </p:sp>
-      <p:sp>
-        <p:nvSpPr>
-          <p:cNvPr id="67" name="TextBox 66">
-            <a:extLst>
-              <a:ext uri="{FF2B5EF4-FFF2-40B4-BE49-F238E27FC236}">
-                <a16:creationId xmlns:a16="http://schemas.microsoft.com/office/drawing/2014/main" id="{4AD2CEC6-2C4F-D2FE-6FE4-CFE4011CB0B2}"/>
-              </a:ext>
-            </a:extLst>
-          </p:cNvPr>
-          <p:cNvSpPr txBox="1"/>
-          <p:nvPr/>
-        </p:nvSpPr>
-        <p:spPr>
-          <a:xfrm>
-            <a:off x="4715935" y="3741226"/>
-            <a:ext cx="462845" cy="584775"/>
-          </a:xfrm>
-          <a:prstGeom prst="rect">
-            <a:avLst/>
-          </a:prstGeom>
-          <a:noFill/>
-        </p:spPr>
-        <p:txBody>
-          <a:bodyPr wrap="square" rtlCol="0">
-            <a:spAutoFit/>
-          </a:bodyPr>
-          <a:lstStyle/>
-          <a:p>
-            <a:pPr algn="ctr"/>
-            <a:r>
-              <a:rPr lang="en-US" sz="3200" dirty="0"/>
-              <a:t>8</a:t>
-            </a:r>
-          </a:p>
-        </p:txBody>
-      </p:sp>
-      <p:sp>
-        <p:nvSpPr>
-          <p:cNvPr id="68" name="TextBox 67">
-            <a:extLst>
-              <a:ext uri="{FF2B5EF4-FFF2-40B4-BE49-F238E27FC236}">
-                <a16:creationId xmlns:a16="http://schemas.microsoft.com/office/drawing/2014/main" id="{080537B0-8323-1A64-DF09-39FB32AAC482}"/>
-              </a:ext>
-            </a:extLst>
-          </p:cNvPr>
-          <p:cNvSpPr txBox="1"/>
-          <p:nvPr/>
-        </p:nvSpPr>
-        <p:spPr>
-          <a:xfrm>
-            <a:off x="5215469" y="3741226"/>
-            <a:ext cx="462845" cy="584775"/>
-          </a:xfrm>
-          <a:prstGeom prst="rect">
-            <a:avLst/>
-          </a:prstGeom>
-          <a:noFill/>
-        </p:spPr>
-        <p:txBody>
-          <a:bodyPr wrap="square" rtlCol="0">
-            <a:spAutoFit/>
-          </a:bodyPr>
-          <a:lstStyle/>
-          <a:p>
-            <a:pPr algn="ctr"/>
-            <a:r>
-              <a:rPr lang="en-US" sz="3200" dirty="0"/>
-              <a:t>8</a:t>
-            </a:r>
-          </a:p>
-        </p:txBody>
-      </p:sp>
-      <p:sp>
-        <p:nvSpPr>
-          <p:cNvPr id="69" name="TextBox 68">
-            <a:extLst>
-              <a:ext uri="{FF2B5EF4-FFF2-40B4-BE49-F238E27FC236}">
-                <a16:creationId xmlns:a16="http://schemas.microsoft.com/office/drawing/2014/main" id="{68D6592A-F37B-D23D-AD44-F04E1DAAF64C}"/>
-              </a:ext>
-            </a:extLst>
-          </p:cNvPr>
-          <p:cNvSpPr txBox="1"/>
-          <p:nvPr/>
-        </p:nvSpPr>
-        <p:spPr>
-          <a:xfrm>
-            <a:off x="5715003" y="3741226"/>
-            <a:ext cx="462845" cy="584775"/>
-          </a:xfrm>
-          <a:prstGeom prst="rect">
-            <a:avLst/>
-          </a:prstGeom>
-          <a:noFill/>
-        </p:spPr>
-        <p:txBody>
-          <a:bodyPr wrap="square" rtlCol="0">
-            <a:spAutoFit/>
-          </a:bodyPr>
-          <a:lstStyle/>
-          <a:p>
-            <a:pPr algn="ctr"/>
-            <a:r>
-              <a:rPr lang="en-US" sz="3200" dirty="0"/>
-              <a:t>8</a:t>
-            </a:r>
-          </a:p>
-        </p:txBody>
-      </p:sp>
-      <p:sp>
-        <p:nvSpPr>
-          <p:cNvPr id="70" name="TextBox 69">
-            <a:extLst>
-              <a:ext uri="{FF2B5EF4-FFF2-40B4-BE49-F238E27FC236}">
-                <a16:creationId xmlns:a16="http://schemas.microsoft.com/office/drawing/2014/main" id="{D2C1DE1F-157A-4870-A897-AD5741D3D062}"/>
-              </a:ext>
-            </a:extLst>
-          </p:cNvPr>
-          <p:cNvSpPr txBox="1"/>
-          <p:nvPr/>
-        </p:nvSpPr>
-        <p:spPr>
-          <a:xfrm>
-            <a:off x="6214537" y="3741226"/>
-            <a:ext cx="462845" cy="584775"/>
-          </a:xfrm>
-          <a:prstGeom prst="rect">
-            <a:avLst/>
-          </a:prstGeom>
-          <a:noFill/>
-        </p:spPr>
-        <p:txBody>
-          <a:bodyPr wrap="square" rtlCol="0">
-            <a:spAutoFit/>
-          </a:bodyPr>
-          <a:lstStyle/>
-          <a:p>
-            <a:pPr algn="ctr"/>
-            <a:r>
-              <a:rPr lang="en-US" sz="3200" dirty="0"/>
-              <a:t>8</a:t>
-            </a:r>
-          </a:p>
-        </p:txBody>
-      </p:sp>
-      <p:sp>
-        <p:nvSpPr>
-          <p:cNvPr id="71" name="TextBox 70">
-            <a:extLst>
-              <a:ext uri="{FF2B5EF4-FFF2-40B4-BE49-F238E27FC236}">
-                <a16:creationId xmlns:a16="http://schemas.microsoft.com/office/drawing/2014/main" id="{E2B2FA07-D551-8692-E1B6-CE27DBF0E8CD}"/>
-              </a:ext>
-            </a:extLst>
-          </p:cNvPr>
-          <p:cNvSpPr txBox="1"/>
-          <p:nvPr/>
-        </p:nvSpPr>
-        <p:spPr>
-          <a:xfrm>
-            <a:off x="6714071" y="3741226"/>
-            <a:ext cx="462845" cy="584775"/>
-          </a:xfrm>
-          <a:prstGeom prst="rect">
-            <a:avLst/>
-          </a:prstGeom>
-          <a:noFill/>
-        </p:spPr>
-        <p:txBody>
-          <a:bodyPr wrap="square" rtlCol="0">
-            <a:spAutoFit/>
-          </a:bodyPr>
-          <a:lstStyle/>
-          <a:p>
-            <a:pPr algn="ctr"/>
-            <a:r>
-              <a:rPr lang="en-US" sz="3200" dirty="0"/>
-              <a:t>8</a:t>
-            </a:r>
-          </a:p>
-        </p:txBody>
-      </p:sp>
-      <p:sp>
-        <p:nvSpPr>
-          <p:cNvPr id="72" name="TextBox 71">
-            <a:extLst>
-              <a:ext uri="{FF2B5EF4-FFF2-40B4-BE49-F238E27FC236}">
-                <a16:creationId xmlns:a16="http://schemas.microsoft.com/office/drawing/2014/main" id="{0DBF17E8-18BD-C042-E6F2-603E8EE78A32}"/>
-              </a:ext>
-            </a:extLst>
-          </p:cNvPr>
-          <p:cNvSpPr txBox="1"/>
-          <p:nvPr/>
-        </p:nvSpPr>
-        <p:spPr>
-          <a:xfrm>
-            <a:off x="7213604" y="3741226"/>
-            <a:ext cx="462845" cy="584775"/>
-          </a:xfrm>
-          <a:prstGeom prst="rect">
-            <a:avLst/>
-          </a:prstGeom>
-          <a:noFill/>
-        </p:spPr>
-        <p:txBody>
-          <a:bodyPr wrap="square" rtlCol="0">
-            <a:spAutoFit/>
-          </a:bodyPr>
-          <a:lstStyle/>
-          <a:p>
-            <a:pPr algn="ctr"/>
-            <a:r>
-              <a:rPr lang="en-US" sz="3200" dirty="0"/>
-              <a:t>8</a:t>
-            </a:r>
-          </a:p>
-        </p:txBody>
-      </p:sp>
-      <p:sp>
-        <p:nvSpPr>
-          <p:cNvPr id="74" name="TextBox 73">
-            <a:extLst>
-              <a:ext uri="{FF2B5EF4-FFF2-40B4-BE49-F238E27FC236}">
-                <a16:creationId xmlns:a16="http://schemas.microsoft.com/office/drawing/2014/main" id="{59053E0A-1A09-D426-1081-D848E9FE3760}"/>
-              </a:ext>
-            </a:extLst>
-          </p:cNvPr>
-          <p:cNvSpPr txBox="1"/>
-          <p:nvPr/>
-        </p:nvSpPr>
-        <p:spPr>
-          <a:xfrm>
-            <a:off x="3217333" y="4244561"/>
-            <a:ext cx="462845" cy="584775"/>
-          </a:xfrm>
-          <a:prstGeom prst="rect">
-            <a:avLst/>
-          </a:prstGeom>
-          <a:noFill/>
-        </p:spPr>
-        <p:txBody>
-          <a:bodyPr wrap="square" rtlCol="0">
-            <a:spAutoFit/>
-          </a:bodyPr>
-          <a:lstStyle/>
-          <a:p>
-            <a:pPr algn="ctr"/>
-            <a:r>
-              <a:rPr lang="en-US" sz="3200" dirty="0"/>
-              <a:t>8</a:t>
-            </a:r>
-          </a:p>
-        </p:txBody>
-      </p:sp>
-      <p:sp>
-        <p:nvSpPr>
-          <p:cNvPr id="75" name="TextBox 74">
-            <a:extLst>
-              <a:ext uri="{FF2B5EF4-FFF2-40B4-BE49-F238E27FC236}">
-                <a16:creationId xmlns:a16="http://schemas.microsoft.com/office/drawing/2014/main" id="{CBFA6531-FBE6-5D53-5C12-5684C04762A4}"/>
-              </a:ext>
-            </a:extLst>
-          </p:cNvPr>
-          <p:cNvSpPr txBox="1"/>
-          <p:nvPr/>
-        </p:nvSpPr>
-        <p:spPr>
-          <a:xfrm>
-            <a:off x="3716867" y="4244561"/>
-            <a:ext cx="462845" cy="584775"/>
-          </a:xfrm>
-          <a:prstGeom prst="rect">
-            <a:avLst/>
-          </a:prstGeom>
-          <a:noFill/>
-        </p:spPr>
-        <p:txBody>
-          <a:bodyPr wrap="square" rtlCol="0">
-            <a:spAutoFit/>
-          </a:bodyPr>
-          <a:lstStyle/>
-          <a:p>
-            <a:pPr algn="ctr"/>
-            <a:r>
-              <a:rPr lang="en-US" sz="3200" dirty="0"/>
-              <a:t>8</a:t>
-            </a:r>
-          </a:p>
-        </p:txBody>
-      </p:sp>
-      <p:sp>
-        <p:nvSpPr>
-          <p:cNvPr id="76" name="TextBox 75">
-            <a:extLst>
-              <a:ext uri="{FF2B5EF4-FFF2-40B4-BE49-F238E27FC236}">
-                <a16:creationId xmlns:a16="http://schemas.microsoft.com/office/drawing/2014/main" id="{253DA081-0DE0-137F-7136-8DADDE0F2CA8}"/>
-              </a:ext>
-            </a:extLst>
-          </p:cNvPr>
-          <p:cNvSpPr txBox="1"/>
-          <p:nvPr/>
-        </p:nvSpPr>
-        <p:spPr>
-          <a:xfrm>
-            <a:off x="4216401" y="4244561"/>
-            <a:ext cx="462845" cy="584775"/>
-          </a:xfrm>
-          <a:prstGeom prst="rect">
-            <a:avLst/>
-          </a:prstGeom>
-          <a:noFill/>
-        </p:spPr>
-        <p:txBody>
-          <a:bodyPr wrap="square" rtlCol="0">
-            <a:spAutoFit/>
-          </a:bodyPr>
-          <a:lstStyle/>
-          <a:p>
-            <a:pPr algn="ctr"/>
-            <a:r>
-              <a:rPr lang="en-US" sz="3200" dirty="0"/>
-              <a:t>8</a:t>
-            </a:r>
-          </a:p>
-        </p:txBody>
-      </p:sp>
-      <p:sp>
-        <p:nvSpPr>
-          <p:cNvPr id="77" name="TextBox 76">
-            <a:extLst>
-              <a:ext uri="{FF2B5EF4-FFF2-40B4-BE49-F238E27FC236}">
-                <a16:creationId xmlns:a16="http://schemas.microsoft.com/office/drawing/2014/main" id="{5367410F-ADD1-8006-218E-1093B4ED303A}"/>
-              </a:ext>
-            </a:extLst>
-          </p:cNvPr>
-          <p:cNvSpPr txBox="1"/>
-          <p:nvPr/>
-        </p:nvSpPr>
-        <p:spPr>
-          <a:xfrm>
-            <a:off x="4715935" y="4244561"/>
-            <a:ext cx="462845" cy="584775"/>
-          </a:xfrm>
-          <a:prstGeom prst="rect">
-            <a:avLst/>
-          </a:prstGeom>
-          <a:noFill/>
-        </p:spPr>
-        <p:txBody>
-          <a:bodyPr wrap="square" rtlCol="0">
-            <a:spAutoFit/>
-          </a:bodyPr>
-          <a:lstStyle/>
-          <a:p>
-            <a:pPr algn="ctr"/>
-            <a:r>
-              <a:rPr lang="en-US" sz="3200" dirty="0"/>
-              <a:t>8</a:t>
-            </a:r>
-          </a:p>
-        </p:txBody>
-      </p:sp>
-      <p:sp>
-        <p:nvSpPr>
-          <p:cNvPr id="78" name="TextBox 77">
-            <a:extLst>
-              <a:ext uri="{FF2B5EF4-FFF2-40B4-BE49-F238E27FC236}">
-                <a16:creationId xmlns:a16="http://schemas.microsoft.com/office/drawing/2014/main" id="{271A5C86-5ECE-083E-5505-4004ED2BCCE3}"/>
-              </a:ext>
-            </a:extLst>
-          </p:cNvPr>
-          <p:cNvSpPr txBox="1"/>
-          <p:nvPr/>
-        </p:nvSpPr>
-        <p:spPr>
-          <a:xfrm>
-            <a:off x="5215469" y="4244561"/>
-            <a:ext cx="462845" cy="584775"/>
-          </a:xfrm>
-          <a:prstGeom prst="rect">
-            <a:avLst/>
-          </a:prstGeom>
-          <a:noFill/>
-        </p:spPr>
-        <p:txBody>
-          <a:bodyPr wrap="square" rtlCol="0">
-            <a:spAutoFit/>
-          </a:bodyPr>
-          <a:lstStyle/>
-          <a:p>
-            <a:pPr algn="ctr"/>
-            <a:r>
-              <a:rPr lang="en-US" sz="3200" dirty="0"/>
-              <a:t>8</a:t>
-            </a:r>
-          </a:p>
-        </p:txBody>
-      </p:sp>
-      <p:sp>
-        <p:nvSpPr>
-          <p:cNvPr id="79" name="TextBox 78">
-            <a:extLst>
-              <a:ext uri="{FF2B5EF4-FFF2-40B4-BE49-F238E27FC236}">
-                <a16:creationId xmlns:a16="http://schemas.microsoft.com/office/drawing/2014/main" id="{9C34CEAD-D4FB-A94A-B119-4E470D0323A1}"/>
-              </a:ext>
-            </a:extLst>
-          </p:cNvPr>
-          <p:cNvSpPr txBox="1"/>
-          <p:nvPr/>
-        </p:nvSpPr>
-        <p:spPr>
-          <a:xfrm>
-            <a:off x="5715003" y="4244561"/>
-            <a:ext cx="462845" cy="584775"/>
-          </a:xfrm>
-          <a:prstGeom prst="rect">
-            <a:avLst/>
-          </a:prstGeom>
-          <a:noFill/>
-        </p:spPr>
-        <p:txBody>
-          <a:bodyPr wrap="square" rtlCol="0">
-            <a:spAutoFit/>
-          </a:bodyPr>
-          <a:lstStyle/>
-          <a:p>
-            <a:pPr algn="ctr"/>
-            <a:r>
-              <a:rPr lang="en-US" sz="3200" dirty="0"/>
-              <a:t>8</a:t>
-            </a:r>
-          </a:p>
-        </p:txBody>
-      </p:sp>
-      <p:sp>
-        <p:nvSpPr>
-          <p:cNvPr id="80" name="TextBox 79">
-            <a:extLst>
-              <a:ext uri="{FF2B5EF4-FFF2-40B4-BE49-F238E27FC236}">
-                <a16:creationId xmlns:a16="http://schemas.microsoft.com/office/drawing/2014/main" id="{118432DD-6D87-FFE3-332E-6C529044D634}"/>
-              </a:ext>
-            </a:extLst>
-          </p:cNvPr>
-          <p:cNvSpPr txBox="1"/>
-          <p:nvPr/>
-        </p:nvSpPr>
-        <p:spPr>
-          <a:xfrm>
-            <a:off x="6214537" y="4244561"/>
-            <a:ext cx="462845" cy="584775"/>
-          </a:xfrm>
-          <a:prstGeom prst="rect">
-            <a:avLst/>
-          </a:prstGeom>
-          <a:noFill/>
-        </p:spPr>
-        <p:txBody>
-          <a:bodyPr wrap="square" rtlCol="0">
-            <a:spAutoFit/>
-          </a:bodyPr>
-          <a:lstStyle/>
-          <a:p>
-            <a:pPr algn="ctr"/>
-            <a:r>
-              <a:rPr lang="en-US" sz="3200" dirty="0"/>
-              <a:t>8</a:t>
-            </a:r>
-          </a:p>
-        </p:txBody>
-      </p:sp>
-      <p:sp>
-        <p:nvSpPr>
-          <p:cNvPr id="81" name="TextBox 80">
-            <a:extLst>
-              <a:ext uri="{FF2B5EF4-FFF2-40B4-BE49-F238E27FC236}">
-                <a16:creationId xmlns:a16="http://schemas.microsoft.com/office/drawing/2014/main" id="{C034B78B-C7C1-C652-6232-B07315E13A39}"/>
-              </a:ext>
-            </a:extLst>
-          </p:cNvPr>
-          <p:cNvSpPr txBox="1"/>
-          <p:nvPr/>
-        </p:nvSpPr>
-        <p:spPr>
-          <a:xfrm>
-            <a:off x="6714071" y="4244561"/>
-            <a:ext cx="462845" cy="584775"/>
-          </a:xfrm>
-          <a:prstGeom prst="rect">
-            <a:avLst/>
-          </a:prstGeom>
-          <a:noFill/>
-        </p:spPr>
-        <p:txBody>
-          <a:bodyPr wrap="square" rtlCol="0">
-            <a:spAutoFit/>
-          </a:bodyPr>
-          <a:lstStyle/>
-          <a:p>
-            <a:pPr algn="ctr"/>
-            <a:r>
-              <a:rPr lang="en-US" sz="3200" dirty="0"/>
-              <a:t>8</a:t>
-            </a:r>
-          </a:p>
-        </p:txBody>
-      </p:sp>
-      <p:sp>
-        <p:nvSpPr>
-          <p:cNvPr id="82" name="TextBox 81">
-            <a:extLst>
-              <a:ext uri="{FF2B5EF4-FFF2-40B4-BE49-F238E27FC236}">
-                <a16:creationId xmlns:a16="http://schemas.microsoft.com/office/drawing/2014/main" id="{AAA7508F-BC5C-BD63-FE35-CF0C611C8C7D}"/>
-              </a:ext>
-            </a:extLst>
-          </p:cNvPr>
-          <p:cNvSpPr txBox="1"/>
-          <p:nvPr/>
-        </p:nvSpPr>
-        <p:spPr>
-          <a:xfrm>
-            <a:off x="7213604" y="4244561"/>
-            <a:ext cx="462845" cy="584775"/>
-          </a:xfrm>
-          <a:prstGeom prst="rect">
-            <a:avLst/>
-          </a:prstGeom>
-          <a:noFill/>
-        </p:spPr>
-        <p:txBody>
-          <a:bodyPr wrap="square" rtlCol="0">
-            <a:spAutoFit/>
-          </a:bodyPr>
-          <a:lstStyle/>
-          <a:p>
-            <a:pPr algn="ctr"/>
-            <a:r>
-              <a:rPr lang="en-US" sz="3200" dirty="0"/>
-              <a:t>8</a:t>
-            </a:r>
-          </a:p>
-        </p:txBody>
-      </p:sp>
-      <p:sp>
-        <p:nvSpPr>
-          <p:cNvPr id="84" name="TextBox 83">
-            <a:extLst>
-              <a:ext uri="{FF2B5EF4-FFF2-40B4-BE49-F238E27FC236}">
-                <a16:creationId xmlns:a16="http://schemas.microsoft.com/office/drawing/2014/main" id="{77441B13-F709-9820-92EB-A0AEF4B46CA8}"/>
-              </a:ext>
-            </a:extLst>
-          </p:cNvPr>
-          <p:cNvSpPr txBox="1"/>
-          <p:nvPr/>
-        </p:nvSpPr>
-        <p:spPr>
-          <a:xfrm>
-            <a:off x="3217333" y="4747898"/>
-            <a:ext cx="462845" cy="584775"/>
-          </a:xfrm>
-          <a:prstGeom prst="rect">
-            <a:avLst/>
-          </a:prstGeom>
-          <a:noFill/>
-        </p:spPr>
-        <p:txBody>
-          <a:bodyPr wrap="square" rtlCol="0">
-            <a:spAutoFit/>
-          </a:bodyPr>
-          <a:lstStyle/>
-          <a:p>
-            <a:pPr algn="ctr"/>
-            <a:r>
-              <a:rPr lang="en-US" sz="3200" dirty="0"/>
-              <a:t>8</a:t>
-            </a:r>
-          </a:p>
-        </p:txBody>
-      </p:sp>
-      <p:sp>
-        <p:nvSpPr>
-          <p:cNvPr id="85" name="TextBox 84">
-            <a:extLst>
-              <a:ext uri="{FF2B5EF4-FFF2-40B4-BE49-F238E27FC236}">
-                <a16:creationId xmlns:a16="http://schemas.microsoft.com/office/drawing/2014/main" id="{26CD92CE-63A8-D4B6-DDCC-0CA41368B0E0}"/>
-              </a:ext>
-            </a:extLst>
-          </p:cNvPr>
-          <p:cNvSpPr txBox="1"/>
-          <p:nvPr/>
-        </p:nvSpPr>
-        <p:spPr>
-          <a:xfrm>
-            <a:off x="3716867" y="4747898"/>
-            <a:ext cx="462845" cy="584775"/>
-          </a:xfrm>
-          <a:prstGeom prst="rect">
-            <a:avLst/>
-          </a:prstGeom>
-          <a:noFill/>
-        </p:spPr>
-        <p:txBody>
-          <a:bodyPr wrap="square" rtlCol="0">
-            <a:spAutoFit/>
-          </a:bodyPr>
-          <a:lstStyle/>
-          <a:p>
-            <a:pPr algn="ctr"/>
-            <a:r>
-              <a:rPr lang="en-US" sz="3200" dirty="0"/>
-              <a:t>8</a:t>
-            </a:r>
-          </a:p>
-        </p:txBody>
-      </p:sp>
-      <p:sp>
-        <p:nvSpPr>
-          <p:cNvPr id="86" name="TextBox 85">
-            <a:extLst>
-              <a:ext uri="{FF2B5EF4-FFF2-40B4-BE49-F238E27FC236}">
-                <a16:creationId xmlns:a16="http://schemas.microsoft.com/office/drawing/2014/main" id="{5AF486AD-8C07-4391-8BC5-1CF73DB284CE}"/>
-              </a:ext>
-            </a:extLst>
-          </p:cNvPr>
-          <p:cNvSpPr txBox="1"/>
-          <p:nvPr/>
-        </p:nvSpPr>
-        <p:spPr>
-          <a:xfrm>
-            <a:off x="4216401" y="4747898"/>
-            <a:ext cx="462845" cy="584775"/>
-          </a:xfrm>
-          <a:prstGeom prst="rect">
-            <a:avLst/>
-          </a:prstGeom>
-          <a:noFill/>
-        </p:spPr>
-        <p:txBody>
-          <a:bodyPr wrap="square" rtlCol="0">
-            <a:spAutoFit/>
-          </a:bodyPr>
-          <a:lstStyle/>
-          <a:p>
-            <a:pPr algn="ctr"/>
-            <a:r>
-              <a:rPr lang="en-US" sz="3200" dirty="0"/>
-              <a:t>8</a:t>
-            </a:r>
-          </a:p>
-        </p:txBody>
-      </p:sp>
-      <p:sp>
-        <p:nvSpPr>
-          <p:cNvPr id="87" name="TextBox 86">
-            <a:extLst>
-              <a:ext uri="{FF2B5EF4-FFF2-40B4-BE49-F238E27FC236}">
-                <a16:creationId xmlns:a16="http://schemas.microsoft.com/office/drawing/2014/main" id="{E0D8D130-CB07-06CB-9DF3-77ABEFBEB746}"/>
-              </a:ext>
-            </a:extLst>
-          </p:cNvPr>
-          <p:cNvSpPr txBox="1"/>
-          <p:nvPr/>
-        </p:nvSpPr>
-        <p:spPr>
-          <a:xfrm>
-            <a:off x="4715935" y="4747898"/>
-            <a:ext cx="462845" cy="584775"/>
-          </a:xfrm>
-          <a:prstGeom prst="rect">
-            <a:avLst/>
-          </a:prstGeom>
-          <a:noFill/>
-        </p:spPr>
-        <p:txBody>
-          <a:bodyPr wrap="square" rtlCol="0">
-            <a:spAutoFit/>
-          </a:bodyPr>
-          <a:lstStyle/>
-          <a:p>
-            <a:pPr algn="ctr"/>
-            <a:r>
-              <a:rPr lang="en-US" sz="3200" dirty="0"/>
-              <a:t>8</a:t>
-            </a:r>
-          </a:p>
-        </p:txBody>
-      </p:sp>
-      <p:sp>
-        <p:nvSpPr>
-          <p:cNvPr id="88" name="TextBox 87">
-            <a:extLst>
-              <a:ext uri="{FF2B5EF4-FFF2-40B4-BE49-F238E27FC236}">
-                <a16:creationId xmlns:a16="http://schemas.microsoft.com/office/drawing/2014/main" id="{5342847E-040E-264F-0ED3-75738365A16F}"/>
-              </a:ext>
-            </a:extLst>
-          </p:cNvPr>
-          <p:cNvSpPr txBox="1"/>
-          <p:nvPr/>
-        </p:nvSpPr>
-        <p:spPr>
-          <a:xfrm>
-            <a:off x="5215469" y="4747898"/>
-            <a:ext cx="462845" cy="584775"/>
-          </a:xfrm>
-          <a:prstGeom prst="rect">
-            <a:avLst/>
-          </a:prstGeom>
-          <a:noFill/>
-        </p:spPr>
-        <p:txBody>
-          <a:bodyPr wrap="square" rtlCol="0">
-            <a:spAutoFit/>
-          </a:bodyPr>
-          <a:lstStyle/>
-          <a:p>
-            <a:pPr algn="ctr"/>
-            <a:r>
-              <a:rPr lang="en-US" sz="3200" dirty="0"/>
-              <a:t>8</a:t>
-            </a:r>
-          </a:p>
-        </p:txBody>
-      </p:sp>
-      <p:sp>
-        <p:nvSpPr>
-          <p:cNvPr id="89" name="TextBox 88">
-            <a:extLst>
-              <a:ext uri="{FF2B5EF4-FFF2-40B4-BE49-F238E27FC236}">
-                <a16:creationId xmlns:a16="http://schemas.microsoft.com/office/drawing/2014/main" id="{ADD8AEEE-6363-1C8A-6CDF-CD7FCF7D5FD4}"/>
-              </a:ext>
-            </a:extLst>
-          </p:cNvPr>
-          <p:cNvSpPr txBox="1"/>
-          <p:nvPr/>
-        </p:nvSpPr>
-        <p:spPr>
-          <a:xfrm>
-            <a:off x="5715003" y="4747898"/>
-            <a:ext cx="462845" cy="584775"/>
-          </a:xfrm>
-          <a:prstGeom prst="rect">
-            <a:avLst/>
-          </a:prstGeom>
-          <a:noFill/>
-        </p:spPr>
-        <p:txBody>
-          <a:bodyPr wrap="square" rtlCol="0">
-            <a:spAutoFit/>
-          </a:bodyPr>
-          <a:lstStyle/>
-          <a:p>
-            <a:pPr algn="ctr"/>
-            <a:r>
-              <a:rPr lang="en-US" sz="3200" dirty="0"/>
-              <a:t>8</a:t>
-            </a:r>
-          </a:p>
-        </p:txBody>
-      </p:sp>
-      <p:sp>
-        <p:nvSpPr>
-          <p:cNvPr id="90" name="TextBox 89">
-            <a:extLst>
-              <a:ext uri="{FF2B5EF4-FFF2-40B4-BE49-F238E27FC236}">
-                <a16:creationId xmlns:a16="http://schemas.microsoft.com/office/drawing/2014/main" id="{DFA86441-FB97-7C14-B21D-EFB4F3D80E6B}"/>
-              </a:ext>
-            </a:extLst>
-          </p:cNvPr>
-          <p:cNvSpPr txBox="1"/>
-          <p:nvPr/>
-        </p:nvSpPr>
-        <p:spPr>
-          <a:xfrm>
-            <a:off x="6214537" y="4747898"/>
-            <a:ext cx="462845" cy="584775"/>
-          </a:xfrm>
-          <a:prstGeom prst="rect">
-            <a:avLst/>
-          </a:prstGeom>
-          <a:noFill/>
-        </p:spPr>
-        <p:txBody>
-          <a:bodyPr wrap="square" rtlCol="0">
-            <a:spAutoFit/>
-          </a:bodyPr>
-          <a:lstStyle/>
-          <a:p>
-            <a:pPr algn="ctr"/>
-            <a:r>
-              <a:rPr lang="en-US" sz="3200" dirty="0"/>
-              <a:t>8</a:t>
-            </a:r>
-          </a:p>
-        </p:txBody>
-      </p:sp>
-      <p:sp>
-        <p:nvSpPr>
-          <p:cNvPr id="91" name="TextBox 90">
-            <a:extLst>
-              <a:ext uri="{FF2B5EF4-FFF2-40B4-BE49-F238E27FC236}">
-                <a16:creationId xmlns:a16="http://schemas.microsoft.com/office/drawing/2014/main" id="{0375B3B4-6CBC-7F70-1236-9F1B5FE11D8E}"/>
-              </a:ext>
-            </a:extLst>
-          </p:cNvPr>
-          <p:cNvSpPr txBox="1"/>
-          <p:nvPr/>
-        </p:nvSpPr>
-        <p:spPr>
-          <a:xfrm>
-            <a:off x="6714071" y="4747898"/>
-            <a:ext cx="462845" cy="584775"/>
-          </a:xfrm>
-          <a:prstGeom prst="rect">
-            <a:avLst/>
-          </a:prstGeom>
-          <a:noFill/>
-        </p:spPr>
-        <p:txBody>
-          <a:bodyPr wrap="square" rtlCol="0">
-            <a:spAutoFit/>
-          </a:bodyPr>
-          <a:lstStyle/>
-          <a:p>
-            <a:pPr algn="ctr"/>
-            <a:r>
-              <a:rPr lang="en-US" sz="3200" dirty="0"/>
-              <a:t>8</a:t>
-            </a:r>
-          </a:p>
-        </p:txBody>
-      </p:sp>
-      <p:sp>
-        <p:nvSpPr>
-          <p:cNvPr id="92" name="TextBox 91">
-            <a:extLst>
-              <a:ext uri="{FF2B5EF4-FFF2-40B4-BE49-F238E27FC236}">
-                <a16:creationId xmlns:a16="http://schemas.microsoft.com/office/drawing/2014/main" id="{67CBCBB2-88D7-BCE3-7916-11F0F236BF4A}"/>
-              </a:ext>
-            </a:extLst>
-          </p:cNvPr>
-          <p:cNvSpPr txBox="1"/>
-          <p:nvPr/>
-        </p:nvSpPr>
-        <p:spPr>
-          <a:xfrm>
-            <a:off x="7213604" y="4747898"/>
-            <a:ext cx="462845" cy="584775"/>
-          </a:xfrm>
-          <a:prstGeom prst="rect">
-            <a:avLst/>
-          </a:prstGeom>
-          <a:noFill/>
-        </p:spPr>
-        <p:txBody>
-          <a:bodyPr wrap="square" rtlCol="0">
-            <a:spAutoFit/>
-          </a:bodyPr>
-          <a:lstStyle/>
-          <a:p>
-            <a:pPr algn="ctr"/>
-            <a:r>
-              <a:rPr lang="en-US" sz="3200" dirty="0"/>
-              <a:t>8</a:t>
-            </a:r>
-          </a:p>
-        </p:txBody>
-      </p:sp>
-    </p:spTree>
-    <p:extLst>
-      <p:ext uri="{BB962C8B-B14F-4D97-AF65-F5344CB8AC3E}">
-        <p14:creationId xmlns:p14="http://schemas.microsoft.com/office/powerpoint/2010/main" val="1436419386"/>
-      </p:ext>
-    </p:extLst>
-  </p:cSld>
-  <p:clrMapOvr>
-    <a:masterClrMapping/>
-  </p:clrMapOvr>
-</p:sld>
-</file>
-
 <file path=ppt/slides/slide3.xml><?xml version="1.0" encoding="utf-8"?>
 <p:sld xmlns:a="http://schemas.openxmlformats.org/drawingml/2006/main" xmlns:r="http://schemas.openxmlformats.org/officeDocument/2006/relationships" xmlns:p="http://schemas.openxmlformats.org/presentationml/2006/main">
   <p:cSld>
@@ -44197,2977 +41177,6 @@
     <p:extLst>
       <p:ext uri="{BB962C8B-B14F-4D97-AF65-F5344CB8AC3E}">
         <p14:creationId xmlns:p14="http://schemas.microsoft.com/office/powerpoint/2010/main" val="845370309"/>
-      </p:ext>
-    </p:extLst>
-  </p:cSld>
-  <p:clrMapOvr>
-    <a:masterClrMapping/>
-  </p:clrMapOvr>
-</p:sld>
-</file>
-
-<file path=ppt/slides/slide30.xml><?xml version="1.0" encoding="utf-8"?>
-<p:sld xmlns:a="http://schemas.openxmlformats.org/drawingml/2006/main" xmlns:r="http://schemas.openxmlformats.org/officeDocument/2006/relationships" xmlns:p="http://schemas.openxmlformats.org/presentationml/2006/main">
-  <p:cSld>
-    <p:spTree>
-      <p:nvGrpSpPr>
-        <p:cNvPr id="1" name=""/>
-        <p:cNvGrpSpPr/>
-        <p:nvPr/>
-      </p:nvGrpSpPr>
-      <p:grpSpPr>
-        <a:xfrm>
-          <a:off x="0" y="0"/>
-          <a:ext cx="0" cy="0"/>
-          <a:chOff x="0" y="0"/>
-          <a:chExt cx="0" cy="0"/>
-        </a:xfrm>
-      </p:grpSpPr>
-      <p:sp>
-        <p:nvSpPr>
-          <p:cNvPr id="2" name="Content Placeholder 1">
-            <a:extLst>
-              <a:ext uri="{FF2B5EF4-FFF2-40B4-BE49-F238E27FC236}">
-                <a16:creationId xmlns:a16="http://schemas.microsoft.com/office/drawing/2014/main" id="{BCB454D7-CEE4-838B-D109-D776E2EA1CEE}"/>
-              </a:ext>
-            </a:extLst>
-          </p:cNvPr>
-          <p:cNvSpPr>
-            <a:spLocks noGrp="1"/>
-          </p:cNvSpPr>
-          <p:nvPr>
-            <p:ph sz="half" idx="1"/>
-          </p:nvPr>
-        </p:nvSpPr>
-        <p:spPr/>
-        <p:txBody>
-          <a:bodyPr/>
-          <a:lstStyle/>
-          <a:p>
-            <a:endParaRPr lang="en-US"/>
-          </a:p>
-        </p:txBody>
-      </p:sp>
-      <p:sp>
-        <p:nvSpPr>
-          <p:cNvPr id="84" name="TextBox 83">
-            <a:extLst>
-              <a:ext uri="{FF2B5EF4-FFF2-40B4-BE49-F238E27FC236}">
-                <a16:creationId xmlns:a16="http://schemas.microsoft.com/office/drawing/2014/main" id="{FF60C56B-03A8-4A01-C370-4161AC79EB30}"/>
-              </a:ext>
-            </a:extLst>
-          </p:cNvPr>
-          <p:cNvSpPr txBox="1"/>
-          <p:nvPr/>
-        </p:nvSpPr>
-        <p:spPr>
-          <a:xfrm>
-            <a:off x="3640666" y="901933"/>
-            <a:ext cx="570089" cy="230832"/>
-          </a:xfrm>
-          <a:prstGeom prst="rect">
-            <a:avLst/>
-          </a:prstGeom>
-          <a:noFill/>
-        </p:spPr>
-        <p:txBody>
-          <a:bodyPr wrap="square" rtlCol="0">
-            <a:spAutoFit/>
-          </a:bodyPr>
-          <a:lstStyle/>
-          <a:p>
-            <a:pPr algn="ctr"/>
-            <a:r>
-              <a:rPr lang="en-US" sz="900" dirty="0"/>
-              <a:t>123456</a:t>
-            </a:r>
-          </a:p>
-        </p:txBody>
-      </p:sp>
-      <p:sp>
-        <p:nvSpPr>
-          <p:cNvPr id="85" name="TextBox 84">
-            <a:extLst>
-              <a:ext uri="{FF2B5EF4-FFF2-40B4-BE49-F238E27FC236}">
-                <a16:creationId xmlns:a16="http://schemas.microsoft.com/office/drawing/2014/main" id="{BF9BFDB4-9AD7-FA30-A0F2-18859BAA297D}"/>
-              </a:ext>
-            </a:extLst>
-          </p:cNvPr>
-          <p:cNvSpPr txBox="1"/>
-          <p:nvPr/>
-        </p:nvSpPr>
-        <p:spPr>
-          <a:xfrm>
-            <a:off x="4143022" y="901933"/>
-            <a:ext cx="570089" cy="230832"/>
-          </a:xfrm>
-          <a:prstGeom prst="rect">
-            <a:avLst/>
-          </a:prstGeom>
-          <a:noFill/>
-        </p:spPr>
-        <p:txBody>
-          <a:bodyPr wrap="square" rtlCol="0">
-            <a:spAutoFit/>
-          </a:bodyPr>
-          <a:lstStyle/>
-          <a:p>
-            <a:pPr algn="ctr"/>
-            <a:r>
-              <a:rPr lang="en-US" sz="900" dirty="0"/>
-              <a:t>123456</a:t>
-            </a:r>
-          </a:p>
-        </p:txBody>
-      </p:sp>
-      <p:sp>
-        <p:nvSpPr>
-          <p:cNvPr id="86" name="TextBox 85">
-            <a:extLst>
-              <a:ext uri="{FF2B5EF4-FFF2-40B4-BE49-F238E27FC236}">
-                <a16:creationId xmlns:a16="http://schemas.microsoft.com/office/drawing/2014/main" id="{1640DD29-1195-EF1F-8B16-EF9A84420D30}"/>
-              </a:ext>
-            </a:extLst>
-          </p:cNvPr>
-          <p:cNvSpPr txBox="1"/>
-          <p:nvPr/>
-        </p:nvSpPr>
-        <p:spPr>
-          <a:xfrm>
-            <a:off x="4645378" y="901933"/>
-            <a:ext cx="570089" cy="230832"/>
-          </a:xfrm>
-          <a:prstGeom prst="rect">
-            <a:avLst/>
-          </a:prstGeom>
-          <a:noFill/>
-        </p:spPr>
-        <p:txBody>
-          <a:bodyPr wrap="square" rtlCol="0">
-            <a:spAutoFit/>
-          </a:bodyPr>
-          <a:lstStyle/>
-          <a:p>
-            <a:pPr algn="ctr"/>
-            <a:r>
-              <a:rPr lang="en-US" sz="900" dirty="0"/>
-              <a:t>123456</a:t>
-            </a:r>
-          </a:p>
-        </p:txBody>
-      </p:sp>
-      <p:sp>
-        <p:nvSpPr>
-          <p:cNvPr id="87" name="TextBox 86">
-            <a:extLst>
-              <a:ext uri="{FF2B5EF4-FFF2-40B4-BE49-F238E27FC236}">
-                <a16:creationId xmlns:a16="http://schemas.microsoft.com/office/drawing/2014/main" id="{3E2A5CBA-3D0B-3A96-9C98-B514696923EE}"/>
-              </a:ext>
-            </a:extLst>
-          </p:cNvPr>
-          <p:cNvSpPr txBox="1"/>
-          <p:nvPr/>
-        </p:nvSpPr>
-        <p:spPr>
-          <a:xfrm>
-            <a:off x="5147734" y="901933"/>
-            <a:ext cx="570089" cy="230832"/>
-          </a:xfrm>
-          <a:prstGeom prst="rect">
-            <a:avLst/>
-          </a:prstGeom>
-          <a:noFill/>
-        </p:spPr>
-        <p:txBody>
-          <a:bodyPr wrap="square" rtlCol="0">
-            <a:spAutoFit/>
-          </a:bodyPr>
-          <a:lstStyle/>
-          <a:p>
-            <a:pPr algn="ctr"/>
-            <a:r>
-              <a:rPr lang="en-US" sz="900" dirty="0"/>
-              <a:t>123456</a:t>
-            </a:r>
-          </a:p>
-        </p:txBody>
-      </p:sp>
-      <p:sp>
-        <p:nvSpPr>
-          <p:cNvPr id="88" name="TextBox 87">
-            <a:extLst>
-              <a:ext uri="{FF2B5EF4-FFF2-40B4-BE49-F238E27FC236}">
-                <a16:creationId xmlns:a16="http://schemas.microsoft.com/office/drawing/2014/main" id="{A1FC491A-E2DD-10AD-68CE-6D3EEEB4EF94}"/>
-              </a:ext>
-            </a:extLst>
-          </p:cNvPr>
-          <p:cNvSpPr txBox="1"/>
-          <p:nvPr/>
-        </p:nvSpPr>
-        <p:spPr>
-          <a:xfrm>
-            <a:off x="5650090" y="901933"/>
-            <a:ext cx="570089" cy="230832"/>
-          </a:xfrm>
-          <a:prstGeom prst="rect">
-            <a:avLst/>
-          </a:prstGeom>
-          <a:noFill/>
-        </p:spPr>
-        <p:txBody>
-          <a:bodyPr wrap="square" rtlCol="0">
-            <a:spAutoFit/>
-          </a:bodyPr>
-          <a:lstStyle/>
-          <a:p>
-            <a:pPr algn="ctr"/>
-            <a:r>
-              <a:rPr lang="en-US" sz="900" dirty="0"/>
-              <a:t>123456</a:t>
-            </a:r>
-          </a:p>
-        </p:txBody>
-      </p:sp>
-      <p:sp>
-        <p:nvSpPr>
-          <p:cNvPr id="89" name="TextBox 88">
-            <a:extLst>
-              <a:ext uri="{FF2B5EF4-FFF2-40B4-BE49-F238E27FC236}">
-                <a16:creationId xmlns:a16="http://schemas.microsoft.com/office/drawing/2014/main" id="{80609A37-C41C-8535-9A55-84CA0EE83E45}"/>
-              </a:ext>
-            </a:extLst>
-          </p:cNvPr>
-          <p:cNvSpPr txBox="1"/>
-          <p:nvPr/>
-        </p:nvSpPr>
-        <p:spPr>
-          <a:xfrm>
-            <a:off x="6152446" y="901933"/>
-            <a:ext cx="570089" cy="230832"/>
-          </a:xfrm>
-          <a:prstGeom prst="rect">
-            <a:avLst/>
-          </a:prstGeom>
-          <a:noFill/>
-        </p:spPr>
-        <p:txBody>
-          <a:bodyPr wrap="square" rtlCol="0">
-            <a:spAutoFit/>
-          </a:bodyPr>
-          <a:lstStyle/>
-          <a:p>
-            <a:pPr algn="ctr"/>
-            <a:r>
-              <a:rPr lang="en-US" sz="900" dirty="0"/>
-              <a:t>123456</a:t>
-            </a:r>
-          </a:p>
-        </p:txBody>
-      </p:sp>
-      <p:sp>
-        <p:nvSpPr>
-          <p:cNvPr id="90" name="TextBox 89">
-            <a:extLst>
-              <a:ext uri="{FF2B5EF4-FFF2-40B4-BE49-F238E27FC236}">
-                <a16:creationId xmlns:a16="http://schemas.microsoft.com/office/drawing/2014/main" id="{A5A078A7-AA12-A695-6E1C-F4ADCC0563A3}"/>
-              </a:ext>
-            </a:extLst>
-          </p:cNvPr>
-          <p:cNvSpPr txBox="1"/>
-          <p:nvPr/>
-        </p:nvSpPr>
-        <p:spPr>
-          <a:xfrm>
-            <a:off x="6654802" y="901933"/>
-            <a:ext cx="570089" cy="230832"/>
-          </a:xfrm>
-          <a:prstGeom prst="rect">
-            <a:avLst/>
-          </a:prstGeom>
-          <a:noFill/>
-        </p:spPr>
-        <p:txBody>
-          <a:bodyPr wrap="square" rtlCol="0">
-            <a:spAutoFit/>
-          </a:bodyPr>
-          <a:lstStyle/>
-          <a:p>
-            <a:pPr algn="ctr"/>
-            <a:r>
-              <a:rPr lang="en-US" sz="900" dirty="0"/>
-              <a:t>123456</a:t>
-            </a:r>
-          </a:p>
-        </p:txBody>
-      </p:sp>
-      <p:sp>
-        <p:nvSpPr>
-          <p:cNvPr id="91" name="TextBox 90">
-            <a:extLst>
-              <a:ext uri="{FF2B5EF4-FFF2-40B4-BE49-F238E27FC236}">
-                <a16:creationId xmlns:a16="http://schemas.microsoft.com/office/drawing/2014/main" id="{4E91BCC9-7513-6620-4D5A-3AF70159AADC}"/>
-              </a:ext>
-            </a:extLst>
-          </p:cNvPr>
-          <p:cNvSpPr txBox="1"/>
-          <p:nvPr/>
-        </p:nvSpPr>
-        <p:spPr>
-          <a:xfrm>
-            <a:off x="7157158" y="901933"/>
-            <a:ext cx="570089" cy="230832"/>
-          </a:xfrm>
-          <a:prstGeom prst="rect">
-            <a:avLst/>
-          </a:prstGeom>
-          <a:noFill/>
-        </p:spPr>
-        <p:txBody>
-          <a:bodyPr wrap="square" rtlCol="0">
-            <a:spAutoFit/>
-          </a:bodyPr>
-          <a:lstStyle/>
-          <a:p>
-            <a:pPr algn="ctr"/>
-            <a:r>
-              <a:rPr lang="en-US" sz="900" dirty="0"/>
-              <a:t>123456</a:t>
-            </a:r>
-          </a:p>
-        </p:txBody>
-      </p:sp>
-      <p:sp>
-        <p:nvSpPr>
-          <p:cNvPr id="92" name="TextBox 91">
-            <a:extLst>
-              <a:ext uri="{FF2B5EF4-FFF2-40B4-BE49-F238E27FC236}">
-                <a16:creationId xmlns:a16="http://schemas.microsoft.com/office/drawing/2014/main" id="{5E04531A-D14B-3018-AA2E-66D8F2ECA708}"/>
-              </a:ext>
-            </a:extLst>
-          </p:cNvPr>
-          <p:cNvSpPr txBox="1"/>
-          <p:nvPr/>
-        </p:nvSpPr>
-        <p:spPr>
-          <a:xfrm>
-            <a:off x="3138310" y="901933"/>
-            <a:ext cx="570089" cy="230832"/>
-          </a:xfrm>
-          <a:prstGeom prst="rect">
-            <a:avLst/>
-          </a:prstGeom>
-          <a:noFill/>
-        </p:spPr>
-        <p:txBody>
-          <a:bodyPr wrap="square" rtlCol="0">
-            <a:spAutoFit/>
-          </a:bodyPr>
-          <a:lstStyle/>
-          <a:p>
-            <a:pPr algn="ctr"/>
-            <a:r>
-              <a:rPr lang="en-US" sz="900" dirty="0"/>
-              <a:t>123456</a:t>
-            </a:r>
-          </a:p>
-        </p:txBody>
-      </p:sp>
-      <p:sp>
-        <p:nvSpPr>
-          <p:cNvPr id="95" name="TextBox 94">
-            <a:extLst>
-              <a:ext uri="{FF2B5EF4-FFF2-40B4-BE49-F238E27FC236}">
-                <a16:creationId xmlns:a16="http://schemas.microsoft.com/office/drawing/2014/main" id="{8A3750D2-4D6A-C174-AB75-74C97E3EEC1C}"/>
-              </a:ext>
-            </a:extLst>
-          </p:cNvPr>
-          <p:cNvSpPr txBox="1"/>
-          <p:nvPr/>
-        </p:nvSpPr>
-        <p:spPr>
-          <a:xfrm>
-            <a:off x="3640666" y="1402877"/>
-            <a:ext cx="570089" cy="230832"/>
-          </a:xfrm>
-          <a:prstGeom prst="rect">
-            <a:avLst/>
-          </a:prstGeom>
-          <a:noFill/>
-        </p:spPr>
-        <p:txBody>
-          <a:bodyPr wrap="square" rtlCol="0">
-            <a:spAutoFit/>
-          </a:bodyPr>
-          <a:lstStyle/>
-          <a:p>
-            <a:pPr algn="ctr"/>
-            <a:r>
-              <a:rPr lang="en-US" sz="900" dirty="0"/>
-              <a:t>123456</a:t>
-            </a:r>
-          </a:p>
-        </p:txBody>
-      </p:sp>
-      <p:sp>
-        <p:nvSpPr>
-          <p:cNvPr id="96" name="TextBox 95">
-            <a:extLst>
-              <a:ext uri="{FF2B5EF4-FFF2-40B4-BE49-F238E27FC236}">
-                <a16:creationId xmlns:a16="http://schemas.microsoft.com/office/drawing/2014/main" id="{BD3B98C3-B2F4-A745-E9FE-7302EBAADA10}"/>
-              </a:ext>
-            </a:extLst>
-          </p:cNvPr>
-          <p:cNvSpPr txBox="1"/>
-          <p:nvPr/>
-        </p:nvSpPr>
-        <p:spPr>
-          <a:xfrm>
-            <a:off x="4143022" y="1402877"/>
-            <a:ext cx="570089" cy="230832"/>
-          </a:xfrm>
-          <a:prstGeom prst="rect">
-            <a:avLst/>
-          </a:prstGeom>
-          <a:noFill/>
-        </p:spPr>
-        <p:txBody>
-          <a:bodyPr wrap="square" rtlCol="0">
-            <a:spAutoFit/>
-          </a:bodyPr>
-          <a:lstStyle/>
-          <a:p>
-            <a:pPr algn="ctr"/>
-            <a:r>
-              <a:rPr lang="en-US" sz="900" dirty="0"/>
-              <a:t>123456</a:t>
-            </a:r>
-          </a:p>
-        </p:txBody>
-      </p:sp>
-      <p:sp>
-        <p:nvSpPr>
-          <p:cNvPr id="97" name="TextBox 96">
-            <a:extLst>
-              <a:ext uri="{FF2B5EF4-FFF2-40B4-BE49-F238E27FC236}">
-                <a16:creationId xmlns:a16="http://schemas.microsoft.com/office/drawing/2014/main" id="{53D9B785-7EEC-3C3E-D9D3-00ADFA3FA1B1}"/>
-              </a:ext>
-            </a:extLst>
-          </p:cNvPr>
-          <p:cNvSpPr txBox="1"/>
-          <p:nvPr/>
-        </p:nvSpPr>
-        <p:spPr>
-          <a:xfrm>
-            <a:off x="4645378" y="1402877"/>
-            <a:ext cx="570089" cy="230832"/>
-          </a:xfrm>
-          <a:prstGeom prst="rect">
-            <a:avLst/>
-          </a:prstGeom>
-          <a:noFill/>
-        </p:spPr>
-        <p:txBody>
-          <a:bodyPr wrap="square" rtlCol="0">
-            <a:spAutoFit/>
-          </a:bodyPr>
-          <a:lstStyle/>
-          <a:p>
-            <a:pPr algn="ctr"/>
-            <a:r>
-              <a:rPr lang="en-US" sz="900" dirty="0"/>
-              <a:t>123456</a:t>
-            </a:r>
-          </a:p>
-        </p:txBody>
-      </p:sp>
-      <p:sp>
-        <p:nvSpPr>
-          <p:cNvPr id="98" name="TextBox 97">
-            <a:extLst>
-              <a:ext uri="{FF2B5EF4-FFF2-40B4-BE49-F238E27FC236}">
-                <a16:creationId xmlns:a16="http://schemas.microsoft.com/office/drawing/2014/main" id="{2FB47043-5E04-FAB4-05BF-0CC87CA5EDF9}"/>
-              </a:ext>
-            </a:extLst>
-          </p:cNvPr>
-          <p:cNvSpPr txBox="1"/>
-          <p:nvPr/>
-        </p:nvSpPr>
-        <p:spPr>
-          <a:xfrm>
-            <a:off x="5147734" y="1402877"/>
-            <a:ext cx="570089" cy="230832"/>
-          </a:xfrm>
-          <a:prstGeom prst="rect">
-            <a:avLst/>
-          </a:prstGeom>
-          <a:noFill/>
-        </p:spPr>
-        <p:txBody>
-          <a:bodyPr wrap="square" rtlCol="0">
-            <a:spAutoFit/>
-          </a:bodyPr>
-          <a:lstStyle/>
-          <a:p>
-            <a:pPr algn="ctr"/>
-            <a:r>
-              <a:rPr lang="en-US" sz="900" dirty="0"/>
-              <a:t>123456</a:t>
-            </a:r>
-          </a:p>
-        </p:txBody>
-      </p:sp>
-      <p:sp>
-        <p:nvSpPr>
-          <p:cNvPr id="99" name="TextBox 98">
-            <a:extLst>
-              <a:ext uri="{FF2B5EF4-FFF2-40B4-BE49-F238E27FC236}">
-                <a16:creationId xmlns:a16="http://schemas.microsoft.com/office/drawing/2014/main" id="{1938E445-20DD-4F66-5EA3-45A33BAAC00E}"/>
-              </a:ext>
-            </a:extLst>
-          </p:cNvPr>
-          <p:cNvSpPr txBox="1"/>
-          <p:nvPr/>
-        </p:nvSpPr>
-        <p:spPr>
-          <a:xfrm>
-            <a:off x="5650090" y="1402877"/>
-            <a:ext cx="570089" cy="230832"/>
-          </a:xfrm>
-          <a:prstGeom prst="rect">
-            <a:avLst/>
-          </a:prstGeom>
-          <a:noFill/>
-        </p:spPr>
-        <p:txBody>
-          <a:bodyPr wrap="square" rtlCol="0">
-            <a:spAutoFit/>
-          </a:bodyPr>
-          <a:lstStyle/>
-          <a:p>
-            <a:pPr algn="ctr"/>
-            <a:r>
-              <a:rPr lang="en-US" sz="900" dirty="0"/>
-              <a:t>123456</a:t>
-            </a:r>
-          </a:p>
-        </p:txBody>
-      </p:sp>
-      <p:sp>
-        <p:nvSpPr>
-          <p:cNvPr id="100" name="TextBox 99">
-            <a:extLst>
-              <a:ext uri="{FF2B5EF4-FFF2-40B4-BE49-F238E27FC236}">
-                <a16:creationId xmlns:a16="http://schemas.microsoft.com/office/drawing/2014/main" id="{E6226C55-846A-2224-F06C-4C411BC81432}"/>
-              </a:ext>
-            </a:extLst>
-          </p:cNvPr>
-          <p:cNvSpPr txBox="1"/>
-          <p:nvPr/>
-        </p:nvSpPr>
-        <p:spPr>
-          <a:xfrm>
-            <a:off x="6152446" y="1402877"/>
-            <a:ext cx="570089" cy="230832"/>
-          </a:xfrm>
-          <a:prstGeom prst="rect">
-            <a:avLst/>
-          </a:prstGeom>
-          <a:noFill/>
-        </p:spPr>
-        <p:txBody>
-          <a:bodyPr wrap="square" rtlCol="0">
-            <a:spAutoFit/>
-          </a:bodyPr>
-          <a:lstStyle/>
-          <a:p>
-            <a:pPr algn="ctr"/>
-            <a:r>
-              <a:rPr lang="en-US" sz="900" dirty="0"/>
-              <a:t>123456</a:t>
-            </a:r>
-          </a:p>
-        </p:txBody>
-      </p:sp>
-      <p:sp>
-        <p:nvSpPr>
-          <p:cNvPr id="101" name="TextBox 100">
-            <a:extLst>
-              <a:ext uri="{FF2B5EF4-FFF2-40B4-BE49-F238E27FC236}">
-                <a16:creationId xmlns:a16="http://schemas.microsoft.com/office/drawing/2014/main" id="{4AAA4F56-A9E2-9990-B932-EE4C5C4BB333}"/>
-              </a:ext>
-            </a:extLst>
-          </p:cNvPr>
-          <p:cNvSpPr txBox="1"/>
-          <p:nvPr/>
-        </p:nvSpPr>
-        <p:spPr>
-          <a:xfrm>
-            <a:off x="6654802" y="1402877"/>
-            <a:ext cx="570089" cy="230832"/>
-          </a:xfrm>
-          <a:prstGeom prst="rect">
-            <a:avLst/>
-          </a:prstGeom>
-          <a:noFill/>
-        </p:spPr>
-        <p:txBody>
-          <a:bodyPr wrap="square" rtlCol="0">
-            <a:spAutoFit/>
-          </a:bodyPr>
-          <a:lstStyle/>
-          <a:p>
-            <a:pPr algn="ctr"/>
-            <a:r>
-              <a:rPr lang="en-US" sz="900" dirty="0"/>
-              <a:t>123456</a:t>
-            </a:r>
-          </a:p>
-        </p:txBody>
-      </p:sp>
-      <p:sp>
-        <p:nvSpPr>
-          <p:cNvPr id="102" name="TextBox 101">
-            <a:extLst>
-              <a:ext uri="{FF2B5EF4-FFF2-40B4-BE49-F238E27FC236}">
-                <a16:creationId xmlns:a16="http://schemas.microsoft.com/office/drawing/2014/main" id="{DDA1384E-A2DB-85D7-DAF7-C45E7EA0BC93}"/>
-              </a:ext>
-            </a:extLst>
-          </p:cNvPr>
-          <p:cNvSpPr txBox="1"/>
-          <p:nvPr/>
-        </p:nvSpPr>
-        <p:spPr>
-          <a:xfrm>
-            <a:off x="7157158" y="1402877"/>
-            <a:ext cx="570089" cy="230832"/>
-          </a:xfrm>
-          <a:prstGeom prst="rect">
-            <a:avLst/>
-          </a:prstGeom>
-          <a:noFill/>
-        </p:spPr>
-        <p:txBody>
-          <a:bodyPr wrap="square" rtlCol="0">
-            <a:spAutoFit/>
-          </a:bodyPr>
-          <a:lstStyle/>
-          <a:p>
-            <a:pPr algn="ctr"/>
-            <a:r>
-              <a:rPr lang="en-US" sz="900" dirty="0"/>
-              <a:t>123456</a:t>
-            </a:r>
-          </a:p>
-        </p:txBody>
-      </p:sp>
-      <p:sp>
-        <p:nvSpPr>
-          <p:cNvPr id="103" name="TextBox 102">
-            <a:extLst>
-              <a:ext uri="{FF2B5EF4-FFF2-40B4-BE49-F238E27FC236}">
-                <a16:creationId xmlns:a16="http://schemas.microsoft.com/office/drawing/2014/main" id="{8A36C789-DA72-4617-34D7-CC915BF2F287}"/>
-              </a:ext>
-            </a:extLst>
-          </p:cNvPr>
-          <p:cNvSpPr txBox="1"/>
-          <p:nvPr/>
-        </p:nvSpPr>
-        <p:spPr>
-          <a:xfrm>
-            <a:off x="3138310" y="1402877"/>
-            <a:ext cx="570089" cy="230832"/>
-          </a:xfrm>
-          <a:prstGeom prst="rect">
-            <a:avLst/>
-          </a:prstGeom>
-          <a:noFill/>
-        </p:spPr>
-        <p:txBody>
-          <a:bodyPr wrap="square" rtlCol="0">
-            <a:spAutoFit/>
-          </a:bodyPr>
-          <a:lstStyle/>
-          <a:p>
-            <a:pPr algn="ctr"/>
-            <a:r>
-              <a:rPr lang="en-US" sz="900" dirty="0"/>
-              <a:t>123456</a:t>
-            </a:r>
-          </a:p>
-        </p:txBody>
-      </p:sp>
-      <p:sp>
-        <p:nvSpPr>
-          <p:cNvPr id="105" name="TextBox 104">
-            <a:extLst>
-              <a:ext uri="{FF2B5EF4-FFF2-40B4-BE49-F238E27FC236}">
-                <a16:creationId xmlns:a16="http://schemas.microsoft.com/office/drawing/2014/main" id="{F20473C0-11CD-45EB-4B77-C4D593C934E5}"/>
-              </a:ext>
-            </a:extLst>
-          </p:cNvPr>
-          <p:cNvSpPr txBox="1"/>
-          <p:nvPr/>
-        </p:nvSpPr>
-        <p:spPr>
-          <a:xfrm>
-            <a:off x="3640666" y="1903821"/>
-            <a:ext cx="570089" cy="230832"/>
-          </a:xfrm>
-          <a:prstGeom prst="rect">
-            <a:avLst/>
-          </a:prstGeom>
-          <a:noFill/>
-        </p:spPr>
-        <p:txBody>
-          <a:bodyPr wrap="square" rtlCol="0">
-            <a:spAutoFit/>
-          </a:bodyPr>
-          <a:lstStyle/>
-          <a:p>
-            <a:pPr algn="ctr"/>
-            <a:r>
-              <a:rPr lang="en-US" sz="900" dirty="0"/>
-              <a:t>123456</a:t>
-            </a:r>
-          </a:p>
-        </p:txBody>
-      </p:sp>
-      <p:sp>
-        <p:nvSpPr>
-          <p:cNvPr id="106" name="TextBox 105">
-            <a:extLst>
-              <a:ext uri="{FF2B5EF4-FFF2-40B4-BE49-F238E27FC236}">
-                <a16:creationId xmlns:a16="http://schemas.microsoft.com/office/drawing/2014/main" id="{B59BC938-D3FB-69C9-58B2-FBFF7673D167}"/>
-              </a:ext>
-            </a:extLst>
-          </p:cNvPr>
-          <p:cNvSpPr txBox="1"/>
-          <p:nvPr/>
-        </p:nvSpPr>
-        <p:spPr>
-          <a:xfrm>
-            <a:off x="4143022" y="1903821"/>
-            <a:ext cx="570089" cy="230832"/>
-          </a:xfrm>
-          <a:prstGeom prst="rect">
-            <a:avLst/>
-          </a:prstGeom>
-          <a:noFill/>
-        </p:spPr>
-        <p:txBody>
-          <a:bodyPr wrap="square" rtlCol="0">
-            <a:spAutoFit/>
-          </a:bodyPr>
-          <a:lstStyle/>
-          <a:p>
-            <a:pPr algn="ctr"/>
-            <a:r>
-              <a:rPr lang="en-US" sz="900" dirty="0"/>
-              <a:t>123456</a:t>
-            </a:r>
-          </a:p>
-        </p:txBody>
-      </p:sp>
-      <p:sp>
-        <p:nvSpPr>
-          <p:cNvPr id="107" name="TextBox 106">
-            <a:extLst>
-              <a:ext uri="{FF2B5EF4-FFF2-40B4-BE49-F238E27FC236}">
-                <a16:creationId xmlns:a16="http://schemas.microsoft.com/office/drawing/2014/main" id="{33281FCE-CA0D-882E-1770-68B5DDD6277A}"/>
-              </a:ext>
-            </a:extLst>
-          </p:cNvPr>
-          <p:cNvSpPr txBox="1"/>
-          <p:nvPr/>
-        </p:nvSpPr>
-        <p:spPr>
-          <a:xfrm>
-            <a:off x="4645378" y="1903821"/>
-            <a:ext cx="570089" cy="230832"/>
-          </a:xfrm>
-          <a:prstGeom prst="rect">
-            <a:avLst/>
-          </a:prstGeom>
-          <a:noFill/>
-        </p:spPr>
-        <p:txBody>
-          <a:bodyPr wrap="square" rtlCol="0">
-            <a:spAutoFit/>
-          </a:bodyPr>
-          <a:lstStyle/>
-          <a:p>
-            <a:pPr algn="ctr"/>
-            <a:r>
-              <a:rPr lang="en-US" sz="900" dirty="0"/>
-              <a:t>123456</a:t>
-            </a:r>
-          </a:p>
-        </p:txBody>
-      </p:sp>
-      <p:sp>
-        <p:nvSpPr>
-          <p:cNvPr id="108" name="TextBox 107">
-            <a:extLst>
-              <a:ext uri="{FF2B5EF4-FFF2-40B4-BE49-F238E27FC236}">
-                <a16:creationId xmlns:a16="http://schemas.microsoft.com/office/drawing/2014/main" id="{54D09948-1B45-CE41-35EA-332C0AB89FDB}"/>
-              </a:ext>
-            </a:extLst>
-          </p:cNvPr>
-          <p:cNvSpPr txBox="1"/>
-          <p:nvPr/>
-        </p:nvSpPr>
-        <p:spPr>
-          <a:xfrm>
-            <a:off x="5147734" y="1903821"/>
-            <a:ext cx="570089" cy="230832"/>
-          </a:xfrm>
-          <a:prstGeom prst="rect">
-            <a:avLst/>
-          </a:prstGeom>
-          <a:noFill/>
-        </p:spPr>
-        <p:txBody>
-          <a:bodyPr wrap="square" rtlCol="0">
-            <a:spAutoFit/>
-          </a:bodyPr>
-          <a:lstStyle/>
-          <a:p>
-            <a:pPr algn="ctr"/>
-            <a:r>
-              <a:rPr lang="en-US" sz="900" dirty="0"/>
-              <a:t>123456</a:t>
-            </a:r>
-          </a:p>
-        </p:txBody>
-      </p:sp>
-      <p:sp>
-        <p:nvSpPr>
-          <p:cNvPr id="109" name="TextBox 108">
-            <a:extLst>
-              <a:ext uri="{FF2B5EF4-FFF2-40B4-BE49-F238E27FC236}">
-                <a16:creationId xmlns:a16="http://schemas.microsoft.com/office/drawing/2014/main" id="{EABA7E41-188E-7074-BD6B-4A804753155E}"/>
-              </a:ext>
-            </a:extLst>
-          </p:cNvPr>
-          <p:cNvSpPr txBox="1"/>
-          <p:nvPr/>
-        </p:nvSpPr>
-        <p:spPr>
-          <a:xfrm>
-            <a:off x="5650090" y="1903821"/>
-            <a:ext cx="570089" cy="230832"/>
-          </a:xfrm>
-          <a:prstGeom prst="rect">
-            <a:avLst/>
-          </a:prstGeom>
-          <a:noFill/>
-        </p:spPr>
-        <p:txBody>
-          <a:bodyPr wrap="square" rtlCol="0">
-            <a:spAutoFit/>
-          </a:bodyPr>
-          <a:lstStyle/>
-          <a:p>
-            <a:pPr algn="ctr"/>
-            <a:r>
-              <a:rPr lang="en-US" sz="900" dirty="0"/>
-              <a:t>123456</a:t>
-            </a:r>
-          </a:p>
-        </p:txBody>
-      </p:sp>
-      <p:sp>
-        <p:nvSpPr>
-          <p:cNvPr id="110" name="TextBox 109">
-            <a:extLst>
-              <a:ext uri="{FF2B5EF4-FFF2-40B4-BE49-F238E27FC236}">
-                <a16:creationId xmlns:a16="http://schemas.microsoft.com/office/drawing/2014/main" id="{72621310-1D87-C359-D210-913EB69A2EE8}"/>
-              </a:ext>
-            </a:extLst>
-          </p:cNvPr>
-          <p:cNvSpPr txBox="1"/>
-          <p:nvPr/>
-        </p:nvSpPr>
-        <p:spPr>
-          <a:xfrm>
-            <a:off x="6152446" y="1903821"/>
-            <a:ext cx="570089" cy="230832"/>
-          </a:xfrm>
-          <a:prstGeom prst="rect">
-            <a:avLst/>
-          </a:prstGeom>
-          <a:noFill/>
-        </p:spPr>
-        <p:txBody>
-          <a:bodyPr wrap="square" rtlCol="0">
-            <a:spAutoFit/>
-          </a:bodyPr>
-          <a:lstStyle/>
-          <a:p>
-            <a:pPr algn="ctr"/>
-            <a:r>
-              <a:rPr lang="en-US" sz="900" dirty="0"/>
-              <a:t>123456</a:t>
-            </a:r>
-          </a:p>
-        </p:txBody>
-      </p:sp>
-      <p:sp>
-        <p:nvSpPr>
-          <p:cNvPr id="111" name="TextBox 110">
-            <a:extLst>
-              <a:ext uri="{FF2B5EF4-FFF2-40B4-BE49-F238E27FC236}">
-                <a16:creationId xmlns:a16="http://schemas.microsoft.com/office/drawing/2014/main" id="{83098FE2-EA54-5D61-2C32-CBE3755DCF0D}"/>
-              </a:ext>
-            </a:extLst>
-          </p:cNvPr>
-          <p:cNvSpPr txBox="1"/>
-          <p:nvPr/>
-        </p:nvSpPr>
-        <p:spPr>
-          <a:xfrm>
-            <a:off x="6654802" y="1903821"/>
-            <a:ext cx="570089" cy="230832"/>
-          </a:xfrm>
-          <a:prstGeom prst="rect">
-            <a:avLst/>
-          </a:prstGeom>
-          <a:noFill/>
-        </p:spPr>
-        <p:txBody>
-          <a:bodyPr wrap="square" rtlCol="0">
-            <a:spAutoFit/>
-          </a:bodyPr>
-          <a:lstStyle/>
-          <a:p>
-            <a:pPr algn="ctr"/>
-            <a:r>
-              <a:rPr lang="en-US" sz="900" dirty="0"/>
-              <a:t>123456</a:t>
-            </a:r>
-          </a:p>
-        </p:txBody>
-      </p:sp>
-      <p:sp>
-        <p:nvSpPr>
-          <p:cNvPr id="112" name="TextBox 111">
-            <a:extLst>
-              <a:ext uri="{FF2B5EF4-FFF2-40B4-BE49-F238E27FC236}">
-                <a16:creationId xmlns:a16="http://schemas.microsoft.com/office/drawing/2014/main" id="{E14006A6-26D4-D65B-E5E2-AE741EE5E69C}"/>
-              </a:ext>
-            </a:extLst>
-          </p:cNvPr>
-          <p:cNvSpPr txBox="1"/>
-          <p:nvPr/>
-        </p:nvSpPr>
-        <p:spPr>
-          <a:xfrm>
-            <a:off x="7157158" y="1903821"/>
-            <a:ext cx="570089" cy="230832"/>
-          </a:xfrm>
-          <a:prstGeom prst="rect">
-            <a:avLst/>
-          </a:prstGeom>
-          <a:noFill/>
-        </p:spPr>
-        <p:txBody>
-          <a:bodyPr wrap="square" rtlCol="0">
-            <a:spAutoFit/>
-          </a:bodyPr>
-          <a:lstStyle/>
-          <a:p>
-            <a:pPr algn="ctr"/>
-            <a:r>
-              <a:rPr lang="en-US" sz="900" dirty="0"/>
-              <a:t>123456</a:t>
-            </a:r>
-          </a:p>
-        </p:txBody>
-      </p:sp>
-      <p:sp>
-        <p:nvSpPr>
-          <p:cNvPr id="113" name="TextBox 112">
-            <a:extLst>
-              <a:ext uri="{FF2B5EF4-FFF2-40B4-BE49-F238E27FC236}">
-                <a16:creationId xmlns:a16="http://schemas.microsoft.com/office/drawing/2014/main" id="{6D6ACA82-4B0E-6FF8-BE11-0CF8C041C6B1}"/>
-              </a:ext>
-            </a:extLst>
-          </p:cNvPr>
-          <p:cNvSpPr txBox="1"/>
-          <p:nvPr/>
-        </p:nvSpPr>
-        <p:spPr>
-          <a:xfrm>
-            <a:off x="3138310" y="1903821"/>
-            <a:ext cx="570089" cy="230832"/>
-          </a:xfrm>
-          <a:prstGeom prst="rect">
-            <a:avLst/>
-          </a:prstGeom>
-          <a:noFill/>
-        </p:spPr>
-        <p:txBody>
-          <a:bodyPr wrap="square" rtlCol="0">
-            <a:spAutoFit/>
-          </a:bodyPr>
-          <a:lstStyle/>
-          <a:p>
-            <a:pPr algn="ctr"/>
-            <a:r>
-              <a:rPr lang="en-US" sz="900" dirty="0"/>
-              <a:t>123456</a:t>
-            </a:r>
-          </a:p>
-        </p:txBody>
-      </p:sp>
-      <p:sp>
-        <p:nvSpPr>
-          <p:cNvPr id="115" name="TextBox 114">
-            <a:extLst>
-              <a:ext uri="{FF2B5EF4-FFF2-40B4-BE49-F238E27FC236}">
-                <a16:creationId xmlns:a16="http://schemas.microsoft.com/office/drawing/2014/main" id="{F98BE1F8-A8A1-B970-06DB-7B5C6C9890BD}"/>
-              </a:ext>
-            </a:extLst>
-          </p:cNvPr>
-          <p:cNvSpPr txBox="1"/>
-          <p:nvPr/>
-        </p:nvSpPr>
-        <p:spPr>
-          <a:xfrm>
-            <a:off x="3640666" y="2404765"/>
-            <a:ext cx="570089" cy="230832"/>
-          </a:xfrm>
-          <a:prstGeom prst="rect">
-            <a:avLst/>
-          </a:prstGeom>
-          <a:noFill/>
-        </p:spPr>
-        <p:txBody>
-          <a:bodyPr wrap="square" rtlCol="0">
-            <a:spAutoFit/>
-          </a:bodyPr>
-          <a:lstStyle/>
-          <a:p>
-            <a:pPr algn="ctr"/>
-            <a:r>
-              <a:rPr lang="en-US" sz="900" dirty="0"/>
-              <a:t>123456</a:t>
-            </a:r>
-          </a:p>
-        </p:txBody>
-      </p:sp>
-      <p:sp>
-        <p:nvSpPr>
-          <p:cNvPr id="116" name="TextBox 115">
-            <a:extLst>
-              <a:ext uri="{FF2B5EF4-FFF2-40B4-BE49-F238E27FC236}">
-                <a16:creationId xmlns:a16="http://schemas.microsoft.com/office/drawing/2014/main" id="{C086882C-989E-3F24-421F-95B5067DE38E}"/>
-              </a:ext>
-            </a:extLst>
-          </p:cNvPr>
-          <p:cNvSpPr txBox="1"/>
-          <p:nvPr/>
-        </p:nvSpPr>
-        <p:spPr>
-          <a:xfrm>
-            <a:off x="4143022" y="2404765"/>
-            <a:ext cx="570089" cy="230832"/>
-          </a:xfrm>
-          <a:prstGeom prst="rect">
-            <a:avLst/>
-          </a:prstGeom>
-          <a:noFill/>
-        </p:spPr>
-        <p:txBody>
-          <a:bodyPr wrap="square" rtlCol="0">
-            <a:spAutoFit/>
-          </a:bodyPr>
-          <a:lstStyle/>
-          <a:p>
-            <a:pPr algn="ctr"/>
-            <a:r>
-              <a:rPr lang="en-US" sz="900" dirty="0"/>
-              <a:t>123456</a:t>
-            </a:r>
-          </a:p>
-        </p:txBody>
-      </p:sp>
-      <p:sp>
-        <p:nvSpPr>
-          <p:cNvPr id="117" name="TextBox 116">
-            <a:extLst>
-              <a:ext uri="{FF2B5EF4-FFF2-40B4-BE49-F238E27FC236}">
-                <a16:creationId xmlns:a16="http://schemas.microsoft.com/office/drawing/2014/main" id="{C49099AA-E57F-1DF2-3785-1A001BB1C70C}"/>
-              </a:ext>
-            </a:extLst>
-          </p:cNvPr>
-          <p:cNvSpPr txBox="1"/>
-          <p:nvPr/>
-        </p:nvSpPr>
-        <p:spPr>
-          <a:xfrm>
-            <a:off x="4645378" y="2404765"/>
-            <a:ext cx="570089" cy="230832"/>
-          </a:xfrm>
-          <a:prstGeom prst="rect">
-            <a:avLst/>
-          </a:prstGeom>
-          <a:noFill/>
-        </p:spPr>
-        <p:txBody>
-          <a:bodyPr wrap="square" rtlCol="0">
-            <a:spAutoFit/>
-          </a:bodyPr>
-          <a:lstStyle/>
-          <a:p>
-            <a:pPr algn="ctr"/>
-            <a:r>
-              <a:rPr lang="en-US" sz="900" dirty="0"/>
-              <a:t>123456</a:t>
-            </a:r>
-          </a:p>
-        </p:txBody>
-      </p:sp>
-      <p:sp>
-        <p:nvSpPr>
-          <p:cNvPr id="118" name="TextBox 117">
-            <a:extLst>
-              <a:ext uri="{FF2B5EF4-FFF2-40B4-BE49-F238E27FC236}">
-                <a16:creationId xmlns:a16="http://schemas.microsoft.com/office/drawing/2014/main" id="{CC6495DA-918C-4230-9D51-E7479351102E}"/>
-              </a:ext>
-            </a:extLst>
-          </p:cNvPr>
-          <p:cNvSpPr txBox="1"/>
-          <p:nvPr/>
-        </p:nvSpPr>
-        <p:spPr>
-          <a:xfrm>
-            <a:off x="5147734" y="2404765"/>
-            <a:ext cx="570089" cy="230832"/>
-          </a:xfrm>
-          <a:prstGeom prst="rect">
-            <a:avLst/>
-          </a:prstGeom>
-          <a:noFill/>
-        </p:spPr>
-        <p:txBody>
-          <a:bodyPr wrap="square" rtlCol="0">
-            <a:spAutoFit/>
-          </a:bodyPr>
-          <a:lstStyle/>
-          <a:p>
-            <a:pPr algn="ctr"/>
-            <a:r>
-              <a:rPr lang="en-US" sz="900" dirty="0"/>
-              <a:t>123456</a:t>
-            </a:r>
-          </a:p>
-        </p:txBody>
-      </p:sp>
-      <p:sp>
-        <p:nvSpPr>
-          <p:cNvPr id="119" name="TextBox 118">
-            <a:extLst>
-              <a:ext uri="{FF2B5EF4-FFF2-40B4-BE49-F238E27FC236}">
-                <a16:creationId xmlns:a16="http://schemas.microsoft.com/office/drawing/2014/main" id="{A7E7D0D1-94B5-DEDF-0E2F-C3DD26546365}"/>
-              </a:ext>
-            </a:extLst>
-          </p:cNvPr>
-          <p:cNvSpPr txBox="1"/>
-          <p:nvPr/>
-        </p:nvSpPr>
-        <p:spPr>
-          <a:xfrm>
-            <a:off x="5650090" y="2404765"/>
-            <a:ext cx="570089" cy="230832"/>
-          </a:xfrm>
-          <a:prstGeom prst="rect">
-            <a:avLst/>
-          </a:prstGeom>
-          <a:noFill/>
-        </p:spPr>
-        <p:txBody>
-          <a:bodyPr wrap="square" rtlCol="0">
-            <a:spAutoFit/>
-          </a:bodyPr>
-          <a:lstStyle/>
-          <a:p>
-            <a:pPr algn="ctr"/>
-            <a:r>
-              <a:rPr lang="en-US" sz="900" dirty="0"/>
-              <a:t>123456</a:t>
-            </a:r>
-          </a:p>
-        </p:txBody>
-      </p:sp>
-      <p:sp>
-        <p:nvSpPr>
-          <p:cNvPr id="120" name="TextBox 119">
-            <a:extLst>
-              <a:ext uri="{FF2B5EF4-FFF2-40B4-BE49-F238E27FC236}">
-                <a16:creationId xmlns:a16="http://schemas.microsoft.com/office/drawing/2014/main" id="{F7324CDE-A25D-D9AB-9F51-93CD86EE0759}"/>
-              </a:ext>
-            </a:extLst>
-          </p:cNvPr>
-          <p:cNvSpPr txBox="1"/>
-          <p:nvPr/>
-        </p:nvSpPr>
-        <p:spPr>
-          <a:xfrm>
-            <a:off x="6152446" y="2404765"/>
-            <a:ext cx="570089" cy="230832"/>
-          </a:xfrm>
-          <a:prstGeom prst="rect">
-            <a:avLst/>
-          </a:prstGeom>
-          <a:noFill/>
-        </p:spPr>
-        <p:txBody>
-          <a:bodyPr wrap="square" rtlCol="0">
-            <a:spAutoFit/>
-          </a:bodyPr>
-          <a:lstStyle/>
-          <a:p>
-            <a:pPr algn="ctr"/>
-            <a:r>
-              <a:rPr lang="en-US" sz="900" dirty="0"/>
-              <a:t>123456</a:t>
-            </a:r>
-          </a:p>
-        </p:txBody>
-      </p:sp>
-      <p:sp>
-        <p:nvSpPr>
-          <p:cNvPr id="121" name="TextBox 120">
-            <a:extLst>
-              <a:ext uri="{FF2B5EF4-FFF2-40B4-BE49-F238E27FC236}">
-                <a16:creationId xmlns:a16="http://schemas.microsoft.com/office/drawing/2014/main" id="{26B144A0-6A62-2178-F93B-F1E912D7E91A}"/>
-              </a:ext>
-            </a:extLst>
-          </p:cNvPr>
-          <p:cNvSpPr txBox="1"/>
-          <p:nvPr/>
-        </p:nvSpPr>
-        <p:spPr>
-          <a:xfrm>
-            <a:off x="6654802" y="2404765"/>
-            <a:ext cx="570089" cy="230832"/>
-          </a:xfrm>
-          <a:prstGeom prst="rect">
-            <a:avLst/>
-          </a:prstGeom>
-          <a:noFill/>
-        </p:spPr>
-        <p:txBody>
-          <a:bodyPr wrap="square" rtlCol="0">
-            <a:spAutoFit/>
-          </a:bodyPr>
-          <a:lstStyle/>
-          <a:p>
-            <a:pPr algn="ctr"/>
-            <a:r>
-              <a:rPr lang="en-US" sz="900" dirty="0"/>
-              <a:t>123456</a:t>
-            </a:r>
-          </a:p>
-        </p:txBody>
-      </p:sp>
-      <p:sp>
-        <p:nvSpPr>
-          <p:cNvPr id="122" name="TextBox 121">
-            <a:extLst>
-              <a:ext uri="{FF2B5EF4-FFF2-40B4-BE49-F238E27FC236}">
-                <a16:creationId xmlns:a16="http://schemas.microsoft.com/office/drawing/2014/main" id="{81C64677-8826-3E39-7AF4-21CB0CCF5788}"/>
-              </a:ext>
-            </a:extLst>
-          </p:cNvPr>
-          <p:cNvSpPr txBox="1"/>
-          <p:nvPr/>
-        </p:nvSpPr>
-        <p:spPr>
-          <a:xfrm>
-            <a:off x="7157158" y="2404765"/>
-            <a:ext cx="570089" cy="230832"/>
-          </a:xfrm>
-          <a:prstGeom prst="rect">
-            <a:avLst/>
-          </a:prstGeom>
-          <a:noFill/>
-        </p:spPr>
-        <p:txBody>
-          <a:bodyPr wrap="square" rtlCol="0">
-            <a:spAutoFit/>
-          </a:bodyPr>
-          <a:lstStyle/>
-          <a:p>
-            <a:pPr algn="ctr"/>
-            <a:r>
-              <a:rPr lang="en-US" sz="900" dirty="0"/>
-              <a:t>123456</a:t>
-            </a:r>
-          </a:p>
-        </p:txBody>
-      </p:sp>
-      <p:sp>
-        <p:nvSpPr>
-          <p:cNvPr id="123" name="TextBox 122">
-            <a:extLst>
-              <a:ext uri="{FF2B5EF4-FFF2-40B4-BE49-F238E27FC236}">
-                <a16:creationId xmlns:a16="http://schemas.microsoft.com/office/drawing/2014/main" id="{4588FC59-0908-97A5-21AB-5F6F09BAE727}"/>
-              </a:ext>
-            </a:extLst>
-          </p:cNvPr>
-          <p:cNvSpPr txBox="1"/>
-          <p:nvPr/>
-        </p:nvSpPr>
-        <p:spPr>
-          <a:xfrm>
-            <a:off x="3138310" y="2404765"/>
-            <a:ext cx="570089" cy="230832"/>
-          </a:xfrm>
-          <a:prstGeom prst="rect">
-            <a:avLst/>
-          </a:prstGeom>
-          <a:noFill/>
-        </p:spPr>
-        <p:txBody>
-          <a:bodyPr wrap="square" rtlCol="0">
-            <a:spAutoFit/>
-          </a:bodyPr>
-          <a:lstStyle/>
-          <a:p>
-            <a:pPr algn="ctr"/>
-            <a:r>
-              <a:rPr lang="en-US" sz="900" dirty="0"/>
-              <a:t>123456</a:t>
-            </a:r>
-          </a:p>
-        </p:txBody>
-      </p:sp>
-      <p:sp>
-        <p:nvSpPr>
-          <p:cNvPr id="125" name="TextBox 124">
-            <a:extLst>
-              <a:ext uri="{FF2B5EF4-FFF2-40B4-BE49-F238E27FC236}">
-                <a16:creationId xmlns:a16="http://schemas.microsoft.com/office/drawing/2014/main" id="{586C48C3-3F20-4B17-FA41-C4741506D5B3}"/>
-              </a:ext>
-            </a:extLst>
-          </p:cNvPr>
-          <p:cNvSpPr txBox="1"/>
-          <p:nvPr/>
-        </p:nvSpPr>
-        <p:spPr>
-          <a:xfrm>
-            <a:off x="3640666" y="2905709"/>
-            <a:ext cx="570089" cy="230832"/>
-          </a:xfrm>
-          <a:prstGeom prst="rect">
-            <a:avLst/>
-          </a:prstGeom>
-          <a:noFill/>
-        </p:spPr>
-        <p:txBody>
-          <a:bodyPr wrap="square" rtlCol="0">
-            <a:spAutoFit/>
-          </a:bodyPr>
-          <a:lstStyle/>
-          <a:p>
-            <a:pPr algn="ctr"/>
-            <a:r>
-              <a:rPr lang="en-US" sz="900" dirty="0"/>
-              <a:t>123456</a:t>
-            </a:r>
-          </a:p>
-        </p:txBody>
-      </p:sp>
-      <p:sp>
-        <p:nvSpPr>
-          <p:cNvPr id="126" name="TextBox 125">
-            <a:extLst>
-              <a:ext uri="{FF2B5EF4-FFF2-40B4-BE49-F238E27FC236}">
-                <a16:creationId xmlns:a16="http://schemas.microsoft.com/office/drawing/2014/main" id="{936E54B7-6F97-FEF2-F03B-7AAAC01D3E2B}"/>
-              </a:ext>
-            </a:extLst>
-          </p:cNvPr>
-          <p:cNvSpPr txBox="1"/>
-          <p:nvPr/>
-        </p:nvSpPr>
-        <p:spPr>
-          <a:xfrm>
-            <a:off x="4143022" y="2905709"/>
-            <a:ext cx="570089" cy="230832"/>
-          </a:xfrm>
-          <a:prstGeom prst="rect">
-            <a:avLst/>
-          </a:prstGeom>
-          <a:noFill/>
-        </p:spPr>
-        <p:txBody>
-          <a:bodyPr wrap="square" rtlCol="0">
-            <a:spAutoFit/>
-          </a:bodyPr>
-          <a:lstStyle/>
-          <a:p>
-            <a:pPr algn="ctr"/>
-            <a:r>
-              <a:rPr lang="en-US" sz="900" dirty="0"/>
-              <a:t>123456</a:t>
-            </a:r>
-          </a:p>
-        </p:txBody>
-      </p:sp>
-      <p:sp>
-        <p:nvSpPr>
-          <p:cNvPr id="127" name="TextBox 126">
-            <a:extLst>
-              <a:ext uri="{FF2B5EF4-FFF2-40B4-BE49-F238E27FC236}">
-                <a16:creationId xmlns:a16="http://schemas.microsoft.com/office/drawing/2014/main" id="{E7C25FD9-9D4C-557E-C6E5-AE3416E50F87}"/>
-              </a:ext>
-            </a:extLst>
-          </p:cNvPr>
-          <p:cNvSpPr txBox="1"/>
-          <p:nvPr/>
-        </p:nvSpPr>
-        <p:spPr>
-          <a:xfrm>
-            <a:off x="4645378" y="2905709"/>
-            <a:ext cx="570089" cy="230832"/>
-          </a:xfrm>
-          <a:prstGeom prst="rect">
-            <a:avLst/>
-          </a:prstGeom>
-          <a:noFill/>
-        </p:spPr>
-        <p:txBody>
-          <a:bodyPr wrap="square" rtlCol="0">
-            <a:spAutoFit/>
-          </a:bodyPr>
-          <a:lstStyle/>
-          <a:p>
-            <a:pPr algn="ctr"/>
-            <a:r>
-              <a:rPr lang="en-US" sz="900" dirty="0"/>
-              <a:t>123456</a:t>
-            </a:r>
-          </a:p>
-        </p:txBody>
-      </p:sp>
-      <p:sp>
-        <p:nvSpPr>
-          <p:cNvPr id="128" name="TextBox 127">
-            <a:extLst>
-              <a:ext uri="{FF2B5EF4-FFF2-40B4-BE49-F238E27FC236}">
-                <a16:creationId xmlns:a16="http://schemas.microsoft.com/office/drawing/2014/main" id="{64BDD1AE-DB4B-3CA5-431D-DA60E23D2FD1}"/>
-              </a:ext>
-            </a:extLst>
-          </p:cNvPr>
-          <p:cNvSpPr txBox="1"/>
-          <p:nvPr/>
-        </p:nvSpPr>
-        <p:spPr>
-          <a:xfrm>
-            <a:off x="5147734" y="2905709"/>
-            <a:ext cx="570089" cy="230832"/>
-          </a:xfrm>
-          <a:prstGeom prst="rect">
-            <a:avLst/>
-          </a:prstGeom>
-          <a:noFill/>
-        </p:spPr>
-        <p:txBody>
-          <a:bodyPr wrap="square" rtlCol="0">
-            <a:spAutoFit/>
-          </a:bodyPr>
-          <a:lstStyle/>
-          <a:p>
-            <a:pPr algn="ctr"/>
-            <a:r>
-              <a:rPr lang="en-US" sz="900" dirty="0"/>
-              <a:t>123456</a:t>
-            </a:r>
-          </a:p>
-        </p:txBody>
-      </p:sp>
-      <p:sp>
-        <p:nvSpPr>
-          <p:cNvPr id="129" name="TextBox 128">
-            <a:extLst>
-              <a:ext uri="{FF2B5EF4-FFF2-40B4-BE49-F238E27FC236}">
-                <a16:creationId xmlns:a16="http://schemas.microsoft.com/office/drawing/2014/main" id="{106A23A5-E07D-6AD3-A25E-E208CD6EA386}"/>
-              </a:ext>
-            </a:extLst>
-          </p:cNvPr>
-          <p:cNvSpPr txBox="1"/>
-          <p:nvPr/>
-        </p:nvSpPr>
-        <p:spPr>
-          <a:xfrm>
-            <a:off x="5650090" y="2905709"/>
-            <a:ext cx="570089" cy="230832"/>
-          </a:xfrm>
-          <a:prstGeom prst="rect">
-            <a:avLst/>
-          </a:prstGeom>
-          <a:noFill/>
-        </p:spPr>
-        <p:txBody>
-          <a:bodyPr wrap="square" rtlCol="0">
-            <a:spAutoFit/>
-          </a:bodyPr>
-          <a:lstStyle/>
-          <a:p>
-            <a:pPr algn="ctr"/>
-            <a:r>
-              <a:rPr lang="en-US" sz="900" dirty="0"/>
-              <a:t>123456</a:t>
-            </a:r>
-          </a:p>
-        </p:txBody>
-      </p:sp>
-      <p:sp>
-        <p:nvSpPr>
-          <p:cNvPr id="130" name="TextBox 129">
-            <a:extLst>
-              <a:ext uri="{FF2B5EF4-FFF2-40B4-BE49-F238E27FC236}">
-                <a16:creationId xmlns:a16="http://schemas.microsoft.com/office/drawing/2014/main" id="{62D20885-59F5-D5EF-192A-38A4DDB2A2F6}"/>
-              </a:ext>
-            </a:extLst>
-          </p:cNvPr>
-          <p:cNvSpPr txBox="1"/>
-          <p:nvPr/>
-        </p:nvSpPr>
-        <p:spPr>
-          <a:xfrm>
-            <a:off x="6152446" y="2905709"/>
-            <a:ext cx="570089" cy="230832"/>
-          </a:xfrm>
-          <a:prstGeom prst="rect">
-            <a:avLst/>
-          </a:prstGeom>
-          <a:noFill/>
-        </p:spPr>
-        <p:txBody>
-          <a:bodyPr wrap="square" rtlCol="0">
-            <a:spAutoFit/>
-          </a:bodyPr>
-          <a:lstStyle/>
-          <a:p>
-            <a:pPr algn="ctr"/>
-            <a:r>
-              <a:rPr lang="en-US" sz="900" dirty="0"/>
-              <a:t>123456</a:t>
-            </a:r>
-          </a:p>
-        </p:txBody>
-      </p:sp>
-      <p:sp>
-        <p:nvSpPr>
-          <p:cNvPr id="131" name="TextBox 130">
-            <a:extLst>
-              <a:ext uri="{FF2B5EF4-FFF2-40B4-BE49-F238E27FC236}">
-                <a16:creationId xmlns:a16="http://schemas.microsoft.com/office/drawing/2014/main" id="{0E2FA26F-0294-745E-AC34-3565C142AA52}"/>
-              </a:ext>
-            </a:extLst>
-          </p:cNvPr>
-          <p:cNvSpPr txBox="1"/>
-          <p:nvPr/>
-        </p:nvSpPr>
-        <p:spPr>
-          <a:xfrm>
-            <a:off x="6654802" y="2905709"/>
-            <a:ext cx="570089" cy="230832"/>
-          </a:xfrm>
-          <a:prstGeom prst="rect">
-            <a:avLst/>
-          </a:prstGeom>
-          <a:noFill/>
-        </p:spPr>
-        <p:txBody>
-          <a:bodyPr wrap="square" rtlCol="0">
-            <a:spAutoFit/>
-          </a:bodyPr>
-          <a:lstStyle/>
-          <a:p>
-            <a:pPr algn="ctr"/>
-            <a:r>
-              <a:rPr lang="en-US" sz="900" dirty="0"/>
-              <a:t>123456</a:t>
-            </a:r>
-          </a:p>
-        </p:txBody>
-      </p:sp>
-      <p:sp>
-        <p:nvSpPr>
-          <p:cNvPr id="132" name="TextBox 131">
-            <a:extLst>
-              <a:ext uri="{FF2B5EF4-FFF2-40B4-BE49-F238E27FC236}">
-                <a16:creationId xmlns:a16="http://schemas.microsoft.com/office/drawing/2014/main" id="{3B15544F-BE52-A2FE-4074-37906CE3AEBE}"/>
-              </a:ext>
-            </a:extLst>
-          </p:cNvPr>
-          <p:cNvSpPr txBox="1"/>
-          <p:nvPr/>
-        </p:nvSpPr>
-        <p:spPr>
-          <a:xfrm>
-            <a:off x="7157158" y="2905709"/>
-            <a:ext cx="570089" cy="230832"/>
-          </a:xfrm>
-          <a:prstGeom prst="rect">
-            <a:avLst/>
-          </a:prstGeom>
-          <a:noFill/>
-        </p:spPr>
-        <p:txBody>
-          <a:bodyPr wrap="square" rtlCol="0">
-            <a:spAutoFit/>
-          </a:bodyPr>
-          <a:lstStyle/>
-          <a:p>
-            <a:pPr algn="ctr"/>
-            <a:r>
-              <a:rPr lang="en-US" sz="900" dirty="0"/>
-              <a:t>123456</a:t>
-            </a:r>
-          </a:p>
-        </p:txBody>
-      </p:sp>
-      <p:sp>
-        <p:nvSpPr>
-          <p:cNvPr id="133" name="TextBox 132">
-            <a:extLst>
-              <a:ext uri="{FF2B5EF4-FFF2-40B4-BE49-F238E27FC236}">
-                <a16:creationId xmlns:a16="http://schemas.microsoft.com/office/drawing/2014/main" id="{80FDCC57-DE1D-E76B-839F-85D9E51752F5}"/>
-              </a:ext>
-            </a:extLst>
-          </p:cNvPr>
-          <p:cNvSpPr txBox="1"/>
-          <p:nvPr/>
-        </p:nvSpPr>
-        <p:spPr>
-          <a:xfrm>
-            <a:off x="3138310" y="2905709"/>
-            <a:ext cx="570089" cy="230832"/>
-          </a:xfrm>
-          <a:prstGeom prst="rect">
-            <a:avLst/>
-          </a:prstGeom>
-          <a:noFill/>
-        </p:spPr>
-        <p:txBody>
-          <a:bodyPr wrap="square" rtlCol="0">
-            <a:spAutoFit/>
-          </a:bodyPr>
-          <a:lstStyle/>
-          <a:p>
-            <a:pPr algn="ctr"/>
-            <a:r>
-              <a:rPr lang="en-US" sz="900" dirty="0"/>
-              <a:t>123456</a:t>
-            </a:r>
-          </a:p>
-        </p:txBody>
-      </p:sp>
-      <p:sp>
-        <p:nvSpPr>
-          <p:cNvPr id="135" name="TextBox 134">
-            <a:extLst>
-              <a:ext uri="{FF2B5EF4-FFF2-40B4-BE49-F238E27FC236}">
-                <a16:creationId xmlns:a16="http://schemas.microsoft.com/office/drawing/2014/main" id="{47E407FD-7F9A-2A98-FC1F-6A88834BE97A}"/>
-              </a:ext>
-            </a:extLst>
-          </p:cNvPr>
-          <p:cNvSpPr txBox="1"/>
-          <p:nvPr/>
-        </p:nvSpPr>
-        <p:spPr>
-          <a:xfrm>
-            <a:off x="3640666" y="3406653"/>
-            <a:ext cx="570089" cy="230832"/>
-          </a:xfrm>
-          <a:prstGeom prst="rect">
-            <a:avLst/>
-          </a:prstGeom>
-          <a:noFill/>
-        </p:spPr>
-        <p:txBody>
-          <a:bodyPr wrap="square" rtlCol="0">
-            <a:spAutoFit/>
-          </a:bodyPr>
-          <a:lstStyle/>
-          <a:p>
-            <a:pPr algn="ctr"/>
-            <a:r>
-              <a:rPr lang="en-US" sz="900" dirty="0"/>
-              <a:t>123456</a:t>
-            </a:r>
-          </a:p>
-        </p:txBody>
-      </p:sp>
-      <p:sp>
-        <p:nvSpPr>
-          <p:cNvPr id="136" name="TextBox 135">
-            <a:extLst>
-              <a:ext uri="{FF2B5EF4-FFF2-40B4-BE49-F238E27FC236}">
-                <a16:creationId xmlns:a16="http://schemas.microsoft.com/office/drawing/2014/main" id="{F2B603FB-9593-8853-522A-B1FD932C7C50}"/>
-              </a:ext>
-            </a:extLst>
-          </p:cNvPr>
-          <p:cNvSpPr txBox="1"/>
-          <p:nvPr/>
-        </p:nvSpPr>
-        <p:spPr>
-          <a:xfrm>
-            <a:off x="4143022" y="3406653"/>
-            <a:ext cx="570089" cy="230832"/>
-          </a:xfrm>
-          <a:prstGeom prst="rect">
-            <a:avLst/>
-          </a:prstGeom>
-          <a:noFill/>
-        </p:spPr>
-        <p:txBody>
-          <a:bodyPr wrap="square" rtlCol="0">
-            <a:spAutoFit/>
-          </a:bodyPr>
-          <a:lstStyle/>
-          <a:p>
-            <a:pPr algn="ctr"/>
-            <a:r>
-              <a:rPr lang="en-US" sz="900" dirty="0"/>
-              <a:t>123456</a:t>
-            </a:r>
-          </a:p>
-        </p:txBody>
-      </p:sp>
-      <p:sp>
-        <p:nvSpPr>
-          <p:cNvPr id="137" name="TextBox 136">
-            <a:extLst>
-              <a:ext uri="{FF2B5EF4-FFF2-40B4-BE49-F238E27FC236}">
-                <a16:creationId xmlns:a16="http://schemas.microsoft.com/office/drawing/2014/main" id="{99173C26-DABF-28BB-EBE2-D16BF5CA43E7}"/>
-              </a:ext>
-            </a:extLst>
-          </p:cNvPr>
-          <p:cNvSpPr txBox="1"/>
-          <p:nvPr/>
-        </p:nvSpPr>
-        <p:spPr>
-          <a:xfrm>
-            <a:off x="4645378" y="3406653"/>
-            <a:ext cx="570089" cy="230832"/>
-          </a:xfrm>
-          <a:prstGeom prst="rect">
-            <a:avLst/>
-          </a:prstGeom>
-          <a:noFill/>
-        </p:spPr>
-        <p:txBody>
-          <a:bodyPr wrap="square" rtlCol="0">
-            <a:spAutoFit/>
-          </a:bodyPr>
-          <a:lstStyle/>
-          <a:p>
-            <a:pPr algn="ctr"/>
-            <a:r>
-              <a:rPr lang="en-US" sz="900" dirty="0"/>
-              <a:t>123456</a:t>
-            </a:r>
-          </a:p>
-        </p:txBody>
-      </p:sp>
-      <p:sp>
-        <p:nvSpPr>
-          <p:cNvPr id="138" name="TextBox 137">
-            <a:extLst>
-              <a:ext uri="{FF2B5EF4-FFF2-40B4-BE49-F238E27FC236}">
-                <a16:creationId xmlns:a16="http://schemas.microsoft.com/office/drawing/2014/main" id="{B75A6AEB-6650-CFA4-9CEA-2023F1ADBC58}"/>
-              </a:ext>
-            </a:extLst>
-          </p:cNvPr>
-          <p:cNvSpPr txBox="1"/>
-          <p:nvPr/>
-        </p:nvSpPr>
-        <p:spPr>
-          <a:xfrm>
-            <a:off x="5147734" y="3406653"/>
-            <a:ext cx="570089" cy="230832"/>
-          </a:xfrm>
-          <a:prstGeom prst="rect">
-            <a:avLst/>
-          </a:prstGeom>
-          <a:noFill/>
-        </p:spPr>
-        <p:txBody>
-          <a:bodyPr wrap="square" rtlCol="0">
-            <a:spAutoFit/>
-          </a:bodyPr>
-          <a:lstStyle/>
-          <a:p>
-            <a:pPr algn="ctr"/>
-            <a:r>
-              <a:rPr lang="en-US" sz="900" dirty="0"/>
-              <a:t>123456</a:t>
-            </a:r>
-          </a:p>
-        </p:txBody>
-      </p:sp>
-      <p:sp>
-        <p:nvSpPr>
-          <p:cNvPr id="139" name="TextBox 138">
-            <a:extLst>
-              <a:ext uri="{FF2B5EF4-FFF2-40B4-BE49-F238E27FC236}">
-                <a16:creationId xmlns:a16="http://schemas.microsoft.com/office/drawing/2014/main" id="{E6574ACB-29E9-A27A-5747-5085F358A12E}"/>
-              </a:ext>
-            </a:extLst>
-          </p:cNvPr>
-          <p:cNvSpPr txBox="1"/>
-          <p:nvPr/>
-        </p:nvSpPr>
-        <p:spPr>
-          <a:xfrm>
-            <a:off x="5650090" y="3406653"/>
-            <a:ext cx="570089" cy="230832"/>
-          </a:xfrm>
-          <a:prstGeom prst="rect">
-            <a:avLst/>
-          </a:prstGeom>
-          <a:noFill/>
-        </p:spPr>
-        <p:txBody>
-          <a:bodyPr wrap="square" rtlCol="0">
-            <a:spAutoFit/>
-          </a:bodyPr>
-          <a:lstStyle/>
-          <a:p>
-            <a:pPr algn="ctr"/>
-            <a:r>
-              <a:rPr lang="en-US" sz="900" dirty="0"/>
-              <a:t>123456</a:t>
-            </a:r>
-          </a:p>
-        </p:txBody>
-      </p:sp>
-      <p:sp>
-        <p:nvSpPr>
-          <p:cNvPr id="140" name="TextBox 139">
-            <a:extLst>
-              <a:ext uri="{FF2B5EF4-FFF2-40B4-BE49-F238E27FC236}">
-                <a16:creationId xmlns:a16="http://schemas.microsoft.com/office/drawing/2014/main" id="{E4C414D4-8A91-C39B-9BA6-73BB7F2CBE61}"/>
-              </a:ext>
-            </a:extLst>
-          </p:cNvPr>
-          <p:cNvSpPr txBox="1"/>
-          <p:nvPr/>
-        </p:nvSpPr>
-        <p:spPr>
-          <a:xfrm>
-            <a:off x="6152446" y="3406653"/>
-            <a:ext cx="570089" cy="230832"/>
-          </a:xfrm>
-          <a:prstGeom prst="rect">
-            <a:avLst/>
-          </a:prstGeom>
-          <a:noFill/>
-        </p:spPr>
-        <p:txBody>
-          <a:bodyPr wrap="square" rtlCol="0">
-            <a:spAutoFit/>
-          </a:bodyPr>
-          <a:lstStyle/>
-          <a:p>
-            <a:pPr algn="ctr"/>
-            <a:r>
-              <a:rPr lang="en-US" sz="900" dirty="0"/>
-              <a:t>123456</a:t>
-            </a:r>
-          </a:p>
-        </p:txBody>
-      </p:sp>
-      <p:sp>
-        <p:nvSpPr>
-          <p:cNvPr id="141" name="TextBox 140">
-            <a:extLst>
-              <a:ext uri="{FF2B5EF4-FFF2-40B4-BE49-F238E27FC236}">
-                <a16:creationId xmlns:a16="http://schemas.microsoft.com/office/drawing/2014/main" id="{5704EC94-AE00-8414-53CA-BCBBEF23DD53}"/>
-              </a:ext>
-            </a:extLst>
-          </p:cNvPr>
-          <p:cNvSpPr txBox="1"/>
-          <p:nvPr/>
-        </p:nvSpPr>
-        <p:spPr>
-          <a:xfrm>
-            <a:off x="6654802" y="3406653"/>
-            <a:ext cx="570089" cy="230832"/>
-          </a:xfrm>
-          <a:prstGeom prst="rect">
-            <a:avLst/>
-          </a:prstGeom>
-          <a:noFill/>
-        </p:spPr>
-        <p:txBody>
-          <a:bodyPr wrap="square" rtlCol="0">
-            <a:spAutoFit/>
-          </a:bodyPr>
-          <a:lstStyle/>
-          <a:p>
-            <a:pPr algn="ctr"/>
-            <a:r>
-              <a:rPr lang="en-US" sz="900" dirty="0"/>
-              <a:t>123456</a:t>
-            </a:r>
-          </a:p>
-        </p:txBody>
-      </p:sp>
-      <p:sp>
-        <p:nvSpPr>
-          <p:cNvPr id="142" name="TextBox 141">
-            <a:extLst>
-              <a:ext uri="{FF2B5EF4-FFF2-40B4-BE49-F238E27FC236}">
-                <a16:creationId xmlns:a16="http://schemas.microsoft.com/office/drawing/2014/main" id="{ECA0350D-563D-6630-7304-097E019173D7}"/>
-              </a:ext>
-            </a:extLst>
-          </p:cNvPr>
-          <p:cNvSpPr txBox="1"/>
-          <p:nvPr/>
-        </p:nvSpPr>
-        <p:spPr>
-          <a:xfrm>
-            <a:off x="7157158" y="3406653"/>
-            <a:ext cx="570089" cy="230832"/>
-          </a:xfrm>
-          <a:prstGeom prst="rect">
-            <a:avLst/>
-          </a:prstGeom>
-          <a:noFill/>
-        </p:spPr>
-        <p:txBody>
-          <a:bodyPr wrap="square" rtlCol="0">
-            <a:spAutoFit/>
-          </a:bodyPr>
-          <a:lstStyle/>
-          <a:p>
-            <a:pPr algn="ctr"/>
-            <a:r>
-              <a:rPr lang="en-US" sz="900" dirty="0"/>
-              <a:t>123456</a:t>
-            </a:r>
-          </a:p>
-        </p:txBody>
-      </p:sp>
-      <p:sp>
-        <p:nvSpPr>
-          <p:cNvPr id="143" name="TextBox 142">
-            <a:extLst>
-              <a:ext uri="{FF2B5EF4-FFF2-40B4-BE49-F238E27FC236}">
-                <a16:creationId xmlns:a16="http://schemas.microsoft.com/office/drawing/2014/main" id="{37336222-6EA2-349F-6352-AD6A1D558833}"/>
-              </a:ext>
-            </a:extLst>
-          </p:cNvPr>
-          <p:cNvSpPr txBox="1"/>
-          <p:nvPr/>
-        </p:nvSpPr>
-        <p:spPr>
-          <a:xfrm>
-            <a:off x="3138310" y="3406653"/>
-            <a:ext cx="570089" cy="230832"/>
-          </a:xfrm>
-          <a:prstGeom prst="rect">
-            <a:avLst/>
-          </a:prstGeom>
-          <a:noFill/>
-        </p:spPr>
-        <p:txBody>
-          <a:bodyPr wrap="square" rtlCol="0">
-            <a:spAutoFit/>
-          </a:bodyPr>
-          <a:lstStyle/>
-          <a:p>
-            <a:pPr algn="ctr"/>
-            <a:r>
-              <a:rPr lang="en-US" sz="900" dirty="0"/>
-              <a:t>123456</a:t>
-            </a:r>
-          </a:p>
-        </p:txBody>
-      </p:sp>
-      <p:sp>
-        <p:nvSpPr>
-          <p:cNvPr id="145" name="TextBox 144">
-            <a:extLst>
-              <a:ext uri="{FF2B5EF4-FFF2-40B4-BE49-F238E27FC236}">
-                <a16:creationId xmlns:a16="http://schemas.microsoft.com/office/drawing/2014/main" id="{9829D046-E18D-DB3D-78CE-D4D546B417E7}"/>
-              </a:ext>
-            </a:extLst>
-          </p:cNvPr>
-          <p:cNvSpPr txBox="1"/>
-          <p:nvPr/>
-        </p:nvSpPr>
-        <p:spPr>
-          <a:xfrm>
-            <a:off x="3640666" y="3907597"/>
-            <a:ext cx="570089" cy="230832"/>
-          </a:xfrm>
-          <a:prstGeom prst="rect">
-            <a:avLst/>
-          </a:prstGeom>
-          <a:noFill/>
-        </p:spPr>
-        <p:txBody>
-          <a:bodyPr wrap="square" rtlCol="0">
-            <a:spAutoFit/>
-          </a:bodyPr>
-          <a:lstStyle/>
-          <a:p>
-            <a:pPr algn="ctr"/>
-            <a:r>
-              <a:rPr lang="en-US" sz="900" dirty="0"/>
-              <a:t>123456</a:t>
-            </a:r>
-          </a:p>
-        </p:txBody>
-      </p:sp>
-      <p:sp>
-        <p:nvSpPr>
-          <p:cNvPr id="146" name="TextBox 145">
-            <a:extLst>
-              <a:ext uri="{FF2B5EF4-FFF2-40B4-BE49-F238E27FC236}">
-                <a16:creationId xmlns:a16="http://schemas.microsoft.com/office/drawing/2014/main" id="{0190BB7A-527D-5AC8-9CAD-4789CA2E5515}"/>
-              </a:ext>
-            </a:extLst>
-          </p:cNvPr>
-          <p:cNvSpPr txBox="1"/>
-          <p:nvPr/>
-        </p:nvSpPr>
-        <p:spPr>
-          <a:xfrm>
-            <a:off x="4143022" y="3907597"/>
-            <a:ext cx="570089" cy="230832"/>
-          </a:xfrm>
-          <a:prstGeom prst="rect">
-            <a:avLst/>
-          </a:prstGeom>
-          <a:noFill/>
-        </p:spPr>
-        <p:txBody>
-          <a:bodyPr wrap="square" rtlCol="0">
-            <a:spAutoFit/>
-          </a:bodyPr>
-          <a:lstStyle/>
-          <a:p>
-            <a:pPr algn="ctr"/>
-            <a:r>
-              <a:rPr lang="en-US" sz="900" dirty="0"/>
-              <a:t>123456</a:t>
-            </a:r>
-          </a:p>
-        </p:txBody>
-      </p:sp>
-      <p:sp>
-        <p:nvSpPr>
-          <p:cNvPr id="147" name="TextBox 146">
-            <a:extLst>
-              <a:ext uri="{FF2B5EF4-FFF2-40B4-BE49-F238E27FC236}">
-                <a16:creationId xmlns:a16="http://schemas.microsoft.com/office/drawing/2014/main" id="{0B4627CC-56EB-967A-C511-2FBE82171B6A}"/>
-              </a:ext>
-            </a:extLst>
-          </p:cNvPr>
-          <p:cNvSpPr txBox="1"/>
-          <p:nvPr/>
-        </p:nvSpPr>
-        <p:spPr>
-          <a:xfrm>
-            <a:off x="4645378" y="3907597"/>
-            <a:ext cx="570089" cy="230832"/>
-          </a:xfrm>
-          <a:prstGeom prst="rect">
-            <a:avLst/>
-          </a:prstGeom>
-          <a:noFill/>
-        </p:spPr>
-        <p:txBody>
-          <a:bodyPr wrap="square" rtlCol="0">
-            <a:spAutoFit/>
-          </a:bodyPr>
-          <a:lstStyle/>
-          <a:p>
-            <a:pPr algn="ctr"/>
-            <a:r>
-              <a:rPr lang="en-US" sz="900" dirty="0"/>
-              <a:t>123456</a:t>
-            </a:r>
-          </a:p>
-        </p:txBody>
-      </p:sp>
-      <p:sp>
-        <p:nvSpPr>
-          <p:cNvPr id="148" name="TextBox 147">
-            <a:extLst>
-              <a:ext uri="{FF2B5EF4-FFF2-40B4-BE49-F238E27FC236}">
-                <a16:creationId xmlns:a16="http://schemas.microsoft.com/office/drawing/2014/main" id="{2F178DE4-AF7E-3303-A825-0C6D7E363911}"/>
-              </a:ext>
-            </a:extLst>
-          </p:cNvPr>
-          <p:cNvSpPr txBox="1"/>
-          <p:nvPr/>
-        </p:nvSpPr>
-        <p:spPr>
-          <a:xfrm>
-            <a:off x="5147734" y="3907597"/>
-            <a:ext cx="570089" cy="230832"/>
-          </a:xfrm>
-          <a:prstGeom prst="rect">
-            <a:avLst/>
-          </a:prstGeom>
-          <a:noFill/>
-        </p:spPr>
-        <p:txBody>
-          <a:bodyPr wrap="square" rtlCol="0">
-            <a:spAutoFit/>
-          </a:bodyPr>
-          <a:lstStyle/>
-          <a:p>
-            <a:pPr algn="ctr"/>
-            <a:r>
-              <a:rPr lang="en-US" sz="900" dirty="0"/>
-              <a:t>123456</a:t>
-            </a:r>
-          </a:p>
-        </p:txBody>
-      </p:sp>
-      <p:sp>
-        <p:nvSpPr>
-          <p:cNvPr id="149" name="TextBox 148">
-            <a:extLst>
-              <a:ext uri="{FF2B5EF4-FFF2-40B4-BE49-F238E27FC236}">
-                <a16:creationId xmlns:a16="http://schemas.microsoft.com/office/drawing/2014/main" id="{F010D4D1-FB85-E67C-79E4-FE89CFF4AD63}"/>
-              </a:ext>
-            </a:extLst>
-          </p:cNvPr>
-          <p:cNvSpPr txBox="1"/>
-          <p:nvPr/>
-        </p:nvSpPr>
-        <p:spPr>
-          <a:xfrm>
-            <a:off x="5650090" y="3907597"/>
-            <a:ext cx="570089" cy="230832"/>
-          </a:xfrm>
-          <a:prstGeom prst="rect">
-            <a:avLst/>
-          </a:prstGeom>
-          <a:noFill/>
-        </p:spPr>
-        <p:txBody>
-          <a:bodyPr wrap="square" rtlCol="0">
-            <a:spAutoFit/>
-          </a:bodyPr>
-          <a:lstStyle/>
-          <a:p>
-            <a:pPr algn="ctr"/>
-            <a:r>
-              <a:rPr lang="en-US" sz="900" dirty="0"/>
-              <a:t>123456</a:t>
-            </a:r>
-          </a:p>
-        </p:txBody>
-      </p:sp>
-      <p:sp>
-        <p:nvSpPr>
-          <p:cNvPr id="150" name="TextBox 149">
-            <a:extLst>
-              <a:ext uri="{FF2B5EF4-FFF2-40B4-BE49-F238E27FC236}">
-                <a16:creationId xmlns:a16="http://schemas.microsoft.com/office/drawing/2014/main" id="{714B53DC-0572-2585-B837-63D13EA41433}"/>
-              </a:ext>
-            </a:extLst>
-          </p:cNvPr>
-          <p:cNvSpPr txBox="1"/>
-          <p:nvPr/>
-        </p:nvSpPr>
-        <p:spPr>
-          <a:xfrm>
-            <a:off x="6152446" y="3907597"/>
-            <a:ext cx="570089" cy="230832"/>
-          </a:xfrm>
-          <a:prstGeom prst="rect">
-            <a:avLst/>
-          </a:prstGeom>
-          <a:noFill/>
-        </p:spPr>
-        <p:txBody>
-          <a:bodyPr wrap="square" rtlCol="0">
-            <a:spAutoFit/>
-          </a:bodyPr>
-          <a:lstStyle/>
-          <a:p>
-            <a:pPr algn="ctr"/>
-            <a:r>
-              <a:rPr lang="en-US" sz="900" dirty="0"/>
-              <a:t>123456</a:t>
-            </a:r>
-          </a:p>
-        </p:txBody>
-      </p:sp>
-      <p:sp>
-        <p:nvSpPr>
-          <p:cNvPr id="151" name="TextBox 150">
-            <a:extLst>
-              <a:ext uri="{FF2B5EF4-FFF2-40B4-BE49-F238E27FC236}">
-                <a16:creationId xmlns:a16="http://schemas.microsoft.com/office/drawing/2014/main" id="{ACC99F2D-20FD-91BB-AFCF-1BDAA2C7CAC2}"/>
-              </a:ext>
-            </a:extLst>
-          </p:cNvPr>
-          <p:cNvSpPr txBox="1"/>
-          <p:nvPr/>
-        </p:nvSpPr>
-        <p:spPr>
-          <a:xfrm>
-            <a:off x="6654802" y="3907597"/>
-            <a:ext cx="570089" cy="230832"/>
-          </a:xfrm>
-          <a:prstGeom prst="rect">
-            <a:avLst/>
-          </a:prstGeom>
-          <a:noFill/>
-        </p:spPr>
-        <p:txBody>
-          <a:bodyPr wrap="square" rtlCol="0">
-            <a:spAutoFit/>
-          </a:bodyPr>
-          <a:lstStyle/>
-          <a:p>
-            <a:pPr algn="ctr"/>
-            <a:r>
-              <a:rPr lang="en-US" sz="900" dirty="0"/>
-              <a:t>123456</a:t>
-            </a:r>
-          </a:p>
-        </p:txBody>
-      </p:sp>
-      <p:sp>
-        <p:nvSpPr>
-          <p:cNvPr id="152" name="TextBox 151">
-            <a:extLst>
-              <a:ext uri="{FF2B5EF4-FFF2-40B4-BE49-F238E27FC236}">
-                <a16:creationId xmlns:a16="http://schemas.microsoft.com/office/drawing/2014/main" id="{A681B4FA-13DF-E7EA-AEDD-539F1C5A6863}"/>
-              </a:ext>
-            </a:extLst>
-          </p:cNvPr>
-          <p:cNvSpPr txBox="1"/>
-          <p:nvPr/>
-        </p:nvSpPr>
-        <p:spPr>
-          <a:xfrm>
-            <a:off x="7157158" y="3907597"/>
-            <a:ext cx="570089" cy="230832"/>
-          </a:xfrm>
-          <a:prstGeom prst="rect">
-            <a:avLst/>
-          </a:prstGeom>
-          <a:noFill/>
-        </p:spPr>
-        <p:txBody>
-          <a:bodyPr wrap="square" rtlCol="0">
-            <a:spAutoFit/>
-          </a:bodyPr>
-          <a:lstStyle/>
-          <a:p>
-            <a:pPr algn="ctr"/>
-            <a:r>
-              <a:rPr lang="en-US" sz="900" dirty="0"/>
-              <a:t>123456</a:t>
-            </a:r>
-          </a:p>
-        </p:txBody>
-      </p:sp>
-      <p:sp>
-        <p:nvSpPr>
-          <p:cNvPr id="153" name="TextBox 152">
-            <a:extLst>
-              <a:ext uri="{FF2B5EF4-FFF2-40B4-BE49-F238E27FC236}">
-                <a16:creationId xmlns:a16="http://schemas.microsoft.com/office/drawing/2014/main" id="{8F4E1726-459B-BA4F-257C-46D897E29F45}"/>
-              </a:ext>
-            </a:extLst>
-          </p:cNvPr>
-          <p:cNvSpPr txBox="1"/>
-          <p:nvPr/>
-        </p:nvSpPr>
-        <p:spPr>
-          <a:xfrm>
-            <a:off x="3138310" y="3907597"/>
-            <a:ext cx="570089" cy="230832"/>
-          </a:xfrm>
-          <a:prstGeom prst="rect">
-            <a:avLst/>
-          </a:prstGeom>
-          <a:noFill/>
-        </p:spPr>
-        <p:txBody>
-          <a:bodyPr wrap="square" rtlCol="0">
-            <a:spAutoFit/>
-          </a:bodyPr>
-          <a:lstStyle/>
-          <a:p>
-            <a:pPr algn="ctr"/>
-            <a:r>
-              <a:rPr lang="en-US" sz="900" dirty="0"/>
-              <a:t>123456</a:t>
-            </a:r>
-          </a:p>
-        </p:txBody>
-      </p:sp>
-      <p:sp>
-        <p:nvSpPr>
-          <p:cNvPr id="155" name="TextBox 154">
-            <a:extLst>
-              <a:ext uri="{FF2B5EF4-FFF2-40B4-BE49-F238E27FC236}">
-                <a16:creationId xmlns:a16="http://schemas.microsoft.com/office/drawing/2014/main" id="{98CFC7CE-FA28-1A2E-31D2-BBAEDC468CCB}"/>
-              </a:ext>
-            </a:extLst>
-          </p:cNvPr>
-          <p:cNvSpPr txBox="1"/>
-          <p:nvPr/>
-        </p:nvSpPr>
-        <p:spPr>
-          <a:xfrm>
-            <a:off x="3640666" y="4408541"/>
-            <a:ext cx="570089" cy="230832"/>
-          </a:xfrm>
-          <a:prstGeom prst="rect">
-            <a:avLst/>
-          </a:prstGeom>
-          <a:noFill/>
-        </p:spPr>
-        <p:txBody>
-          <a:bodyPr wrap="square" rtlCol="0">
-            <a:spAutoFit/>
-          </a:bodyPr>
-          <a:lstStyle/>
-          <a:p>
-            <a:pPr algn="ctr"/>
-            <a:r>
-              <a:rPr lang="en-US" sz="900" dirty="0"/>
-              <a:t>123456</a:t>
-            </a:r>
-          </a:p>
-        </p:txBody>
-      </p:sp>
-      <p:sp>
-        <p:nvSpPr>
-          <p:cNvPr id="156" name="TextBox 155">
-            <a:extLst>
-              <a:ext uri="{FF2B5EF4-FFF2-40B4-BE49-F238E27FC236}">
-                <a16:creationId xmlns:a16="http://schemas.microsoft.com/office/drawing/2014/main" id="{E476A475-2835-A999-0397-DC5453A255A4}"/>
-              </a:ext>
-            </a:extLst>
-          </p:cNvPr>
-          <p:cNvSpPr txBox="1"/>
-          <p:nvPr/>
-        </p:nvSpPr>
-        <p:spPr>
-          <a:xfrm>
-            <a:off x="4143022" y="4408541"/>
-            <a:ext cx="570089" cy="230832"/>
-          </a:xfrm>
-          <a:prstGeom prst="rect">
-            <a:avLst/>
-          </a:prstGeom>
-          <a:noFill/>
-        </p:spPr>
-        <p:txBody>
-          <a:bodyPr wrap="square" rtlCol="0">
-            <a:spAutoFit/>
-          </a:bodyPr>
-          <a:lstStyle/>
-          <a:p>
-            <a:pPr algn="ctr"/>
-            <a:r>
-              <a:rPr lang="en-US" sz="900" dirty="0"/>
-              <a:t>123456</a:t>
-            </a:r>
-          </a:p>
-        </p:txBody>
-      </p:sp>
-      <p:sp>
-        <p:nvSpPr>
-          <p:cNvPr id="157" name="TextBox 156">
-            <a:extLst>
-              <a:ext uri="{FF2B5EF4-FFF2-40B4-BE49-F238E27FC236}">
-                <a16:creationId xmlns:a16="http://schemas.microsoft.com/office/drawing/2014/main" id="{11DFBA62-EDF5-5E66-D6C2-CEFB9B6EB6F4}"/>
-              </a:ext>
-            </a:extLst>
-          </p:cNvPr>
-          <p:cNvSpPr txBox="1"/>
-          <p:nvPr/>
-        </p:nvSpPr>
-        <p:spPr>
-          <a:xfrm>
-            <a:off x="4645378" y="4408541"/>
-            <a:ext cx="570089" cy="230832"/>
-          </a:xfrm>
-          <a:prstGeom prst="rect">
-            <a:avLst/>
-          </a:prstGeom>
-          <a:noFill/>
-        </p:spPr>
-        <p:txBody>
-          <a:bodyPr wrap="square" rtlCol="0">
-            <a:spAutoFit/>
-          </a:bodyPr>
-          <a:lstStyle/>
-          <a:p>
-            <a:pPr algn="ctr"/>
-            <a:r>
-              <a:rPr lang="en-US" sz="900" dirty="0"/>
-              <a:t>123456</a:t>
-            </a:r>
-          </a:p>
-        </p:txBody>
-      </p:sp>
-      <p:sp>
-        <p:nvSpPr>
-          <p:cNvPr id="158" name="TextBox 157">
-            <a:extLst>
-              <a:ext uri="{FF2B5EF4-FFF2-40B4-BE49-F238E27FC236}">
-                <a16:creationId xmlns:a16="http://schemas.microsoft.com/office/drawing/2014/main" id="{1CDAE45F-FE33-B2CA-5F56-FB8074081DF5}"/>
-              </a:ext>
-            </a:extLst>
-          </p:cNvPr>
-          <p:cNvSpPr txBox="1"/>
-          <p:nvPr/>
-        </p:nvSpPr>
-        <p:spPr>
-          <a:xfrm>
-            <a:off x="5147734" y="4408541"/>
-            <a:ext cx="570089" cy="230832"/>
-          </a:xfrm>
-          <a:prstGeom prst="rect">
-            <a:avLst/>
-          </a:prstGeom>
-          <a:noFill/>
-        </p:spPr>
-        <p:txBody>
-          <a:bodyPr wrap="square" rtlCol="0">
-            <a:spAutoFit/>
-          </a:bodyPr>
-          <a:lstStyle/>
-          <a:p>
-            <a:pPr algn="ctr"/>
-            <a:r>
-              <a:rPr lang="en-US" sz="900" dirty="0"/>
-              <a:t>123456</a:t>
-            </a:r>
-          </a:p>
-        </p:txBody>
-      </p:sp>
-      <p:sp>
-        <p:nvSpPr>
-          <p:cNvPr id="159" name="TextBox 158">
-            <a:extLst>
-              <a:ext uri="{FF2B5EF4-FFF2-40B4-BE49-F238E27FC236}">
-                <a16:creationId xmlns:a16="http://schemas.microsoft.com/office/drawing/2014/main" id="{347E677D-6A96-11F9-1CC6-6869D0DB1900}"/>
-              </a:ext>
-            </a:extLst>
-          </p:cNvPr>
-          <p:cNvSpPr txBox="1"/>
-          <p:nvPr/>
-        </p:nvSpPr>
-        <p:spPr>
-          <a:xfrm>
-            <a:off x="5650090" y="4408541"/>
-            <a:ext cx="570089" cy="230832"/>
-          </a:xfrm>
-          <a:prstGeom prst="rect">
-            <a:avLst/>
-          </a:prstGeom>
-          <a:noFill/>
-        </p:spPr>
-        <p:txBody>
-          <a:bodyPr wrap="square" rtlCol="0">
-            <a:spAutoFit/>
-          </a:bodyPr>
-          <a:lstStyle/>
-          <a:p>
-            <a:pPr algn="ctr"/>
-            <a:r>
-              <a:rPr lang="en-US" sz="900" dirty="0"/>
-              <a:t>123456</a:t>
-            </a:r>
-          </a:p>
-        </p:txBody>
-      </p:sp>
-      <p:sp>
-        <p:nvSpPr>
-          <p:cNvPr id="160" name="TextBox 159">
-            <a:extLst>
-              <a:ext uri="{FF2B5EF4-FFF2-40B4-BE49-F238E27FC236}">
-                <a16:creationId xmlns:a16="http://schemas.microsoft.com/office/drawing/2014/main" id="{07B0AC8A-C41D-56EC-5EF0-754BBB160E72}"/>
-              </a:ext>
-            </a:extLst>
-          </p:cNvPr>
-          <p:cNvSpPr txBox="1"/>
-          <p:nvPr/>
-        </p:nvSpPr>
-        <p:spPr>
-          <a:xfrm>
-            <a:off x="6152446" y="4408541"/>
-            <a:ext cx="570089" cy="230832"/>
-          </a:xfrm>
-          <a:prstGeom prst="rect">
-            <a:avLst/>
-          </a:prstGeom>
-          <a:noFill/>
-        </p:spPr>
-        <p:txBody>
-          <a:bodyPr wrap="square" rtlCol="0">
-            <a:spAutoFit/>
-          </a:bodyPr>
-          <a:lstStyle/>
-          <a:p>
-            <a:pPr algn="ctr"/>
-            <a:r>
-              <a:rPr lang="en-US" sz="900" dirty="0"/>
-              <a:t>123456</a:t>
-            </a:r>
-          </a:p>
-        </p:txBody>
-      </p:sp>
-      <p:sp>
-        <p:nvSpPr>
-          <p:cNvPr id="161" name="TextBox 160">
-            <a:extLst>
-              <a:ext uri="{FF2B5EF4-FFF2-40B4-BE49-F238E27FC236}">
-                <a16:creationId xmlns:a16="http://schemas.microsoft.com/office/drawing/2014/main" id="{90BEB1FD-B867-9020-CDAC-CA4518233490}"/>
-              </a:ext>
-            </a:extLst>
-          </p:cNvPr>
-          <p:cNvSpPr txBox="1"/>
-          <p:nvPr/>
-        </p:nvSpPr>
-        <p:spPr>
-          <a:xfrm>
-            <a:off x="6654802" y="4408541"/>
-            <a:ext cx="570089" cy="230832"/>
-          </a:xfrm>
-          <a:prstGeom prst="rect">
-            <a:avLst/>
-          </a:prstGeom>
-          <a:noFill/>
-        </p:spPr>
-        <p:txBody>
-          <a:bodyPr wrap="square" rtlCol="0">
-            <a:spAutoFit/>
-          </a:bodyPr>
-          <a:lstStyle/>
-          <a:p>
-            <a:pPr algn="ctr"/>
-            <a:r>
-              <a:rPr lang="en-US" sz="900" dirty="0"/>
-              <a:t>123456</a:t>
-            </a:r>
-          </a:p>
-        </p:txBody>
-      </p:sp>
-      <p:sp>
-        <p:nvSpPr>
-          <p:cNvPr id="162" name="TextBox 161">
-            <a:extLst>
-              <a:ext uri="{FF2B5EF4-FFF2-40B4-BE49-F238E27FC236}">
-                <a16:creationId xmlns:a16="http://schemas.microsoft.com/office/drawing/2014/main" id="{4FDCDC74-3BE5-350D-3561-28BD95A47BFB}"/>
-              </a:ext>
-            </a:extLst>
-          </p:cNvPr>
-          <p:cNvSpPr txBox="1"/>
-          <p:nvPr/>
-        </p:nvSpPr>
-        <p:spPr>
-          <a:xfrm>
-            <a:off x="7157158" y="4408541"/>
-            <a:ext cx="570089" cy="230832"/>
-          </a:xfrm>
-          <a:prstGeom prst="rect">
-            <a:avLst/>
-          </a:prstGeom>
-          <a:noFill/>
-        </p:spPr>
-        <p:txBody>
-          <a:bodyPr wrap="square" rtlCol="0">
-            <a:spAutoFit/>
-          </a:bodyPr>
-          <a:lstStyle/>
-          <a:p>
-            <a:pPr algn="ctr"/>
-            <a:r>
-              <a:rPr lang="en-US" sz="900" dirty="0"/>
-              <a:t>123456</a:t>
-            </a:r>
-          </a:p>
-        </p:txBody>
-      </p:sp>
-      <p:sp>
-        <p:nvSpPr>
-          <p:cNvPr id="163" name="TextBox 162">
-            <a:extLst>
-              <a:ext uri="{FF2B5EF4-FFF2-40B4-BE49-F238E27FC236}">
-                <a16:creationId xmlns:a16="http://schemas.microsoft.com/office/drawing/2014/main" id="{1F11623A-5281-10E1-02C5-67D61644E2E4}"/>
-              </a:ext>
-            </a:extLst>
-          </p:cNvPr>
-          <p:cNvSpPr txBox="1"/>
-          <p:nvPr/>
-        </p:nvSpPr>
-        <p:spPr>
-          <a:xfrm>
-            <a:off x="3138310" y="4408541"/>
-            <a:ext cx="570089" cy="230832"/>
-          </a:xfrm>
-          <a:prstGeom prst="rect">
-            <a:avLst/>
-          </a:prstGeom>
-          <a:noFill/>
-        </p:spPr>
-        <p:txBody>
-          <a:bodyPr wrap="square" rtlCol="0">
-            <a:spAutoFit/>
-          </a:bodyPr>
-          <a:lstStyle/>
-          <a:p>
-            <a:pPr algn="ctr"/>
-            <a:r>
-              <a:rPr lang="en-US" sz="900" dirty="0"/>
-              <a:t>123456</a:t>
-            </a:r>
-          </a:p>
-        </p:txBody>
-      </p:sp>
-      <p:sp>
-        <p:nvSpPr>
-          <p:cNvPr id="165" name="TextBox 164">
-            <a:extLst>
-              <a:ext uri="{FF2B5EF4-FFF2-40B4-BE49-F238E27FC236}">
-                <a16:creationId xmlns:a16="http://schemas.microsoft.com/office/drawing/2014/main" id="{2682B44B-DA2F-482D-8445-E24A812F6CA4}"/>
-              </a:ext>
-            </a:extLst>
-          </p:cNvPr>
-          <p:cNvSpPr txBox="1"/>
-          <p:nvPr/>
-        </p:nvSpPr>
-        <p:spPr>
-          <a:xfrm>
-            <a:off x="3640666" y="4909484"/>
-            <a:ext cx="570089" cy="230832"/>
-          </a:xfrm>
-          <a:prstGeom prst="rect">
-            <a:avLst/>
-          </a:prstGeom>
-          <a:noFill/>
-        </p:spPr>
-        <p:txBody>
-          <a:bodyPr wrap="square" rtlCol="0">
-            <a:spAutoFit/>
-          </a:bodyPr>
-          <a:lstStyle/>
-          <a:p>
-            <a:pPr algn="ctr"/>
-            <a:r>
-              <a:rPr lang="en-US" sz="900" dirty="0"/>
-              <a:t>123456</a:t>
-            </a:r>
-          </a:p>
-        </p:txBody>
-      </p:sp>
-      <p:sp>
-        <p:nvSpPr>
-          <p:cNvPr id="166" name="TextBox 165">
-            <a:extLst>
-              <a:ext uri="{FF2B5EF4-FFF2-40B4-BE49-F238E27FC236}">
-                <a16:creationId xmlns:a16="http://schemas.microsoft.com/office/drawing/2014/main" id="{A8894DEB-CF9E-546B-EB23-999174D037FB}"/>
-              </a:ext>
-            </a:extLst>
-          </p:cNvPr>
-          <p:cNvSpPr txBox="1"/>
-          <p:nvPr/>
-        </p:nvSpPr>
-        <p:spPr>
-          <a:xfrm>
-            <a:off x="4143022" y="4909484"/>
-            <a:ext cx="570089" cy="230832"/>
-          </a:xfrm>
-          <a:prstGeom prst="rect">
-            <a:avLst/>
-          </a:prstGeom>
-          <a:noFill/>
-        </p:spPr>
-        <p:txBody>
-          <a:bodyPr wrap="square" rtlCol="0">
-            <a:spAutoFit/>
-          </a:bodyPr>
-          <a:lstStyle/>
-          <a:p>
-            <a:pPr algn="ctr"/>
-            <a:r>
-              <a:rPr lang="en-US" sz="900" dirty="0"/>
-              <a:t>123456</a:t>
-            </a:r>
-          </a:p>
-        </p:txBody>
-      </p:sp>
-      <p:sp>
-        <p:nvSpPr>
-          <p:cNvPr id="167" name="TextBox 166">
-            <a:extLst>
-              <a:ext uri="{FF2B5EF4-FFF2-40B4-BE49-F238E27FC236}">
-                <a16:creationId xmlns:a16="http://schemas.microsoft.com/office/drawing/2014/main" id="{9256DDD0-CB71-FF08-1010-15DEE7B70F24}"/>
-              </a:ext>
-            </a:extLst>
-          </p:cNvPr>
-          <p:cNvSpPr txBox="1"/>
-          <p:nvPr/>
-        </p:nvSpPr>
-        <p:spPr>
-          <a:xfrm>
-            <a:off x="4645378" y="4909484"/>
-            <a:ext cx="570089" cy="230832"/>
-          </a:xfrm>
-          <a:prstGeom prst="rect">
-            <a:avLst/>
-          </a:prstGeom>
-          <a:noFill/>
-        </p:spPr>
-        <p:txBody>
-          <a:bodyPr wrap="square" rtlCol="0">
-            <a:spAutoFit/>
-          </a:bodyPr>
-          <a:lstStyle/>
-          <a:p>
-            <a:pPr algn="ctr"/>
-            <a:r>
-              <a:rPr lang="en-US" sz="900" dirty="0"/>
-              <a:t>123456</a:t>
-            </a:r>
-          </a:p>
-        </p:txBody>
-      </p:sp>
-      <p:sp>
-        <p:nvSpPr>
-          <p:cNvPr id="168" name="TextBox 167">
-            <a:extLst>
-              <a:ext uri="{FF2B5EF4-FFF2-40B4-BE49-F238E27FC236}">
-                <a16:creationId xmlns:a16="http://schemas.microsoft.com/office/drawing/2014/main" id="{424EA77B-D2FD-45E3-204C-60FB3D79A469}"/>
-              </a:ext>
-            </a:extLst>
-          </p:cNvPr>
-          <p:cNvSpPr txBox="1"/>
-          <p:nvPr/>
-        </p:nvSpPr>
-        <p:spPr>
-          <a:xfrm>
-            <a:off x="5147734" y="4909484"/>
-            <a:ext cx="570089" cy="230832"/>
-          </a:xfrm>
-          <a:prstGeom prst="rect">
-            <a:avLst/>
-          </a:prstGeom>
-          <a:noFill/>
-        </p:spPr>
-        <p:txBody>
-          <a:bodyPr wrap="square" rtlCol="0">
-            <a:spAutoFit/>
-          </a:bodyPr>
-          <a:lstStyle/>
-          <a:p>
-            <a:pPr algn="ctr"/>
-            <a:r>
-              <a:rPr lang="en-US" sz="900" dirty="0"/>
-              <a:t>123456</a:t>
-            </a:r>
-          </a:p>
-        </p:txBody>
-      </p:sp>
-      <p:sp>
-        <p:nvSpPr>
-          <p:cNvPr id="169" name="TextBox 168">
-            <a:extLst>
-              <a:ext uri="{FF2B5EF4-FFF2-40B4-BE49-F238E27FC236}">
-                <a16:creationId xmlns:a16="http://schemas.microsoft.com/office/drawing/2014/main" id="{1E16BB3C-AC1E-82D8-06AE-1D6C2284F52E}"/>
-              </a:ext>
-            </a:extLst>
-          </p:cNvPr>
-          <p:cNvSpPr txBox="1"/>
-          <p:nvPr/>
-        </p:nvSpPr>
-        <p:spPr>
-          <a:xfrm>
-            <a:off x="5650090" y="4909484"/>
-            <a:ext cx="570089" cy="230832"/>
-          </a:xfrm>
-          <a:prstGeom prst="rect">
-            <a:avLst/>
-          </a:prstGeom>
-          <a:noFill/>
-        </p:spPr>
-        <p:txBody>
-          <a:bodyPr wrap="square" rtlCol="0">
-            <a:spAutoFit/>
-          </a:bodyPr>
-          <a:lstStyle/>
-          <a:p>
-            <a:pPr algn="ctr"/>
-            <a:r>
-              <a:rPr lang="en-US" sz="900" dirty="0"/>
-              <a:t>123456</a:t>
-            </a:r>
-          </a:p>
-        </p:txBody>
-      </p:sp>
-      <p:sp>
-        <p:nvSpPr>
-          <p:cNvPr id="170" name="TextBox 169">
-            <a:extLst>
-              <a:ext uri="{FF2B5EF4-FFF2-40B4-BE49-F238E27FC236}">
-                <a16:creationId xmlns:a16="http://schemas.microsoft.com/office/drawing/2014/main" id="{C5623CD4-A44B-2A55-FCF5-2A5B925F2A89}"/>
-              </a:ext>
-            </a:extLst>
-          </p:cNvPr>
-          <p:cNvSpPr txBox="1"/>
-          <p:nvPr/>
-        </p:nvSpPr>
-        <p:spPr>
-          <a:xfrm>
-            <a:off x="6152446" y="4909484"/>
-            <a:ext cx="570089" cy="230832"/>
-          </a:xfrm>
-          <a:prstGeom prst="rect">
-            <a:avLst/>
-          </a:prstGeom>
-          <a:noFill/>
-        </p:spPr>
-        <p:txBody>
-          <a:bodyPr wrap="square" rtlCol="0">
-            <a:spAutoFit/>
-          </a:bodyPr>
-          <a:lstStyle/>
-          <a:p>
-            <a:pPr algn="ctr"/>
-            <a:r>
-              <a:rPr lang="en-US" sz="900" dirty="0"/>
-              <a:t>123456</a:t>
-            </a:r>
-          </a:p>
-        </p:txBody>
-      </p:sp>
-      <p:sp>
-        <p:nvSpPr>
-          <p:cNvPr id="171" name="TextBox 170">
-            <a:extLst>
-              <a:ext uri="{FF2B5EF4-FFF2-40B4-BE49-F238E27FC236}">
-                <a16:creationId xmlns:a16="http://schemas.microsoft.com/office/drawing/2014/main" id="{1D89E19F-9755-F643-1830-EB37CAECB7C9}"/>
-              </a:ext>
-            </a:extLst>
-          </p:cNvPr>
-          <p:cNvSpPr txBox="1"/>
-          <p:nvPr/>
-        </p:nvSpPr>
-        <p:spPr>
-          <a:xfrm>
-            <a:off x="6654802" y="4909484"/>
-            <a:ext cx="570089" cy="230832"/>
-          </a:xfrm>
-          <a:prstGeom prst="rect">
-            <a:avLst/>
-          </a:prstGeom>
-          <a:noFill/>
-        </p:spPr>
-        <p:txBody>
-          <a:bodyPr wrap="square" rtlCol="0">
-            <a:spAutoFit/>
-          </a:bodyPr>
-          <a:lstStyle/>
-          <a:p>
-            <a:pPr algn="ctr"/>
-            <a:r>
-              <a:rPr lang="en-US" sz="900" dirty="0"/>
-              <a:t>123456</a:t>
-            </a:r>
-          </a:p>
-        </p:txBody>
-      </p:sp>
-      <p:sp>
-        <p:nvSpPr>
-          <p:cNvPr id="172" name="TextBox 171">
-            <a:extLst>
-              <a:ext uri="{FF2B5EF4-FFF2-40B4-BE49-F238E27FC236}">
-                <a16:creationId xmlns:a16="http://schemas.microsoft.com/office/drawing/2014/main" id="{14D70CDE-B490-E358-E7D2-A1A45E2D2908}"/>
-              </a:ext>
-            </a:extLst>
-          </p:cNvPr>
-          <p:cNvSpPr txBox="1"/>
-          <p:nvPr/>
-        </p:nvSpPr>
-        <p:spPr>
-          <a:xfrm>
-            <a:off x="7157158" y="4909484"/>
-            <a:ext cx="570089" cy="230832"/>
-          </a:xfrm>
-          <a:prstGeom prst="rect">
-            <a:avLst/>
-          </a:prstGeom>
-          <a:noFill/>
-        </p:spPr>
-        <p:txBody>
-          <a:bodyPr wrap="square" rtlCol="0">
-            <a:spAutoFit/>
-          </a:bodyPr>
-          <a:lstStyle/>
-          <a:p>
-            <a:pPr algn="ctr"/>
-            <a:r>
-              <a:rPr lang="en-US" sz="900" dirty="0"/>
-              <a:t>123456</a:t>
-            </a:r>
-          </a:p>
-        </p:txBody>
-      </p:sp>
-      <p:sp>
-        <p:nvSpPr>
-          <p:cNvPr id="173" name="TextBox 172">
-            <a:extLst>
-              <a:ext uri="{FF2B5EF4-FFF2-40B4-BE49-F238E27FC236}">
-                <a16:creationId xmlns:a16="http://schemas.microsoft.com/office/drawing/2014/main" id="{335508B5-6B0F-5193-AF19-4B3C12FA6976}"/>
-              </a:ext>
-            </a:extLst>
-          </p:cNvPr>
-          <p:cNvSpPr txBox="1"/>
-          <p:nvPr/>
-        </p:nvSpPr>
-        <p:spPr>
-          <a:xfrm>
-            <a:off x="3138310" y="4909484"/>
-            <a:ext cx="570089" cy="230832"/>
-          </a:xfrm>
-          <a:prstGeom prst="rect">
-            <a:avLst/>
-          </a:prstGeom>
-          <a:noFill/>
-        </p:spPr>
-        <p:txBody>
-          <a:bodyPr wrap="square" rtlCol="0">
-            <a:spAutoFit/>
-          </a:bodyPr>
-          <a:lstStyle/>
-          <a:p>
-            <a:pPr algn="ctr"/>
-            <a:r>
-              <a:rPr lang="en-US" sz="900" dirty="0"/>
-              <a:t>123456</a:t>
-            </a:r>
-          </a:p>
-        </p:txBody>
-      </p:sp>
-    </p:spTree>
-    <p:extLst>
-      <p:ext uri="{BB962C8B-B14F-4D97-AF65-F5344CB8AC3E}">
-        <p14:creationId xmlns:p14="http://schemas.microsoft.com/office/powerpoint/2010/main" val="2598633295"/>
       </p:ext>
     </p:extLst>
   </p:cSld>
